--- a/docs/FY27 EMEA EPS - Fabric Apps Motion - Micro Hack.pptx
+++ b/docs/FY27 EMEA EPS - Fabric Apps Motion - Micro Hack.pptx
@@ -19863,9 +19863,11 @@
                 <a:ea typeface="Calibri" pitchFamily="34" charset="-122"/>
                 <a:cs typeface="Calibri" pitchFamily="34" charset="-120"/>
               </a:rPr>
-              <a:t>Customer 1
-</a:t>
-            </a:r>
+              <a:t>Customer 1</a:t>
+            </a:r>
+            <a:endParaRPr lang="en-US" sz="1100" dirty="0"/>
+          </a:p>
+          <a:p>
             <a:pPr algn="ctr" indent="0" marL="0">
               <a:buNone/>
             </a:pPr>
@@ -19992,9 +19994,11 @@
                 <a:ea typeface="Calibri" pitchFamily="34" charset="-122"/>
                 <a:cs typeface="Calibri" pitchFamily="34" charset="-120"/>
               </a:rPr>
-              <a:t>Customer 2
-</a:t>
-            </a:r>
+              <a:t>Customer 2</a:t>
+            </a:r>
+            <a:endParaRPr lang="en-US" sz="1100" dirty="0"/>
+          </a:p>
+          <a:p>
             <a:pPr algn="ctr" indent="0" marL="0">
               <a:buNone/>
             </a:pPr>
@@ -20121,9 +20125,11 @@
                 <a:ea typeface="Calibri" pitchFamily="34" charset="-122"/>
                 <a:cs typeface="Calibri" pitchFamily="34" charset="-120"/>
               </a:rPr>
-              <a:t>Customer N
-</a:t>
-            </a:r>
+              <a:t>Customer N</a:t>
+            </a:r>
+            <a:endParaRPr lang="en-US" sz="1100" dirty="0"/>
+          </a:p>
+          <a:p>
             <a:pPr algn="ctr" indent="0" marL="0">
               <a:buNone/>
             </a:pPr>

--- a/docs/FY27 EMEA EPS - Fabric Apps Motion - Micro Hack.pptx
+++ b/docs/FY27 EMEA EPS - Fabric Apps Motion - Micro Hack.pptx
@@ -11090,9 +11090,9 @@
           <p:nvPr/>
         </p:nvSpPr>
         <p:spPr>
-          <a:xfrm>
-            <a:off x="6995160" y="2468880"/>
-            <a:ext cx="502920" cy="-45720"/>
+          <a:xfrm flipV="1">
+            <a:off x="6995160" y="2423160"/>
+            <a:ext cx="502920" cy="45720"/>
           </a:xfrm>
           <a:prstGeom prst="line">
             <a:avLst/>

--- a/docs/FY27 EMEA EPS - Fabric Apps Motion - Micro Hack.pptx
+++ b/docs/FY27 EMEA EPS - Fabric Apps Motion - Micro Hack.pptx
@@ -4,6 +4,9 @@
   <p:sldMasterIdLst>
     <p:sldMasterId id="2147483648" r:id="rId1"/>
   </p:sldMasterIdLst>
+  <p:notesMasterIdLst>
+    <p:notesMasterId r:id="rId17"/>
+  </p:notesMasterIdLst>
   <p:sldIdLst>
     <p:sldId id="256" r:id="rId2"/>
     <p:sldId id="257" r:id="rId3"/>
@@ -21,11 +24,8 @@
     <p:sldId id="269" r:id="rId15"/>
     <p:sldId id="270" r:id="rId16"/>
   </p:sldIdLst>
-  <p:notesMasterIdLst>
-    <p:notesMasterId r:id="rId17"/>
-  </p:notesMasterIdLst>
-  <p:sldSz cx="12191695" cy="6858000"/>
-  <p:notesSz cx="6858000" cy="12191695"/>
+  <p:sldSz cx="12192000" cy="6858000"/>
+  <p:notesSz cx="6858000" cy="12192000"/>
   <p:defaultTextStyle>
     <a:lvl1pPr marL="0" algn="l" defTabSz="914400" rtl="0" eaLnBrk="1" latinLnBrk="0" hangingPunct="1">
       <a:defRPr sz="1800" kern="1200">
@@ -118,6 +118,11 @@
       </a:defRPr>
     </a:lvl9pPr>
   </p:defaultTextStyle>
+  <p:extLst>
+    <p:ext uri="{EFAFB233-063F-42B5-8137-9DF3F51BA10A}">
+      <p15:sldGuideLst xmlns:p15="http://schemas.microsoft.com/office/powerpoint/2012/main"/>
+    </p:ext>
+  </p:extLst>
 </p:presentation>
 </file>
 
@@ -143,234 +148,10 @@
           <a:chExt cx="0" cy="0"/>
         </a:xfrm>
       </p:grpSpPr>
-      <p:sp>
-        <p:nvSpPr>
-          <p:cNvPr id="2" name="Header Placeholder 1"/>
-          <p:cNvSpPr>
-            <a:spLocks noGrp="1"/>
-          </p:cNvSpPr>
-          <p:nvPr>
-            <p:ph type="hdr" sz="quarter"/>
-          </p:nvPr>
-        </p:nvSpPr>
-        <p:spPr>
-          <a:xfrm>
-            <a:off x="0" y="0"/>
-            <a:ext cx="2971800" cy="458788"/>
-          </a:xfrm>
-          <a:prstGeom prst="rect">
-            <a:avLst/>
-          </a:prstGeom>
-        </p:spPr>
-        <p:txBody>
-          <a:bodyPr vert="horz" lIns="91440" tIns="45720" rIns="91440" bIns="45720" rtlCol="0"/>
-          <a:lstStyle>
-            <a:lvl1pPr algn="l">
-              <a:defRPr sz="1200"/>
-            </a:lvl1pPr>
-          </a:lstStyle>
-          <a:p>
-            <a:endParaRPr lang="en-US"/>
-          </a:p>
-        </p:txBody>
-      </p:sp>
-      <p:sp>
-        <p:nvSpPr>
-          <p:cNvPr id="3" name="Date Placeholder 2"/>
-          <p:cNvSpPr>
-            <a:spLocks noGrp="1"/>
-          </p:cNvSpPr>
-          <p:nvPr>
-            <p:ph type="dt" idx="1"/>
-          </p:nvPr>
-        </p:nvSpPr>
-        <p:spPr>
-          <a:xfrm>
-            <a:off x="3884613" y="0"/>
-            <a:ext cx="2971800" cy="458788"/>
-          </a:xfrm>
-          <a:prstGeom prst="rect">
-            <a:avLst/>
-          </a:prstGeom>
-        </p:spPr>
-        <p:txBody>
-          <a:bodyPr vert="horz" lIns="91440" tIns="45720" rIns="91440" bIns="45720" rtlCol="0"/>
-          <a:lstStyle>
-            <a:lvl1pPr algn="r">
-              <a:defRPr sz="1200"/>
-            </a:lvl1pPr>
-          </a:lstStyle>
-          <a:p>
-            <a:fld id="{5282F153-3F37-0F45-9E97-73ACFA13230C}" type="datetimeFigureOut">
-              <a:rPr lang="en-US"/>
-              <a:t>7/23/19</a:t>
-            </a:fld>
-            <a:endParaRPr lang="en-US"/>
-          </a:p>
-        </p:txBody>
-      </p:sp>
-      <p:sp>
-        <p:nvSpPr>
-          <p:cNvPr id="4" name="Slide Image Placeholder 3"/>
-          <p:cNvSpPr>
-            <a:spLocks noGrp="1" noRot="1" noChangeAspect="1"/>
-          </p:cNvSpPr>
-          <p:nvPr>
-            <p:ph type="sldImg" idx="2"/>
-          </p:nvPr>
-        </p:nvSpPr>
-        <p:spPr>
-          <a:xfrm>
-            <a:off x="685800" y="1143000"/>
-            <a:ext cx="5486400" cy="3086100"/>
-          </a:xfrm>
-          <a:prstGeom prst="rect">
-            <a:avLst/>
-          </a:prstGeom>
-          <a:noFill/>
-          <a:ln w="12700">
-            <a:solidFill>
-              <a:prstClr val="black"/>
-            </a:solidFill>
-          </a:ln>
-        </p:spPr>
-        <p:txBody>
-          <a:bodyPr vert="horz" lIns="91440" tIns="45720" rIns="91440" bIns="45720" rtlCol="0" anchor="ctr"/>
-          <a:lstStyle/>
-          <a:p>
-            <a:endParaRPr lang="en-US"/>
-          </a:p>
-        </p:txBody>
-      </p:sp>
-      <p:sp>
-        <p:nvSpPr>
-          <p:cNvPr id="5" name="Notes Placeholder 4"/>
-          <p:cNvSpPr>
-            <a:spLocks noGrp="1"/>
-          </p:cNvSpPr>
-          <p:nvPr>
-            <p:ph type="body" sz="quarter" idx="3"/>
-          </p:nvPr>
-        </p:nvSpPr>
-        <p:spPr>
-          <a:xfrm>
-            <a:off x="685800" y="4400550"/>
-            <a:ext cx="5486400" cy="3600450"/>
-          </a:xfrm>
-          <a:prstGeom prst="rect">
-            <a:avLst/>
-          </a:prstGeom>
-        </p:spPr>
-        <p:txBody>
-          <a:bodyPr vert="horz" lIns="91440" tIns="45720" rIns="91440" bIns="45720" rtlCol="0"/>
-          <a:lstStyle/>
-          <a:p>
-            <a:pPr lvl="0"/>
-            <a:r>
-              <a:rPr lang="en-US"/>
-              <a:t>Click to edit Master text styles</a:t>
-            </a:r>
-          </a:p>
-          <a:p>
-            <a:pPr lvl="1"/>
-            <a:r>
-              <a:rPr lang="en-US"/>
-              <a:t>Second level</a:t>
-            </a:r>
-          </a:p>
-          <a:p>
-            <a:pPr lvl="2"/>
-            <a:r>
-              <a:rPr lang="en-US"/>
-              <a:t>Third level</a:t>
-            </a:r>
-          </a:p>
-          <a:p>
-            <a:pPr lvl="3"/>
-            <a:r>
-              <a:rPr lang="en-US"/>
-              <a:t>Fourth level</a:t>
-            </a:r>
-          </a:p>
-          <a:p>
-            <a:pPr lvl="4"/>
-            <a:r>
-              <a:rPr lang="en-US"/>
-              <a:t>Fifth level</a:t>
-            </a:r>
-          </a:p>
-        </p:txBody>
-      </p:sp>
-      <p:sp>
-        <p:nvSpPr>
-          <p:cNvPr id="6" name="Footer Placeholder 5"/>
-          <p:cNvSpPr>
-            <a:spLocks noGrp="1"/>
-          </p:cNvSpPr>
-          <p:nvPr>
-            <p:ph type="ftr" sz="quarter" idx="4"/>
-          </p:nvPr>
-        </p:nvSpPr>
-        <p:spPr>
-          <a:xfrm>
-            <a:off x="0" y="8685213"/>
-            <a:ext cx="2971800" cy="458787"/>
-          </a:xfrm>
-          <a:prstGeom prst="rect">
-            <a:avLst/>
-          </a:prstGeom>
-        </p:spPr>
-        <p:txBody>
-          <a:bodyPr vert="horz" lIns="91440" tIns="45720" rIns="91440" bIns="45720" rtlCol="0" anchor="b"/>
-          <a:lstStyle>
-            <a:lvl1pPr algn="l">
-              <a:defRPr sz="1200"/>
-            </a:lvl1pPr>
-          </a:lstStyle>
-          <a:p>
-            <a:endParaRPr lang="en-US"/>
-          </a:p>
-        </p:txBody>
-      </p:sp>
-      <p:sp>
-        <p:nvSpPr>
-          <p:cNvPr id="7" name="Slide Number Placeholder 6"/>
-          <p:cNvSpPr>
-            <a:spLocks noGrp="1"/>
-          </p:cNvSpPr>
-          <p:nvPr>
-            <p:ph type="sldNum" sz="quarter" idx="5"/>
-          </p:nvPr>
-        </p:nvSpPr>
-        <p:spPr>
-          <a:xfrm>
-            <a:off x="3884613" y="8685213"/>
-            <a:ext cx="2971800" cy="458787"/>
-          </a:xfrm>
-          <a:prstGeom prst="rect">
-            <a:avLst/>
-          </a:prstGeom>
-        </p:spPr>
-        <p:txBody>
-          <a:bodyPr vert="horz" lIns="91440" tIns="45720" rIns="91440" bIns="45720" rtlCol="0" anchor="b"/>
-          <a:lstStyle>
-            <a:lvl1pPr algn="r">
-              <a:defRPr sz="1200"/>
-            </a:lvl1pPr>
-          </a:lstStyle>
-          <a:p>
-            <a:fld id="{CE5E9CC1-C706-0F49-92D6-E571CC5EEA8F}" type="slidenum">
-              <a:rPr lang="en-US"/>
-              <a:t>‹#›</a:t>
-            </a:fld>
-            <a:endParaRPr lang="en-US"/>
-          </a:p>
-        </p:txBody>
-      </p:sp>
     </p:spTree>
     <p:extLst>
       <p:ext uri="{BB962C8B-B14F-4D97-AF65-F5344CB8AC3E}">
-        <p14:creationId xmlns:p14="http://schemas.microsoft.com/office/powerpoint/2010/main" val="1024086991"/>
+        <p14:creationId xmlns:p14="http://schemas.microsoft.com/office/powerpoint/2010/main" val="466125388"/>
       </p:ext>
     </p:extLst>
   </p:cSld>
@@ -514,10 +295,6 @@
           <a:bodyPr/>
           <a:lstStyle/>
           <a:p>
-            <a:r>
-              <a:rPr lang="en-US" dirty="0"/>
-              <a:t/>
-            </a:r>
             <a:endParaRPr lang="en-US" dirty="0"/>
           </a:p>
         </p:txBody>
@@ -602,10 +379,6 @@
           <a:bodyPr/>
           <a:lstStyle/>
           <a:p>
-            <a:r>
-              <a:rPr lang="en-US" dirty="0"/>
-              <a:t/>
-            </a:r>
             <a:endParaRPr lang="en-US" dirty="0"/>
           </a:p>
         </p:txBody>
@@ -690,10 +463,6 @@
           <a:bodyPr/>
           <a:lstStyle/>
           <a:p>
-            <a:r>
-              <a:rPr lang="en-US" dirty="0"/>
-              <a:t/>
-            </a:r>
             <a:endParaRPr lang="en-US" dirty="0"/>
           </a:p>
         </p:txBody>
@@ -778,10 +547,6 @@
           <a:bodyPr/>
           <a:lstStyle/>
           <a:p>
-            <a:r>
-              <a:rPr lang="en-US" dirty="0"/>
-              <a:t/>
-            </a:r>
             <a:endParaRPr lang="en-US" dirty="0"/>
           </a:p>
         </p:txBody>
@@ -866,10 +631,6 @@
           <a:bodyPr/>
           <a:lstStyle/>
           <a:p>
-            <a:r>
-              <a:rPr lang="en-US" dirty="0"/>
-              <a:t/>
-            </a:r>
             <a:endParaRPr lang="en-US" dirty="0"/>
           </a:p>
         </p:txBody>
@@ -954,10 +715,6 @@
           <a:bodyPr/>
           <a:lstStyle/>
           <a:p>
-            <a:r>
-              <a:rPr lang="en-US" dirty="0"/>
-              <a:t/>
-            </a:r>
             <a:endParaRPr lang="en-US" dirty="0"/>
           </a:p>
         </p:txBody>
@@ -1042,10 +799,6 @@
           <a:bodyPr/>
           <a:lstStyle/>
           <a:p>
-            <a:r>
-              <a:rPr lang="en-US" dirty="0"/>
-              <a:t/>
-            </a:r>
             <a:endParaRPr lang="en-US" dirty="0"/>
           </a:p>
         </p:txBody>
@@ -1130,10 +883,6 @@
           <a:bodyPr/>
           <a:lstStyle/>
           <a:p>
-            <a:r>
-              <a:rPr lang="en-US" dirty="0"/>
-              <a:t/>
-            </a:r>
             <a:endParaRPr lang="en-US" dirty="0"/>
           </a:p>
         </p:txBody>
@@ -1218,10 +967,6 @@
           <a:bodyPr/>
           <a:lstStyle/>
           <a:p>
-            <a:r>
-              <a:rPr lang="en-US" dirty="0"/>
-              <a:t/>
-            </a:r>
             <a:endParaRPr lang="en-US" dirty="0"/>
           </a:p>
         </p:txBody>
@@ -1306,10 +1051,6 @@
           <a:bodyPr/>
           <a:lstStyle/>
           <a:p>
-            <a:r>
-              <a:rPr lang="en-US" dirty="0"/>
-              <a:t/>
-            </a:r>
             <a:endParaRPr lang="en-US" dirty="0"/>
           </a:p>
         </p:txBody>
@@ -1394,10 +1135,6 @@
           <a:bodyPr/>
           <a:lstStyle/>
           <a:p>
-            <a:r>
-              <a:rPr lang="en-US" dirty="0"/>
-              <a:t/>
-            </a:r>
             <a:endParaRPr lang="en-US" dirty="0"/>
           </a:p>
         </p:txBody>
@@ -1482,10 +1219,6 @@
           <a:bodyPr/>
           <a:lstStyle/>
           <a:p>
-            <a:r>
-              <a:rPr lang="en-US" dirty="0"/>
-              <a:t/>
-            </a:r>
             <a:endParaRPr lang="en-US" dirty="0"/>
           </a:p>
         </p:txBody>
@@ -1570,10 +1303,6 @@
           <a:bodyPr/>
           <a:lstStyle/>
           <a:p>
-            <a:r>
-              <a:rPr lang="en-US" dirty="0"/>
-              <a:t/>
-            </a:r>
             <a:endParaRPr lang="en-US" dirty="0"/>
           </a:p>
         </p:txBody>
@@ -1658,10 +1387,6 @@
           <a:bodyPr/>
           <a:lstStyle/>
           <a:p>
-            <a:r>
-              <a:rPr lang="en-US" dirty="0"/>
-              <a:t/>
-            </a:r>
             <a:endParaRPr lang="en-US" dirty="0"/>
           </a:p>
         </p:txBody>
@@ -1746,10 +1471,6 @@
           <a:bodyPr/>
           <a:lstStyle/>
           <a:p>
-            <a:r>
-              <a:rPr lang="en-US" dirty="0"/>
-              <a:t/>
-            </a:r>
             <a:endParaRPr lang="en-US" dirty="0"/>
           </a:p>
         </p:txBody>
@@ -1823,6 +1544,11 @@
 <file path=ppt/slideMasters/slideMaster1.xml><?xml version="1.0" encoding="utf-8"?>
 <p:sldMaster xmlns:a="http://schemas.openxmlformats.org/drawingml/2006/main" xmlns:r="http://schemas.openxmlformats.org/officeDocument/2006/relationships" xmlns:p="http://schemas.openxmlformats.org/presentationml/2006/main">
   <p:cSld>
+    <p:bg>
+      <p:bgRef idx="1001">
+        <a:schemeClr val="bg1"/>
+      </p:bgRef>
+    </p:bg>
     <p:spTree>
       <p:nvGrpSpPr>
         <p:cNvPr id="1" name=""/>
@@ -2103,7 +1829,7 @@
     <p:bg>
       <p:bgPr>
         <a:blipFill dpi="0" rotWithShape="1">
-          <a:blip r:embed="rId1">
+          <a:blip r:embed="rId3">
             <a:lum/>
           </a:blip>
           <a:srcRect/>
@@ -2149,7 +1875,7 @@
           <a:bodyPr wrap="square" rtlCol="0" anchor="ctr"/>
           <a:lstStyle/>
           <a:p>
-            <a:pPr algn="l" indent="0" marL="0">
+            <a:pPr marL="0" indent="0" algn="l">
               <a:buNone/>
             </a:pPr>
             <a:r>
@@ -2163,9 +1889,6 @@
               </a:rPr>
               <a:t>EMEA </a:t>
             </a:r>
-            <a:pPr algn="l" indent="0" marL="0">
-              <a:buNone/>
-            </a:pPr>
             <a:r>
               <a:rPr lang="en-US" sz="1200" dirty="0">
                 <a:solidFill>
@@ -2177,9 +1900,6 @@
               </a:rPr>
               <a:t>| </a:t>
             </a:r>
-            <a:pPr algn="l" indent="0" marL="0">
-              <a:buNone/>
-            </a:pPr>
             <a:r>
               <a:rPr lang="en-US" sz="1200" b="1" dirty="0">
                 <a:solidFill>
@@ -2216,7 +1936,7 @@
           <a:bodyPr wrap="square" rtlCol="0" anchor="ctr"/>
           <a:lstStyle/>
           <a:p>
-            <a:pPr indent="0" marL="0">
+            <a:pPr marL="0" indent="0">
               <a:buNone/>
             </a:pPr>
             <a:r>
@@ -2255,7 +1975,7 @@
           <a:bodyPr wrap="square" rtlCol="0" anchor="ctr"/>
           <a:lstStyle/>
           <a:p>
-            <a:pPr indent="0" marL="0">
+            <a:pPr marL="0" indent="0">
               <a:buNone/>
             </a:pPr>
             <a:r>
@@ -2269,9 +1989,6 @@
               </a:rPr>
               <a:t>Two paths to Microsoft Fabric, enabled through </a:t>
             </a:r>
-            <a:pPr indent="0" marL="0">
-              <a:buNone/>
-            </a:pPr>
             <a:r>
               <a:rPr lang="en-US" sz="2300" b="1" i="1" dirty="0">
                 <a:solidFill>
@@ -2289,81 +2006,13 @@
       </p:sp>
       <p:sp>
         <p:nvSpPr>
-          <p:cNvPr id="5" name="Shape 3"/>
-          <p:cNvSpPr/>
-          <p:nvPr/>
-        </p:nvSpPr>
-        <p:spPr>
-          <a:xfrm>
-            <a:off x="566928" y="4069080"/>
-            <a:ext cx="6035040" cy="566928"/>
-          </a:xfrm>
-          <a:prstGeom prst="roundRect">
-            <a:avLst>
-              <a:gd name="adj" fmla="val 50000"/>
-            </a:avLst>
-          </a:prstGeom>
-          <a:solidFill>
-            <a:srgbClr val="FFFFFF">
-              <a:alpha val="14000"/>
-            </a:srgbClr>
-          </a:solidFill>
-          <a:ln w="12700">
-            <a:solidFill>
-              <a:srgbClr val="AEC9EA"/>
-            </a:solidFill>
-            <a:prstDash val="solid"/>
-          </a:ln>
-        </p:spPr>
-      </p:sp>
-      <p:sp>
-        <p:nvSpPr>
-          <p:cNvPr id="6" name="Text 4"/>
-          <p:cNvSpPr/>
-          <p:nvPr/>
-        </p:nvSpPr>
-        <p:spPr>
-          <a:xfrm>
-            <a:off x="795528" y="4069080"/>
-            <a:ext cx="5669280" cy="566928"/>
-          </a:xfrm>
-          <a:prstGeom prst="rect">
-            <a:avLst/>
-          </a:prstGeom>
-          <a:noFill/>
-          <a:ln/>
-        </p:spPr>
-        <p:txBody>
-          <a:bodyPr wrap="square" rtlCol="0" anchor="ctr"/>
-          <a:lstStyle/>
-          <a:p>
-            <a:pPr indent="0" marL="0">
-              <a:buNone/>
-            </a:pPr>
-            <a:r>
-              <a:rPr lang="en-US" sz="1300" dirty="0">
-                <a:solidFill>
-                  <a:srgbClr val="EAF2FC"/>
-                </a:solidFill>
-                <a:latin typeface="Calibri" pitchFamily="34" charset="0"/>
-                <a:ea typeface="Calibri" pitchFamily="34" charset="-122"/>
-                <a:cs typeface="Calibri" pitchFamily="34" charset="-120"/>
-              </a:rPr>
-              <a:t>Draft for v-team review · to be finalized end of June 2026</a:t>
-            </a:r>
-            <a:endParaRPr lang="en-US" sz="1300" dirty="0"/>
-          </a:p>
-        </p:txBody>
-      </p:sp>
-      <p:sp>
-        <p:nvSpPr>
           <p:cNvPr id="7" name="Text 5"/>
           <p:cNvSpPr/>
           <p:nvPr/>
         </p:nvSpPr>
         <p:spPr>
           <a:xfrm>
-            <a:off x="566928" y="4892040"/>
+            <a:off x="609039" y="3680460"/>
             <a:ext cx="10515600" cy="365760"/>
           </a:xfrm>
           <a:prstGeom prst="rect">
@@ -2376,7 +2025,7 @@
           <a:bodyPr wrap="square" rtlCol="0" anchor="ctr"/>
           <a:lstStyle/>
           <a:p>
-            <a:pPr indent="0" marL="0">
+            <a:pPr marL="0" indent="0">
               <a:buNone/>
             </a:pPr>
             <a:r>
@@ -2415,7 +2064,7 @@
           <a:bodyPr wrap="square" rtlCol="0" anchor="ctr"/>
           <a:lstStyle/>
           <a:p>
-            <a:pPr indent="0" marL="0">
+            <a:pPr marL="0" indent="0">
               <a:buNone/>
             </a:pPr>
             <a:r>
@@ -2427,7 +2076,7 @@
                 <a:ea typeface="Calibri" pitchFamily="34" charset="-122"/>
                 <a:cs typeface="Calibri" pitchFamily="34" charset="-120"/>
               </a:rPr>
-              <a:t>June 2026</a:t>
+              <a:t>July 2026</a:t>
             </a:r>
             <a:endParaRPr lang="en-US" sz="1300" dirty="0"/>
           </a:p>
@@ -2454,7 +2103,7 @@
           <a:bodyPr wrap="square" rtlCol="0" anchor="ctr"/>
           <a:lstStyle/>
           <a:p>
-            <a:pPr algn="r" indent="0" marL="0">
+            <a:pPr marL="0" indent="0" algn="r">
               <a:buNone/>
             </a:pPr>
             <a:r>
@@ -2468,9 +2117,6 @@
               </a:rPr>
               <a:t>EMEA </a:t>
             </a:r>
-            <a:pPr algn="r" indent="0" marL="0">
-              <a:buNone/>
-            </a:pPr>
             <a:r>
               <a:rPr lang="en-US" sz="1200" dirty="0">
                 <a:solidFill>
@@ -2482,9 +2128,6 @@
               </a:rPr>
               <a:t>| </a:t>
             </a:r>
-            <a:pPr algn="r" indent="0" marL="0">
-              <a:buNone/>
-            </a:pPr>
             <a:r>
               <a:rPr lang="en-US" sz="1200" b="1" dirty="0">
                 <a:solidFill>
@@ -2497,6 +2140,229 @@
               <a:t>EPS</a:t>
             </a:r>
             <a:endParaRPr lang="en-US" sz="1200" dirty="0"/>
+          </a:p>
+        </p:txBody>
+      </p:sp>
+      <p:pic>
+        <p:nvPicPr>
+          <p:cNvPr id="13" name="Picture 12" descr="Profile photo of Florent Thibault ☁">
+            <a:extLst>
+              <a:ext uri="{FF2B5EF4-FFF2-40B4-BE49-F238E27FC236}">
+                <a16:creationId xmlns:a16="http://schemas.microsoft.com/office/drawing/2014/main" id="{F88AB34B-614E-8129-F745-C8323CA68FC0}"/>
+              </a:ext>
+            </a:extLst>
+          </p:cNvPr>
+          <p:cNvPicPr>
+            <a:picLocks noChangeAspect="1"/>
+          </p:cNvPicPr>
+          <p:nvPr/>
+        </p:nvPicPr>
+        <p:blipFill>
+          <a:blip r:embed="rId4"/>
+          <a:stretch>
+            <a:fillRect/>
+          </a:stretch>
+        </p:blipFill>
+        <p:spPr>
+          <a:xfrm>
+            <a:off x="3091940" y="4656215"/>
+            <a:ext cx="1046896" cy="1080000"/>
+          </a:xfrm>
+          <a:prstGeom prst="ellipse">
+            <a:avLst/>
+          </a:prstGeom>
+          <a:ln>
+            <a:solidFill>
+              <a:schemeClr val="accent1"/>
+            </a:solidFill>
+          </a:ln>
+        </p:spPr>
+      </p:pic>
+      <p:pic>
+        <p:nvPicPr>
+          <p:cNvPr id="14" name="Picture 13" descr="The image shows a person wearing a light blue dress shirt with a white collar and a patterned undershirt.&#10;&#10;AI-generated content may be incorrect.">
+            <a:extLst>
+              <a:ext uri="{FF2B5EF4-FFF2-40B4-BE49-F238E27FC236}">
+                <a16:creationId xmlns:a16="http://schemas.microsoft.com/office/drawing/2014/main" id="{4739E960-05A1-11E5-796E-2B7ED57D99CC}"/>
+              </a:ext>
+              <a:ext uri="{C183D7F6-B498-43B3-948B-1728B52AA6E4}">
+                <adec:decorative xmlns:adec="http://schemas.microsoft.com/office/drawing/2017/decorative" val="1"/>
+              </a:ext>
+            </a:extLst>
+          </p:cNvPr>
+          <p:cNvPicPr>
+            <a:picLocks noChangeAspect="1"/>
+          </p:cNvPicPr>
+          <p:nvPr/>
+        </p:nvPicPr>
+        <p:blipFill>
+          <a:blip r:embed="rId5"/>
+          <a:stretch>
+            <a:fillRect/>
+          </a:stretch>
+        </p:blipFill>
+        <p:spPr>
+          <a:xfrm>
+            <a:off x="4424427" y="4656215"/>
+            <a:ext cx="1080000" cy="1080000"/>
+          </a:xfrm>
+          <a:prstGeom prst="ellipse">
+            <a:avLst/>
+          </a:prstGeom>
+          <a:ln>
+            <a:solidFill>
+              <a:schemeClr val="accent1"/>
+            </a:solidFill>
+          </a:ln>
+        </p:spPr>
+      </p:pic>
+      <p:pic>
+        <p:nvPicPr>
+          <p:cNvPr id="17" name="Picture 16" descr="The image shows a person wearing a dark blue shirt with a pattern, against a plain background.&#10;&#10;AI-generated content may be incorrect.">
+            <a:extLst>
+              <a:ext uri="{FF2B5EF4-FFF2-40B4-BE49-F238E27FC236}">
+                <a16:creationId xmlns:a16="http://schemas.microsoft.com/office/drawing/2014/main" id="{69ECC126-62A5-1661-0822-EABDAC401222}"/>
+              </a:ext>
+            </a:extLst>
+          </p:cNvPr>
+          <p:cNvPicPr>
+            <a:picLocks noChangeAspect="1"/>
+          </p:cNvPicPr>
+          <p:nvPr/>
+        </p:nvPicPr>
+        <p:blipFill>
+          <a:blip r:embed="rId6"/>
+          <a:stretch>
+            <a:fillRect/>
+          </a:stretch>
+        </p:blipFill>
+        <p:spPr>
+          <a:xfrm>
+            <a:off x="5790018" y="4656215"/>
+            <a:ext cx="1091887" cy="1080000"/>
+          </a:xfrm>
+          <a:prstGeom prst="ellipse">
+            <a:avLst/>
+          </a:prstGeom>
+          <a:ln>
+            <a:solidFill>
+              <a:schemeClr val="accent1"/>
+            </a:solidFill>
+          </a:ln>
+        </p:spPr>
+      </p:pic>
+      <p:pic>
+        <p:nvPicPr>
+          <p:cNvPr id="18" name="Picture 17" descr="Profile image">
+            <a:extLst>
+              <a:ext uri="{FF2B5EF4-FFF2-40B4-BE49-F238E27FC236}">
+                <a16:creationId xmlns:a16="http://schemas.microsoft.com/office/drawing/2014/main" id="{01E2DF28-C642-B1C9-2BA5-14682A4E3DE3}"/>
+              </a:ext>
+            </a:extLst>
+          </p:cNvPr>
+          <p:cNvPicPr>
+            <a:picLocks noChangeAspect="1"/>
+          </p:cNvPicPr>
+          <p:nvPr/>
+        </p:nvPicPr>
+        <p:blipFill>
+          <a:blip r:embed="rId7"/>
+          <a:stretch>
+            <a:fillRect/>
+          </a:stretch>
+        </p:blipFill>
+        <p:spPr>
+          <a:xfrm>
+            <a:off x="7167496" y="4656215"/>
+            <a:ext cx="1080000" cy="1080000"/>
+          </a:xfrm>
+          <a:prstGeom prst="ellipse">
+            <a:avLst/>
+          </a:prstGeom>
+          <a:ln>
+            <a:solidFill>
+              <a:schemeClr val="accent1"/>
+            </a:solidFill>
+          </a:ln>
+        </p:spPr>
+      </p:pic>
+      <p:pic>
+        <p:nvPicPr>
+          <p:cNvPr id="19" name="Picture 18" descr="Profile image">
+            <a:extLst>
+              <a:ext uri="{FF2B5EF4-FFF2-40B4-BE49-F238E27FC236}">
+                <a16:creationId xmlns:a16="http://schemas.microsoft.com/office/drawing/2014/main" id="{09007BAB-599A-0998-A8CC-76E2ECE065FC}"/>
+              </a:ext>
+            </a:extLst>
+          </p:cNvPr>
+          <p:cNvPicPr>
+            <a:picLocks noChangeAspect="1"/>
+          </p:cNvPicPr>
+          <p:nvPr/>
+        </p:nvPicPr>
+        <p:blipFill>
+          <a:blip r:embed="rId8"/>
+          <a:stretch>
+            <a:fillRect/>
+          </a:stretch>
+        </p:blipFill>
+        <p:spPr>
+          <a:xfrm>
+            <a:off x="8533087" y="4656215"/>
+            <a:ext cx="1080000" cy="1080000"/>
+          </a:xfrm>
+          <a:prstGeom prst="ellipse">
+            <a:avLst/>
+          </a:prstGeom>
+          <a:ln>
+            <a:solidFill>
+              <a:schemeClr val="accent1"/>
+            </a:solidFill>
+          </a:ln>
+        </p:spPr>
+      </p:pic>
+      <p:sp>
+        <p:nvSpPr>
+          <p:cNvPr id="21" name="Text 5">
+            <a:extLst>
+              <a:ext uri="{FF2B5EF4-FFF2-40B4-BE49-F238E27FC236}">
+                <a16:creationId xmlns:a16="http://schemas.microsoft.com/office/drawing/2014/main" id="{37E230EF-A89B-1996-1D37-40FE2769822E}"/>
+              </a:ext>
+            </a:extLst>
+          </p:cNvPr>
+          <p:cNvSpPr/>
+          <p:nvPr/>
+        </p:nvSpPr>
+        <p:spPr>
+          <a:xfrm>
+            <a:off x="4401556" y="5760720"/>
+            <a:ext cx="3868809" cy="365760"/>
+          </a:xfrm>
+          <a:prstGeom prst="rect">
+            <a:avLst/>
+          </a:prstGeom>
+          <a:noFill/>
+          <a:ln/>
+        </p:spPr>
+        <p:txBody>
+          <a:bodyPr wrap="square" rtlCol="0" anchor="ctr"/>
+          <a:lstStyle/>
+          <a:p>
+            <a:pPr marL="0" indent="0" algn="ctr">
+              <a:buNone/>
+            </a:pPr>
+            <a:r>
+              <a:rPr lang="en-US" sz="1300" dirty="0">
+                <a:solidFill>
+                  <a:srgbClr val="BFD6F2"/>
+                </a:solidFill>
+                <a:latin typeface="Calibri" pitchFamily="34" charset="0"/>
+                <a:ea typeface="Calibri" pitchFamily="34" charset="-122"/>
+                <a:cs typeface="Calibri" pitchFamily="34" charset="-120"/>
+              </a:rPr>
+              <a:t>EMEA PSA Data Team</a:t>
+            </a:r>
+            <a:endParaRPr lang="en-US" sz="1300" dirty="0"/>
           </a:p>
         </p:txBody>
       </p:sp>
@@ -2514,7 +2380,7 @@
     <p:bg>
       <p:bgPr>
         <a:blipFill dpi="0" rotWithShape="1">
-          <a:blip r:embed="rId1">
+          <a:blip r:embed="rId3">
             <a:lum/>
           </a:blip>
           <a:srcRect/>
@@ -2560,7 +2426,7 @@
           <a:bodyPr wrap="square" rtlCol="0" anchor="ctr"/>
           <a:lstStyle/>
           <a:p>
-            <a:pPr indent="0" marL="0">
+            <a:pPr marL="0" indent="0">
               <a:buNone/>
             </a:pPr>
             <a:r>
@@ -2599,7 +2465,7 @@
           <a:bodyPr wrap="square" rtlCol="0" anchor="ctr"/>
           <a:lstStyle/>
           <a:p>
-            <a:pPr indent="0" marL="0">
+            <a:pPr marL="0" indent="0">
               <a:buNone/>
             </a:pPr>
             <a:r>
@@ -2638,7 +2504,7 @@
           <a:bodyPr wrap="square" rtlCol="0" anchor="ctr"/>
           <a:lstStyle/>
           <a:p>
-            <a:pPr indent="0" marL="0">
+            <a:pPr marL="0" indent="0">
               <a:buNone/>
             </a:pPr>
             <a:r>
@@ -2677,7 +2543,7 @@
           <a:bodyPr wrap="square" rtlCol="0" anchor="ctr"/>
           <a:lstStyle/>
           <a:p>
-            <a:pPr algn="ctr" indent="0" marL="0">
+            <a:pPr marL="0" indent="0" algn="ctr">
               <a:buNone/>
             </a:pPr>
             <a:r>
@@ -2716,7 +2582,7 @@
           <a:bodyPr wrap="square" rtlCol="0" anchor="ctr"/>
           <a:lstStyle/>
           <a:p>
-            <a:pPr algn="r" indent="0" marL="0">
+            <a:pPr marL="0" indent="0" algn="r">
               <a:buNone/>
             </a:pPr>
             <a:r>
@@ -2730,9 +2596,6 @@
               </a:rPr>
               <a:t>EMEA </a:t>
             </a:r>
-            <a:pPr algn="r" indent="0" marL="0">
-              <a:buNone/>
-            </a:pPr>
             <a:r>
               <a:rPr lang="en-US" sz="1200" dirty="0">
                 <a:solidFill>
@@ -2744,9 +2607,6 @@
               </a:rPr>
               <a:t>| </a:t>
             </a:r>
-            <a:pPr algn="r" indent="0" marL="0">
-              <a:buNone/>
-            </a:pPr>
             <a:r>
               <a:rPr lang="en-US" sz="1200" b="1" dirty="0">
                 <a:solidFill>
@@ -2783,6 +2643,13 @@
           </a:solidFill>
           <a:ln/>
         </p:spPr>
+        <p:txBody>
+          <a:bodyPr/>
+          <a:lstStyle/>
+          <a:p>
+            <a:endParaRPr lang="en-GB"/>
+          </a:p>
+        </p:txBody>
       </p:sp>
       <p:sp>
         <p:nvSpPr>
@@ -2805,7 +2672,7 @@
           <a:bodyPr wrap="square" rtlCol="0" anchor="ctr"/>
           <a:lstStyle/>
           <a:p>
-            <a:pPr algn="ctr" indent="0" marL="0">
+            <a:pPr marL="0" indent="0" algn="ctr">
               <a:buNone/>
             </a:pPr>
             <a:r>
@@ -2844,7 +2711,7 @@
           <a:bodyPr wrap="square" rtlCol="0" anchor="ctr"/>
           <a:lstStyle/>
           <a:p>
-            <a:pPr indent="0" marL="0">
+            <a:pPr marL="0" indent="0">
               <a:buNone/>
             </a:pPr>
             <a:r>
@@ -2883,6 +2750,13 @@
           </a:solidFill>
           <a:ln/>
         </p:spPr>
+        <p:txBody>
+          <a:bodyPr/>
+          <a:lstStyle/>
+          <a:p>
+            <a:endParaRPr lang="en-GB"/>
+          </a:p>
+        </p:txBody>
       </p:sp>
       <p:sp>
         <p:nvSpPr>
@@ -2905,7 +2779,7 @@
           <a:bodyPr wrap="square" rtlCol="0" anchor="ctr"/>
           <a:lstStyle/>
           <a:p>
-            <a:pPr algn="ctr" indent="0" marL="0">
+            <a:pPr marL="0" indent="0" algn="ctr">
               <a:buNone/>
             </a:pPr>
             <a:r>
@@ -2944,7 +2818,7 @@
           <a:bodyPr wrap="square" rtlCol="0" anchor="ctr"/>
           <a:lstStyle/>
           <a:p>
-            <a:pPr indent="0" marL="0">
+            <a:pPr marL="0" indent="0">
               <a:buNone/>
             </a:pPr>
             <a:r>
@@ -2988,6 +2862,13 @@
             <a:prstDash val="solid"/>
           </a:ln>
         </p:spPr>
+        <p:txBody>
+          <a:bodyPr/>
+          <a:lstStyle/>
+          <a:p>
+            <a:endParaRPr lang="en-GB"/>
+          </a:p>
+        </p:txBody>
       </p:sp>
       <p:sp>
         <p:nvSpPr>
@@ -3008,6 +2889,13 @@
           </a:solidFill>
           <a:ln/>
         </p:spPr>
+        <p:txBody>
+          <a:bodyPr/>
+          <a:lstStyle/>
+          <a:p>
+            <a:endParaRPr lang="en-GB"/>
+          </a:p>
+        </p:txBody>
       </p:sp>
       <p:sp>
         <p:nvSpPr>
@@ -3030,7 +2918,7 @@
           <a:bodyPr wrap="square" rtlCol="0" anchor="ctr"/>
           <a:lstStyle/>
           <a:p>
-            <a:pPr algn="ctr" indent="0" marL="0">
+            <a:pPr marL="0" indent="0" algn="ctr">
               <a:buNone/>
             </a:pPr>
             <a:r>
@@ -3069,7 +2957,7 @@
           <a:bodyPr wrap="square" rtlCol="0" anchor="ctr"/>
           <a:lstStyle/>
           <a:p>
-            <a:pPr indent="0" marL="0">
+            <a:pPr marL="0" indent="0">
               <a:buNone/>
             </a:pPr>
             <a:r>
@@ -3083,9 +2971,6 @@
               </a:rPr>
               <a:t>Why build a workload   </a:t>
             </a:r>
-            <a:pPr indent="0" marL="0">
-              <a:buNone/>
-            </a:pPr>
             <a:r>
               <a:rPr lang="en-US" sz="1150" dirty="0">
                 <a:solidFill>
@@ -3127,6 +3012,13 @@
             <a:prstDash val="solid"/>
           </a:ln>
         </p:spPr>
+        <p:txBody>
+          <a:bodyPr/>
+          <a:lstStyle/>
+          <a:p>
+            <a:endParaRPr lang="en-GB"/>
+          </a:p>
+        </p:txBody>
       </p:sp>
       <p:sp>
         <p:nvSpPr>
@@ -3147,6 +3039,13 @@
           </a:solidFill>
           <a:ln/>
         </p:spPr>
+        <p:txBody>
+          <a:bodyPr/>
+          <a:lstStyle/>
+          <a:p>
+            <a:endParaRPr lang="en-GB"/>
+          </a:p>
+        </p:txBody>
       </p:sp>
       <p:sp>
         <p:nvSpPr>
@@ -3169,7 +3068,7 @@
           <a:bodyPr wrap="square" rtlCol="0" anchor="ctr"/>
           <a:lstStyle/>
           <a:p>
-            <a:pPr algn="ctr" indent="0" marL="0">
+            <a:pPr marL="0" indent="0" algn="ctr">
               <a:buNone/>
             </a:pPr>
             <a:r>
@@ -3208,7 +3107,7 @@
           <a:bodyPr wrap="square" rtlCol="0" anchor="ctr"/>
           <a:lstStyle/>
           <a:p>
-            <a:pPr indent="0" marL="0">
+            <a:pPr marL="0" indent="0">
               <a:buNone/>
             </a:pPr>
             <a:r>
@@ -3222,9 +3121,6 @@
               </a:rPr>
               <a:t>Extensibility Toolkit   </a:t>
             </a:r>
-            <a:pPr indent="0" marL="0">
-              <a:buNone/>
-            </a:pPr>
             <a:r>
               <a:rPr lang="en-US" sz="1150" dirty="0">
                 <a:solidFill>
@@ -3266,6 +3162,13 @@
             <a:prstDash val="solid"/>
           </a:ln>
         </p:spPr>
+        <p:txBody>
+          <a:bodyPr/>
+          <a:lstStyle/>
+          <a:p>
+            <a:endParaRPr lang="en-GB"/>
+          </a:p>
+        </p:txBody>
       </p:sp>
       <p:sp>
         <p:nvSpPr>
@@ -3286,6 +3189,13 @@
           </a:solidFill>
           <a:ln/>
         </p:spPr>
+        <p:txBody>
+          <a:bodyPr/>
+          <a:lstStyle/>
+          <a:p>
+            <a:endParaRPr lang="en-GB"/>
+          </a:p>
+        </p:txBody>
       </p:sp>
       <p:sp>
         <p:nvSpPr>
@@ -3308,7 +3218,7 @@
           <a:bodyPr wrap="square" rtlCol="0" anchor="ctr"/>
           <a:lstStyle/>
           <a:p>
-            <a:pPr algn="ctr" indent="0" marL="0">
+            <a:pPr marL="0" indent="0" algn="ctr">
               <a:buNone/>
             </a:pPr>
             <a:r>
@@ -3347,7 +3257,7 @@
           <a:bodyPr wrap="square" rtlCol="0" anchor="ctr"/>
           <a:lstStyle/>
           <a:p>
-            <a:pPr indent="0" marL="0">
+            <a:pPr marL="0" indent="0">
               <a:buNone/>
             </a:pPr>
             <a:r>
@@ -3361,9 +3271,6 @@
               </a:rPr>
               <a:t>Demo   </a:t>
             </a:r>
-            <a:pPr indent="0" marL="0">
-              <a:buNone/>
-            </a:pPr>
             <a:r>
               <a:rPr lang="en-US" sz="1150" dirty="0">
                 <a:solidFill>
@@ -3405,6 +3312,13 @@
             <a:prstDash val="solid"/>
           </a:ln>
         </p:spPr>
+        <p:txBody>
+          <a:bodyPr/>
+          <a:lstStyle/>
+          <a:p>
+            <a:endParaRPr lang="en-GB"/>
+          </a:p>
+        </p:txBody>
       </p:sp>
       <p:sp>
         <p:nvSpPr>
@@ -3425,6 +3339,13 @@
           </a:solidFill>
           <a:ln/>
         </p:spPr>
+        <p:txBody>
+          <a:bodyPr/>
+          <a:lstStyle/>
+          <a:p>
+            <a:endParaRPr lang="en-GB"/>
+          </a:p>
+        </p:txBody>
       </p:sp>
       <p:sp>
         <p:nvSpPr>
@@ -3447,7 +3368,7 @@
           <a:bodyPr wrap="square" rtlCol="0" anchor="ctr"/>
           <a:lstStyle/>
           <a:p>
-            <a:pPr algn="ctr" indent="0" marL="0">
+            <a:pPr marL="0" indent="0" algn="ctr">
               <a:buNone/>
             </a:pPr>
             <a:r>
@@ -3486,7 +3407,7 @@
           <a:bodyPr wrap="square" rtlCol="0" anchor="ctr"/>
           <a:lstStyle/>
           <a:p>
-            <a:pPr indent="0" marL="0">
+            <a:pPr marL="0" indent="0">
               <a:buNone/>
             </a:pPr>
             <a:r>
@@ -3500,9 +3421,6 @@
               </a:rPr>
               <a:t>Plan the build   </a:t>
             </a:r>
-            <a:pPr indent="0" marL="0">
-              <a:buNone/>
-            </a:pPr>
             <a:r>
               <a:rPr lang="en-US" sz="1150" dirty="0">
                 <a:solidFill>
@@ -3544,6 +3462,13 @@
             <a:prstDash val="solid"/>
           </a:ln>
         </p:spPr>
+        <p:txBody>
+          <a:bodyPr/>
+          <a:lstStyle/>
+          <a:p>
+            <a:endParaRPr lang="en-GB"/>
+          </a:p>
+        </p:txBody>
       </p:sp>
       <p:sp>
         <p:nvSpPr>
@@ -3564,6 +3489,13 @@
           </a:solidFill>
           <a:ln/>
         </p:spPr>
+        <p:txBody>
+          <a:bodyPr/>
+          <a:lstStyle/>
+          <a:p>
+            <a:endParaRPr lang="en-GB"/>
+          </a:p>
+        </p:txBody>
       </p:sp>
       <p:sp>
         <p:nvSpPr>
@@ -3586,7 +3518,7 @@
           <a:bodyPr wrap="square" rtlCol="0" anchor="ctr"/>
           <a:lstStyle/>
           <a:p>
-            <a:pPr algn="ctr" indent="0" marL="0">
+            <a:pPr marL="0" indent="0" algn="ctr">
               <a:buNone/>
             </a:pPr>
             <a:r>
@@ -3625,7 +3557,7 @@
           <a:bodyPr wrap="square" rtlCol="0" anchor="ctr"/>
           <a:lstStyle/>
           <a:p>
-            <a:pPr indent="0" marL="0">
+            <a:pPr marL="0" indent="0">
               <a:buNone/>
             </a:pPr>
             <a:r>
@@ -3639,9 +3571,6 @@
               </a:rPr>
               <a:t>Build sprint 1   </a:t>
             </a:r>
-            <a:pPr indent="0" marL="0">
-              <a:buNone/>
-            </a:pPr>
             <a:r>
               <a:rPr lang="en-US" sz="1150" dirty="0">
                 <a:solidFill>
@@ -3683,6 +3612,13 @@
             <a:prstDash val="solid"/>
           </a:ln>
         </p:spPr>
+        <p:txBody>
+          <a:bodyPr/>
+          <a:lstStyle/>
+          <a:p>
+            <a:endParaRPr lang="en-GB"/>
+          </a:p>
+        </p:txBody>
       </p:sp>
       <p:sp>
         <p:nvSpPr>
@@ -3703,6 +3639,13 @@
           </a:solidFill>
           <a:ln/>
         </p:spPr>
+        <p:txBody>
+          <a:bodyPr/>
+          <a:lstStyle/>
+          <a:p>
+            <a:endParaRPr lang="en-GB"/>
+          </a:p>
+        </p:txBody>
       </p:sp>
       <p:sp>
         <p:nvSpPr>
@@ -3725,7 +3668,7 @@
           <a:bodyPr wrap="square" rtlCol="0" anchor="ctr"/>
           <a:lstStyle/>
           <a:p>
-            <a:pPr algn="ctr" indent="0" marL="0">
+            <a:pPr marL="0" indent="0" algn="ctr">
               <a:buNone/>
             </a:pPr>
             <a:r>
@@ -3764,7 +3707,7 @@
           <a:bodyPr wrap="square" rtlCol="0" anchor="ctr"/>
           <a:lstStyle/>
           <a:p>
-            <a:pPr indent="0" marL="0">
+            <a:pPr marL="0" indent="0">
               <a:buNone/>
             </a:pPr>
             <a:r>
@@ -3778,9 +3721,6 @@
               </a:rPr>
               <a:t>★ Build sprint 2   </a:t>
             </a:r>
-            <a:pPr indent="0" marL="0">
-              <a:buNone/>
-            </a:pPr>
             <a:r>
               <a:rPr lang="en-US" sz="1150" dirty="0">
                 <a:solidFill>
@@ -3822,6 +3762,13 @@
             <a:prstDash val="solid"/>
           </a:ln>
         </p:spPr>
+        <p:txBody>
+          <a:bodyPr/>
+          <a:lstStyle/>
+          <a:p>
+            <a:endParaRPr lang="en-GB"/>
+          </a:p>
+        </p:txBody>
       </p:sp>
       <p:sp>
         <p:nvSpPr>
@@ -3842,6 +3789,13 @@
           </a:solidFill>
           <a:ln/>
         </p:spPr>
+        <p:txBody>
+          <a:bodyPr/>
+          <a:lstStyle/>
+          <a:p>
+            <a:endParaRPr lang="en-GB"/>
+          </a:p>
+        </p:txBody>
       </p:sp>
       <p:sp>
         <p:nvSpPr>
@@ -3864,7 +3818,7 @@
           <a:bodyPr wrap="square" rtlCol="0" anchor="ctr"/>
           <a:lstStyle/>
           <a:p>
-            <a:pPr algn="ctr" indent="0" marL="0">
+            <a:pPr marL="0" indent="0" algn="ctr">
               <a:buNone/>
             </a:pPr>
             <a:r>
@@ -3903,7 +3857,7 @@
           <a:bodyPr wrap="square" rtlCol="0" anchor="ctr"/>
           <a:lstStyle/>
           <a:p>
-            <a:pPr indent="0" marL="0">
+            <a:pPr marL="0" indent="0">
               <a:buNone/>
             </a:pPr>
             <a:r>
@@ -3917,9 +3871,6 @@
               </a:rPr>
               <a:t>Plan &amp; next steps   </a:t>
             </a:r>
-            <a:pPr indent="0" marL="0">
-              <a:buNone/>
-            </a:pPr>
             <a:r>
               <a:rPr lang="en-US" sz="1150" dirty="0">
                 <a:solidFill>
@@ -3956,6 +3907,13 @@
           </a:solidFill>
           <a:ln/>
         </p:spPr>
+        <p:txBody>
+          <a:bodyPr/>
+          <a:lstStyle/>
+          <a:p>
+            <a:endParaRPr lang="en-GB"/>
+          </a:p>
+        </p:txBody>
       </p:sp>
       <p:sp>
         <p:nvSpPr>
@@ -3978,7 +3936,7 @@
           <a:bodyPr wrap="square" rtlCol="0" anchor="ctr"/>
           <a:lstStyle/>
           <a:p>
-            <a:pPr algn="ctr" indent="0" marL="0">
+            <a:pPr marL="0" indent="0" algn="ctr">
               <a:buNone/>
             </a:pPr>
             <a:r>
@@ -4017,7 +3975,7 @@
           <a:bodyPr wrap="square" rtlCol="0" anchor="ctr"/>
           <a:lstStyle/>
           <a:p>
-            <a:pPr indent="0" marL="0">
+            <a:pPr marL="0" indent="0">
               <a:buNone/>
             </a:pPr>
             <a:r>
@@ -4031,9 +3989,6 @@
               </a:rPr>
               <a:t>Same shape, different artifact.   </a:t>
             </a:r>
-            <a:pPr indent="0" marL="0">
-              <a:buNone/>
-            </a:pPr>
             <a:r>
               <a:rPr lang="en-US" sz="1250" dirty="0">
                 <a:solidFill>
@@ -4063,7 +4018,7 @@
     <p:bg>
       <p:bgPr>
         <a:blipFill dpi="0" rotWithShape="1">
-          <a:blip r:embed="rId1">
+          <a:blip r:embed="rId3">
             <a:lum/>
           </a:blip>
           <a:srcRect/>
@@ -4109,7 +4064,7 @@
           <a:bodyPr wrap="square" rtlCol="0" anchor="ctr"/>
           <a:lstStyle/>
           <a:p>
-            <a:pPr indent="0" marL="0">
+            <a:pPr marL="0" indent="0">
               <a:buNone/>
             </a:pPr>
             <a:r>
@@ -4148,7 +4103,7 @@
           <a:bodyPr wrap="square" rtlCol="0" anchor="ctr"/>
           <a:lstStyle/>
           <a:p>
-            <a:pPr indent="0" marL="0">
+            <a:pPr marL="0" indent="0">
               <a:buNone/>
             </a:pPr>
             <a:r>
@@ -4187,7 +4142,7 @@
           <a:bodyPr wrap="square" rtlCol="0" anchor="ctr"/>
           <a:lstStyle/>
           <a:p>
-            <a:pPr indent="0" marL="0">
+            <a:pPr marL="0" indent="0">
               <a:buNone/>
             </a:pPr>
             <a:r>
@@ -4226,7 +4181,7 @@
           <a:bodyPr wrap="square" rtlCol="0" anchor="ctr"/>
           <a:lstStyle/>
           <a:p>
-            <a:pPr algn="ctr" indent="0" marL="0">
+            <a:pPr marL="0" indent="0" algn="ctr">
               <a:buNone/>
             </a:pPr>
             <a:r>
@@ -4265,7 +4220,7 @@
           <a:bodyPr wrap="square" rtlCol="0" anchor="ctr"/>
           <a:lstStyle/>
           <a:p>
-            <a:pPr algn="r" indent="0" marL="0">
+            <a:pPr marL="0" indent="0" algn="r">
               <a:buNone/>
             </a:pPr>
             <a:r>
@@ -4279,9 +4234,6 @@
               </a:rPr>
               <a:t>EMEA </a:t>
             </a:r>
-            <a:pPr algn="r" indent="0" marL="0">
-              <a:buNone/>
-            </a:pPr>
             <a:r>
               <a:rPr lang="en-US" sz="1200" dirty="0">
                 <a:solidFill>
@@ -4293,9 +4245,6 @@
               </a:rPr>
               <a:t>| </a:t>
             </a:r>
-            <a:pPr algn="r" indent="0" marL="0">
-              <a:buNone/>
-            </a:pPr>
             <a:r>
               <a:rPr lang="en-US" sz="1200" b="1" dirty="0">
                 <a:solidFill>
@@ -4332,7 +4281,7 @@
           <a:bodyPr wrap="square" rtlCol="0" anchor="ctr"/>
           <a:lstStyle/>
           <a:p>
-            <a:pPr indent="0" marL="0">
+            <a:pPr marL="0" indent="0">
               <a:buNone/>
             </a:pPr>
             <a:r>
@@ -4376,6 +4325,13 @@
             <a:prstDash val="solid"/>
           </a:ln>
         </p:spPr>
+        <p:txBody>
+          <a:bodyPr/>
+          <a:lstStyle/>
+          <a:p>
+            <a:endParaRPr lang="en-GB"/>
+          </a:p>
+        </p:txBody>
       </p:sp>
       <p:sp>
         <p:nvSpPr>
@@ -4396,6 +4352,13 @@
           </a:solidFill>
           <a:ln/>
         </p:spPr>
+        <p:txBody>
+          <a:bodyPr/>
+          <a:lstStyle/>
+          <a:p>
+            <a:endParaRPr lang="en-GB"/>
+          </a:p>
+        </p:txBody>
       </p:sp>
       <p:sp>
         <p:nvSpPr>
@@ -4418,7 +4381,7 @@
           <a:bodyPr wrap="square" rtlCol="0" anchor="ctr"/>
           <a:lstStyle/>
           <a:p>
-            <a:pPr algn="ctr" indent="0" marL="0">
+            <a:pPr marL="0" indent="0" algn="ctr">
               <a:buNone/>
             </a:pPr>
             <a:r>
@@ -4457,7 +4420,7 @@
           <a:bodyPr wrap="square" rtlCol="0" anchor="ctr"/>
           <a:lstStyle/>
           <a:p>
-            <a:pPr indent="0" marL="0">
+            <a:pPr marL="0" indent="0">
               <a:buNone/>
             </a:pPr>
             <a:r>
@@ -4471,9 +4434,6 @@
               </a:rPr>
               <a:t>Microsoft Fabric   </a:t>
             </a:r>
-            <a:pPr indent="0" marL="0">
-              <a:buNone/>
-            </a:pPr>
             <a:r>
               <a:rPr lang="en-US" sz="1250" dirty="0">
                 <a:solidFill>
@@ -4515,6 +4475,13 @@
             <a:prstDash val="solid"/>
           </a:ln>
         </p:spPr>
+        <p:txBody>
+          <a:bodyPr/>
+          <a:lstStyle/>
+          <a:p>
+            <a:endParaRPr lang="en-GB"/>
+          </a:p>
+        </p:txBody>
       </p:sp>
       <p:sp>
         <p:nvSpPr>
@@ -4535,6 +4502,13 @@
           </a:solidFill>
           <a:ln/>
         </p:spPr>
+        <p:txBody>
+          <a:bodyPr/>
+          <a:lstStyle/>
+          <a:p>
+            <a:endParaRPr lang="en-GB"/>
+          </a:p>
+        </p:txBody>
       </p:sp>
       <p:sp>
         <p:nvSpPr>
@@ -4557,7 +4531,7 @@
           <a:bodyPr wrap="square" rtlCol="0" anchor="ctr"/>
           <a:lstStyle/>
           <a:p>
-            <a:pPr algn="ctr" indent="0" marL="0">
+            <a:pPr marL="0" indent="0" algn="ctr">
               <a:buNone/>
             </a:pPr>
             <a:r>
@@ -4596,7 +4570,7 @@
           <a:bodyPr wrap="square" rtlCol="0" anchor="ctr"/>
           <a:lstStyle/>
           <a:p>
-            <a:pPr indent="0" marL="0">
+            <a:pPr marL="0" indent="0">
               <a:buNone/>
             </a:pPr>
             <a:r>
@@ -4610,9 +4584,6 @@
               </a:rPr>
               <a:t>Rayfin   </a:t>
             </a:r>
-            <a:pPr indent="0" marL="0">
-              <a:buNone/>
-            </a:pPr>
             <a:r>
               <a:rPr lang="en-US" sz="1250" dirty="0">
                 <a:solidFill>
@@ -4654,6 +4625,13 @@
             <a:prstDash val="solid"/>
           </a:ln>
         </p:spPr>
+        <p:txBody>
+          <a:bodyPr/>
+          <a:lstStyle/>
+          <a:p>
+            <a:endParaRPr lang="en-GB"/>
+          </a:p>
+        </p:txBody>
       </p:sp>
       <p:sp>
         <p:nvSpPr>
@@ -4674,6 +4652,13 @@
           </a:solidFill>
           <a:ln/>
         </p:spPr>
+        <p:txBody>
+          <a:bodyPr/>
+          <a:lstStyle/>
+          <a:p>
+            <a:endParaRPr lang="en-GB"/>
+          </a:p>
+        </p:txBody>
       </p:sp>
       <p:sp>
         <p:nvSpPr>
@@ -4696,7 +4681,7 @@
           <a:bodyPr wrap="square" rtlCol="0" anchor="ctr"/>
           <a:lstStyle/>
           <a:p>
-            <a:pPr algn="ctr" indent="0" marL="0">
+            <a:pPr marL="0" indent="0" algn="ctr">
               <a:buNone/>
             </a:pPr>
             <a:r>
@@ -4735,7 +4720,7 @@
           <a:bodyPr wrap="square" rtlCol="0" anchor="ctr"/>
           <a:lstStyle/>
           <a:p>
-            <a:pPr indent="0" marL="0">
+            <a:pPr marL="0" indent="0">
               <a:buNone/>
             </a:pPr>
             <a:r>
@@ -4749,9 +4734,6 @@
               </a:rPr>
               <a:t>Fabric Extensibility Toolkit   </a:t>
             </a:r>
-            <a:pPr indent="0" marL="0">
-              <a:buNone/>
-            </a:pPr>
             <a:r>
               <a:rPr lang="en-US" sz="1250" dirty="0">
                 <a:solidFill>
@@ -4793,6 +4775,13 @@
             <a:prstDash val="solid"/>
           </a:ln>
         </p:spPr>
+        <p:txBody>
+          <a:bodyPr/>
+          <a:lstStyle/>
+          <a:p>
+            <a:endParaRPr lang="en-GB"/>
+          </a:p>
+        </p:txBody>
       </p:sp>
       <p:sp>
         <p:nvSpPr>
@@ -4813,6 +4802,13 @@
           </a:solidFill>
           <a:ln/>
         </p:spPr>
+        <p:txBody>
+          <a:bodyPr/>
+          <a:lstStyle/>
+          <a:p>
+            <a:endParaRPr lang="en-GB"/>
+          </a:p>
+        </p:txBody>
       </p:sp>
       <p:sp>
         <p:nvSpPr>
@@ -4835,7 +4831,7 @@
           <a:bodyPr wrap="square" rtlCol="0" anchor="ctr"/>
           <a:lstStyle/>
           <a:p>
-            <a:pPr algn="ctr" indent="0" marL="0">
+            <a:pPr marL="0" indent="0" algn="ctr">
               <a:buNone/>
             </a:pPr>
             <a:r>
@@ -4874,7 +4870,7 @@
           <a:bodyPr wrap="square" rtlCol="0" anchor="ctr"/>
           <a:lstStyle/>
           <a:p>
-            <a:pPr indent="0" marL="0">
+            <a:pPr marL="0" indent="0">
               <a:buNone/>
             </a:pPr>
             <a:r>
@@ -4888,9 +4884,6 @@
               </a:rPr>
               <a:t>GitHub Copilot CLI   </a:t>
             </a:r>
-            <a:pPr indent="0" marL="0">
-              <a:buNone/>
-            </a:pPr>
             <a:r>
               <a:rPr lang="en-US" sz="1250" dirty="0">
                 <a:solidFill>
@@ -4932,6 +4925,13 @@
             <a:prstDash val="solid"/>
           </a:ln>
         </p:spPr>
+        <p:txBody>
+          <a:bodyPr/>
+          <a:lstStyle/>
+          <a:p>
+            <a:endParaRPr lang="en-GB"/>
+          </a:p>
+        </p:txBody>
       </p:sp>
       <p:sp>
         <p:nvSpPr>
@@ -4952,6 +4952,13 @@
           </a:solidFill>
           <a:ln/>
         </p:spPr>
+        <p:txBody>
+          <a:bodyPr/>
+          <a:lstStyle/>
+          <a:p>
+            <a:endParaRPr lang="en-GB"/>
+          </a:p>
+        </p:txBody>
       </p:sp>
       <p:sp>
         <p:nvSpPr>
@@ -4974,7 +4981,7 @@
           <a:bodyPr wrap="square" rtlCol="0" anchor="ctr"/>
           <a:lstStyle/>
           <a:p>
-            <a:pPr algn="ctr" indent="0" marL="0">
+            <a:pPr marL="0" indent="0" algn="ctr">
               <a:buNone/>
             </a:pPr>
             <a:r>
@@ -5013,7 +5020,7 @@
           <a:bodyPr wrap="square" rtlCol="0" anchor="ctr"/>
           <a:lstStyle/>
           <a:p>
-            <a:pPr indent="0" marL="0">
+            <a:pPr marL="0" indent="0">
               <a:buNone/>
             </a:pPr>
             <a:r>
@@ -5027,9 +5034,6 @@
               </a:rPr>
               <a:t>Workload Hub   </a:t>
             </a:r>
-            <a:pPr indent="0" marL="0">
-              <a:buNone/>
-            </a:pPr>
             <a:r>
               <a:rPr lang="en-US" sz="1250" dirty="0">
                 <a:solidFill>
@@ -5066,6 +5070,13 @@
           </a:solidFill>
           <a:ln/>
         </p:spPr>
+        <p:txBody>
+          <a:bodyPr/>
+          <a:lstStyle/>
+          <a:p>
+            <a:endParaRPr lang="en-GB"/>
+          </a:p>
+        </p:txBody>
       </p:sp>
       <p:sp>
         <p:nvSpPr>
@@ -5088,7 +5099,7 @@
           <a:bodyPr wrap="square" rtlCol="0" anchor="ctr"/>
           <a:lstStyle/>
           <a:p>
-            <a:pPr indent="0" marL="0">
+            <a:pPr marL="0" indent="0">
               <a:buNone/>
             </a:pPr>
             <a:r>
@@ -5127,7 +5138,7 @@
           <a:bodyPr wrap="square" rtlCol="0" anchor="ctr"/>
           <a:lstStyle/>
           <a:p>
-            <a:pPr indent="0" marL="0">
+            <a:pPr marL="0" indent="0">
               <a:buNone/>
             </a:pPr>
             <a:r>
@@ -5166,7 +5177,7 @@
           <a:bodyPr wrap="square" rtlCol="0" anchor="ctr"/>
           <a:lstStyle/>
           <a:p>
-            <a:pPr indent="0" marL="0">
+            <a:pPr marL="0" indent="0">
               <a:buNone/>
             </a:pPr>
             <a:r>
@@ -5205,7 +5216,7 @@
           <a:bodyPr wrap="square" rtlCol="0" anchor="ctr"/>
           <a:lstStyle/>
           <a:p>
-            <a:pPr indent="0" marL="0">
+            <a:pPr marL="0" indent="0">
               <a:buNone/>
             </a:pPr>
             <a:r>
@@ -5244,7 +5255,7 @@
           <a:bodyPr wrap="square" rtlCol="0" anchor="ctr"/>
           <a:lstStyle/>
           <a:p>
-            <a:pPr indent="0" marL="0">
+            <a:pPr marL="0" indent="0">
               <a:buNone/>
             </a:pPr>
             <a:r>
@@ -5283,7 +5294,7 @@
           <a:bodyPr wrap="square" rtlCol="0" anchor="ctr"/>
           <a:lstStyle/>
           <a:p>
-            <a:pPr indent="0" marL="0">
+            <a:pPr marL="0" indent="0">
               <a:buNone/>
             </a:pPr>
             <a:r>
@@ -5322,7 +5333,7 @@
           <a:bodyPr wrap="square" rtlCol="0" anchor="ctr"/>
           <a:lstStyle/>
           <a:p>
-            <a:pPr indent="0" marL="0">
+            <a:pPr marL="0" indent="0">
               <a:buNone/>
             </a:pPr>
             <a:r>
@@ -5361,7 +5372,7 @@
           <a:bodyPr wrap="square" rtlCol="0" anchor="ctr"/>
           <a:lstStyle/>
           <a:p>
-            <a:pPr indent="0" marL="0">
+            <a:pPr marL="0" indent="0">
               <a:buNone/>
             </a:pPr>
             <a:r>
@@ -5400,7 +5411,7 @@
           <a:bodyPr wrap="square" rtlCol="0" anchor="ctr"/>
           <a:lstStyle/>
           <a:p>
-            <a:pPr indent="0" marL="0">
+            <a:pPr marL="0" indent="0">
               <a:buNone/>
             </a:pPr>
             <a:r>
@@ -5439,7 +5450,7 @@
           <a:bodyPr wrap="square" rtlCol="0" anchor="ctr"/>
           <a:lstStyle/>
           <a:p>
-            <a:pPr indent="0" marL="0">
+            <a:pPr marL="0" indent="0">
               <a:buNone/>
             </a:pPr>
             <a:r>
@@ -5478,7 +5489,7 @@
           <a:bodyPr wrap="square" rtlCol="0" anchor="ctr"/>
           <a:lstStyle/>
           <a:p>
-            <a:pPr indent="0" marL="0">
+            <a:pPr marL="0" indent="0">
               <a:buNone/>
             </a:pPr>
             <a:r>
@@ -5517,7 +5528,7 @@
           <a:bodyPr wrap="square" rtlCol="0" anchor="ctr"/>
           <a:lstStyle/>
           <a:p>
-            <a:pPr indent="0" marL="0">
+            <a:pPr marL="0" indent="0">
               <a:buNone/>
             </a:pPr>
             <a:r>
@@ -5556,7 +5567,7 @@
           <a:bodyPr wrap="square" rtlCol="0" anchor="ctr"/>
           <a:lstStyle/>
           <a:p>
-            <a:pPr indent="0" marL="0">
+            <a:pPr marL="0" indent="0">
               <a:buNone/>
             </a:pPr>
             <a:r>
@@ -5588,7 +5599,7 @@
     <p:bg>
       <p:bgPr>
         <a:blipFill dpi="0" rotWithShape="1">
-          <a:blip r:embed="rId1">
+          <a:blip r:embed="rId3">
             <a:lum/>
           </a:blip>
           <a:srcRect/>
@@ -5634,7 +5645,7 @@
           <a:bodyPr wrap="square" rtlCol="0" anchor="ctr"/>
           <a:lstStyle/>
           <a:p>
-            <a:pPr indent="0" marL="0">
+            <a:pPr marL="0" indent="0">
               <a:buNone/>
             </a:pPr>
             <a:r>
@@ -5673,7 +5684,7 @@
           <a:bodyPr wrap="square" rtlCol="0" anchor="ctr"/>
           <a:lstStyle/>
           <a:p>
-            <a:pPr indent="0" marL="0">
+            <a:pPr marL="0" indent="0">
               <a:buNone/>
             </a:pPr>
             <a:r>
@@ -5712,7 +5723,7 @@
           <a:bodyPr wrap="square" rtlCol="0" anchor="ctr"/>
           <a:lstStyle/>
           <a:p>
-            <a:pPr indent="0" marL="0">
+            <a:pPr marL="0" indent="0">
               <a:buNone/>
             </a:pPr>
             <a:r>
@@ -5751,7 +5762,7 @@
           <a:bodyPr wrap="square" rtlCol="0" anchor="ctr"/>
           <a:lstStyle/>
           <a:p>
-            <a:pPr algn="ctr" indent="0" marL="0">
+            <a:pPr marL="0" indent="0" algn="ctr">
               <a:buNone/>
             </a:pPr>
             <a:r>
@@ -5790,7 +5801,7 @@
           <a:bodyPr wrap="square" rtlCol="0" anchor="ctr"/>
           <a:lstStyle/>
           <a:p>
-            <a:pPr algn="r" indent="0" marL="0">
+            <a:pPr marL="0" indent="0" algn="r">
               <a:buNone/>
             </a:pPr>
             <a:r>
@@ -5804,9 +5815,6 @@
               </a:rPr>
               <a:t>EMEA </a:t>
             </a:r>
-            <a:pPr algn="r" indent="0" marL="0">
-              <a:buNone/>
-            </a:pPr>
             <a:r>
               <a:rPr lang="en-US" sz="1200" dirty="0">
                 <a:solidFill>
@@ -5818,9 +5826,6 @@
               </a:rPr>
               <a:t>| </a:t>
             </a:r>
-            <a:pPr algn="r" indent="0" marL="0">
-              <a:buNone/>
-            </a:pPr>
             <a:r>
               <a:rPr lang="en-US" sz="1200" b="1" dirty="0">
                 <a:solidFill>
@@ -5862,13 +5867,20 @@
             <a:prstDash val="solid"/>
           </a:ln>
           <a:effectLst>
-            <a:outerShdw sx="100000" sy="100000" kx="0" ky="0" algn="bl" rotWithShape="0" blurRad="88900" dist="25400" dir="5400000">
+            <a:outerShdw blurRad="88900" dist="25400" dir="5400000" algn="bl" rotWithShape="0">
               <a:srgbClr val="8AA0BC">
                 <a:alpha val="28000"/>
               </a:srgbClr>
             </a:outerShdw>
           </a:effectLst>
         </p:spPr>
+        <p:txBody>
+          <a:bodyPr/>
+          <a:lstStyle/>
+          <a:p>
+            <a:endParaRPr lang="en-GB"/>
+          </a:p>
+        </p:txBody>
       </p:sp>
       <p:sp>
         <p:nvSpPr>
@@ -5891,6 +5903,13 @@
           </a:solidFill>
           <a:ln/>
         </p:spPr>
+        <p:txBody>
+          <a:bodyPr/>
+          <a:lstStyle/>
+          <a:p>
+            <a:endParaRPr lang="en-GB"/>
+          </a:p>
+        </p:txBody>
       </p:sp>
       <p:sp>
         <p:nvSpPr>
@@ -5911,6 +5930,13 @@
           </a:solidFill>
           <a:ln/>
         </p:spPr>
+        <p:txBody>
+          <a:bodyPr/>
+          <a:lstStyle/>
+          <a:p>
+            <a:endParaRPr lang="en-GB"/>
+          </a:p>
+        </p:txBody>
       </p:sp>
       <p:sp>
         <p:nvSpPr>
@@ -5933,7 +5959,7 @@
           <a:bodyPr wrap="square" rtlCol="0" anchor="ctr"/>
           <a:lstStyle/>
           <a:p>
-            <a:pPr algn="ctr" indent="0" marL="0">
+            <a:pPr marL="0" indent="0" algn="ctr">
               <a:buNone/>
             </a:pPr>
             <a:r>
@@ -5972,7 +5998,7 @@
           <a:bodyPr wrap="square" rtlCol="0" anchor="ctr"/>
           <a:lstStyle/>
           <a:p>
-            <a:pPr indent="0" marL="0">
+            <a:pPr marL="0" indent="0">
               <a:buNone/>
             </a:pPr>
             <a:r>
@@ -6011,7 +6037,7 @@
           <a:bodyPr wrap="square" rtlCol="0" anchor="ctr"/>
           <a:lstStyle/>
           <a:p>
-            <a:pPr indent="0" marL="0">
+            <a:pPr marL="0" indent="0">
               <a:buNone/>
             </a:pPr>
             <a:r>
@@ -6050,6 +6076,13 @@
           </a:solidFill>
           <a:ln/>
         </p:spPr>
+        <p:txBody>
+          <a:bodyPr/>
+          <a:lstStyle/>
+          <a:p>
+            <a:endParaRPr lang="en-GB"/>
+          </a:p>
+        </p:txBody>
       </p:sp>
       <p:sp>
         <p:nvSpPr>
@@ -6072,7 +6105,7 @@
           <a:bodyPr wrap="square" rtlCol="0" anchor="ctr"/>
           <a:lstStyle/>
           <a:p>
-            <a:pPr indent="0" marL="0">
+            <a:pPr marL="0" indent="0">
               <a:buNone/>
             </a:pPr>
             <a:r>
@@ -6086,9 +6119,6 @@
               </a:rPr>
               <a:t>   </a:t>
             </a:r>
-            <a:pPr indent="0" marL="0">
-              <a:buNone/>
-            </a:pPr>
             <a:r>
               <a:rPr lang="en-US" sz="1250" b="1" dirty="0">
                 <a:solidFill>
@@ -6125,7 +6155,7 @@
           <a:bodyPr wrap="square" rtlCol="0" anchor="ctr"/>
           <a:lstStyle/>
           <a:p>
-            <a:pPr indent="0" marL="0">
+            <a:pPr marL="0" indent="0">
               <a:buNone/>
             </a:pPr>
             <a:r>
@@ -6164,7 +6194,7 @@
           <a:bodyPr wrap="square" rtlCol="0" anchor="t"/>
           <a:lstStyle/>
           <a:p>
-            <a:pPr indent="0" marL="0">
+            <a:pPr marL="0" indent="0">
               <a:buNone/>
             </a:pPr>
             <a:r>
@@ -6208,13 +6238,20 @@
             <a:prstDash val="solid"/>
           </a:ln>
           <a:effectLst>
-            <a:outerShdw sx="100000" sy="100000" kx="0" ky="0" algn="bl" rotWithShape="0" blurRad="88900" dist="25400" dir="5400000">
+            <a:outerShdw blurRad="88900" dist="25400" dir="5400000" algn="bl" rotWithShape="0">
               <a:srgbClr val="8AA0BC">
                 <a:alpha val="28000"/>
               </a:srgbClr>
             </a:outerShdw>
           </a:effectLst>
         </p:spPr>
+        <p:txBody>
+          <a:bodyPr/>
+          <a:lstStyle/>
+          <a:p>
+            <a:endParaRPr lang="en-GB"/>
+          </a:p>
+        </p:txBody>
       </p:sp>
       <p:sp>
         <p:nvSpPr>
@@ -6237,6 +6274,13 @@
           </a:solidFill>
           <a:ln/>
         </p:spPr>
+        <p:txBody>
+          <a:bodyPr/>
+          <a:lstStyle/>
+          <a:p>
+            <a:endParaRPr lang="en-GB"/>
+          </a:p>
+        </p:txBody>
       </p:sp>
       <p:sp>
         <p:nvSpPr>
@@ -6257,6 +6301,13 @@
           </a:solidFill>
           <a:ln/>
         </p:spPr>
+        <p:txBody>
+          <a:bodyPr/>
+          <a:lstStyle/>
+          <a:p>
+            <a:endParaRPr lang="en-GB"/>
+          </a:p>
+        </p:txBody>
       </p:sp>
       <p:sp>
         <p:nvSpPr>
@@ -6279,7 +6330,7 @@
           <a:bodyPr wrap="square" rtlCol="0" anchor="ctr"/>
           <a:lstStyle/>
           <a:p>
-            <a:pPr algn="ctr" indent="0" marL="0">
+            <a:pPr marL="0" indent="0" algn="ctr">
               <a:buNone/>
             </a:pPr>
             <a:r>
@@ -6318,7 +6369,7 @@
           <a:bodyPr wrap="square" rtlCol="0" anchor="ctr"/>
           <a:lstStyle/>
           <a:p>
-            <a:pPr indent="0" marL="0">
+            <a:pPr marL="0" indent="0">
               <a:buNone/>
             </a:pPr>
             <a:r>
@@ -6357,7 +6408,7 @@
           <a:bodyPr wrap="square" rtlCol="0" anchor="ctr"/>
           <a:lstStyle/>
           <a:p>
-            <a:pPr indent="0" marL="0">
+            <a:pPr marL="0" indent="0">
               <a:buNone/>
             </a:pPr>
             <a:r>
@@ -6396,6 +6447,13 @@
           </a:solidFill>
           <a:ln/>
         </p:spPr>
+        <p:txBody>
+          <a:bodyPr/>
+          <a:lstStyle/>
+          <a:p>
+            <a:endParaRPr lang="en-GB"/>
+          </a:p>
+        </p:txBody>
       </p:sp>
       <p:sp>
         <p:nvSpPr>
@@ -6418,7 +6476,7 @@
           <a:bodyPr wrap="square" rtlCol="0" anchor="ctr"/>
           <a:lstStyle/>
           <a:p>
-            <a:pPr indent="0" marL="0">
+            <a:pPr marL="0" indent="0">
               <a:buNone/>
             </a:pPr>
             <a:r>
@@ -6432,9 +6490,6 @@
               </a:rPr>
               <a:t>   </a:t>
             </a:r>
-            <a:pPr indent="0" marL="0">
-              <a:buNone/>
-            </a:pPr>
             <a:r>
               <a:rPr lang="en-US" sz="1250" b="1" dirty="0">
                 <a:solidFill>
@@ -6471,7 +6526,7 @@
           <a:bodyPr wrap="square" rtlCol="0" anchor="ctr"/>
           <a:lstStyle/>
           <a:p>
-            <a:pPr indent="0" marL="0">
+            <a:pPr marL="0" indent="0">
               <a:buNone/>
             </a:pPr>
             <a:r>
@@ -6510,7 +6565,7 @@
           <a:bodyPr wrap="square" rtlCol="0" anchor="t"/>
           <a:lstStyle/>
           <a:p>
-            <a:pPr indent="0" marL="0">
+            <a:pPr marL="0" indent="0">
               <a:buNone/>
             </a:pPr>
             <a:r>
@@ -6549,6 +6604,13 @@
           </a:solidFill>
           <a:ln/>
         </p:spPr>
+        <p:txBody>
+          <a:bodyPr/>
+          <a:lstStyle/>
+          <a:p>
+            <a:endParaRPr lang="en-GB"/>
+          </a:p>
+        </p:txBody>
       </p:sp>
       <p:sp>
         <p:nvSpPr>
@@ -6571,7 +6633,7 @@
           <a:bodyPr wrap="square" rtlCol="0" anchor="ctr"/>
           <a:lstStyle/>
           <a:p>
-            <a:pPr indent="0" marL="0">
+            <a:pPr marL="0" indent="0">
               <a:buNone/>
             </a:pPr>
             <a:r>
@@ -6585,9 +6647,6 @@
               </a:rPr>
               <a:t>North-star   </a:t>
             </a:r>
-            <a:pPr indent="0" marL="0">
-              <a:buNone/>
-            </a:pPr>
             <a:r>
               <a:rPr lang="en-US" sz="1300" dirty="0">
                 <a:solidFill>
@@ -6599,9 +6658,6 @@
               </a:rPr>
               <a:t>The share of Micro Hacks, apps and workloads that are </a:t>
             </a:r>
-            <a:pPr indent="0" marL="0">
-              <a:buNone/>
-            </a:pPr>
             <a:r>
               <a:rPr lang="en-US" sz="1300" b="1" dirty="0">
                 <a:solidFill>
@@ -6613,9 +6669,6 @@
               </a:rPr>
               <a:t>partner-led, not Microsoft-led</a:t>
             </a:r>
-            <a:pPr indent="0" marL="0">
-              <a:buNone/>
-            </a:pPr>
             <a:r>
               <a:rPr lang="en-US" sz="1300" dirty="0">
                 <a:solidFill>
@@ -6645,7 +6698,7 @@
     <p:bg>
       <p:bgPr>
         <a:blipFill dpi="0" rotWithShape="1">
-          <a:blip r:embed="rId1">
+          <a:blip r:embed="rId3">
             <a:lum/>
           </a:blip>
           <a:srcRect/>
@@ -6691,7 +6744,7 @@
           <a:bodyPr wrap="square" rtlCol="0" anchor="ctr"/>
           <a:lstStyle/>
           <a:p>
-            <a:pPr indent="0" marL="0">
+            <a:pPr marL="0" indent="0">
               <a:buNone/>
             </a:pPr>
             <a:r>
@@ -6730,7 +6783,7 @@
           <a:bodyPr wrap="square" rtlCol="0" anchor="ctr"/>
           <a:lstStyle/>
           <a:p>
-            <a:pPr indent="0" marL="0">
+            <a:pPr marL="0" indent="0">
               <a:buNone/>
             </a:pPr>
             <a:r>
@@ -6769,7 +6822,7 @@
           <a:bodyPr wrap="square" rtlCol="0" anchor="ctr"/>
           <a:lstStyle/>
           <a:p>
-            <a:pPr indent="0" marL="0">
+            <a:pPr marL="0" indent="0">
               <a:buNone/>
             </a:pPr>
             <a:r>
@@ -6808,7 +6861,7 @@
           <a:bodyPr wrap="square" rtlCol="0" anchor="ctr"/>
           <a:lstStyle/>
           <a:p>
-            <a:pPr algn="ctr" indent="0" marL="0">
+            <a:pPr marL="0" indent="0" algn="ctr">
               <a:buNone/>
             </a:pPr>
             <a:r>
@@ -6847,7 +6900,7 @@
           <a:bodyPr wrap="square" rtlCol="0" anchor="ctr"/>
           <a:lstStyle/>
           <a:p>
-            <a:pPr algn="r" indent="0" marL="0">
+            <a:pPr marL="0" indent="0" algn="r">
               <a:buNone/>
             </a:pPr>
             <a:r>
@@ -6861,9 +6914,6 @@
               </a:rPr>
               <a:t>EMEA </a:t>
             </a:r>
-            <a:pPr algn="r" indent="0" marL="0">
-              <a:buNone/>
-            </a:pPr>
             <a:r>
               <a:rPr lang="en-US" sz="1200" dirty="0">
                 <a:solidFill>
@@ -6875,9 +6925,6 @@
               </a:rPr>
               <a:t>| </a:t>
             </a:r>
-            <a:pPr algn="r" indent="0" marL="0">
-              <a:buNone/>
-            </a:pPr>
             <a:r>
               <a:rPr lang="en-US" sz="1200" b="1" dirty="0">
                 <a:solidFill>
@@ -6914,6 +6961,13 @@
           </a:solidFill>
           <a:ln/>
         </p:spPr>
+        <p:txBody>
+          <a:bodyPr/>
+          <a:lstStyle/>
+          <a:p>
+            <a:endParaRPr lang="en-GB"/>
+          </a:p>
+        </p:txBody>
       </p:sp>
       <p:sp>
         <p:nvSpPr>
@@ -6936,7 +6990,7 @@
           <a:bodyPr wrap="square" rtlCol="0" anchor="ctr"/>
           <a:lstStyle/>
           <a:p>
-            <a:pPr algn="ctr" indent="0" marL="0">
+            <a:pPr marL="0" indent="0" algn="ctr">
               <a:buNone/>
             </a:pPr>
             <a:r>
@@ -6975,6 +7029,13 @@
           </a:solidFill>
           <a:ln/>
         </p:spPr>
+        <p:txBody>
+          <a:bodyPr/>
+          <a:lstStyle/>
+          <a:p>
+            <a:endParaRPr lang="en-GB"/>
+          </a:p>
+        </p:txBody>
       </p:sp>
       <p:sp>
         <p:nvSpPr>
@@ -6997,7 +7058,7 @@
           <a:bodyPr wrap="square" rtlCol="0" anchor="ctr"/>
           <a:lstStyle/>
           <a:p>
-            <a:pPr algn="ctr" indent="0" marL="0">
+            <a:pPr marL="0" indent="0" algn="ctr">
               <a:buNone/>
             </a:pPr>
             <a:r>
@@ -7036,6 +7097,13 @@
           </a:solidFill>
           <a:ln/>
         </p:spPr>
+        <p:txBody>
+          <a:bodyPr/>
+          <a:lstStyle/>
+          <a:p>
+            <a:endParaRPr lang="en-GB"/>
+          </a:p>
+        </p:txBody>
       </p:sp>
       <p:sp>
         <p:nvSpPr>
@@ -7058,7 +7126,7 @@
           <a:bodyPr wrap="square" rtlCol="0" anchor="ctr"/>
           <a:lstStyle/>
           <a:p>
-            <a:pPr algn="ctr" indent="0" marL="0">
+            <a:pPr marL="0" indent="0" algn="ctr">
               <a:buNone/>
             </a:pPr>
             <a:r>
@@ -7097,6 +7165,13 @@
           </a:solidFill>
           <a:ln/>
         </p:spPr>
+        <p:txBody>
+          <a:bodyPr/>
+          <a:lstStyle/>
+          <a:p>
+            <a:endParaRPr lang="en-GB"/>
+          </a:p>
+        </p:txBody>
       </p:sp>
       <p:sp>
         <p:nvSpPr>
@@ -7119,7 +7194,7 @@
           <a:bodyPr wrap="square" rtlCol="0" anchor="ctr"/>
           <a:lstStyle/>
           <a:p>
-            <a:pPr algn="ctr" indent="0" marL="0">
+            <a:pPr marL="0" indent="0" algn="ctr">
               <a:buNone/>
             </a:pPr>
             <a:r>
@@ -7156,6 +7231,13 @@
           </a:solidFill>
           <a:ln/>
         </p:spPr>
+        <p:txBody>
+          <a:bodyPr/>
+          <a:lstStyle/>
+          <a:p>
+            <a:endParaRPr lang="en-GB"/>
+          </a:p>
+        </p:txBody>
       </p:sp>
       <p:sp>
         <p:nvSpPr>
@@ -7178,7 +7260,7 @@
           <a:bodyPr wrap="square" rtlCol="0" anchor="ctr"/>
           <a:lstStyle/>
           <a:p>
-            <a:pPr indent="0" marL="0">
+            <a:pPr marL="0" indent="0">
               <a:buNone/>
             </a:pPr>
             <a:r>
@@ -7217,6 +7299,13 @@
           </a:solidFill>
           <a:ln/>
         </p:spPr>
+        <p:txBody>
+          <a:bodyPr/>
+          <a:lstStyle/>
+          <a:p>
+            <a:endParaRPr lang="en-GB"/>
+          </a:p>
+        </p:txBody>
       </p:sp>
       <p:sp>
         <p:nvSpPr>
@@ -7239,7 +7328,7 @@
           <a:bodyPr wrap="square" rtlCol="0" anchor="ctr"/>
           <a:lstStyle/>
           <a:p>
-            <a:pPr indent="0" marL="0">
+            <a:pPr marL="0" indent="0">
               <a:buNone/>
             </a:pPr>
             <a:r>
@@ -7278,6 +7367,13 @@
           </a:solidFill>
           <a:ln/>
         </p:spPr>
+        <p:txBody>
+          <a:bodyPr/>
+          <a:lstStyle/>
+          <a:p>
+            <a:endParaRPr lang="en-GB"/>
+          </a:p>
+        </p:txBody>
       </p:sp>
       <p:sp>
         <p:nvSpPr>
@@ -7298,6 +7394,13 @@
           </a:solidFill>
           <a:ln/>
         </p:spPr>
+        <p:txBody>
+          <a:bodyPr/>
+          <a:lstStyle/>
+          <a:p>
+            <a:endParaRPr lang="en-GB"/>
+          </a:p>
+        </p:txBody>
       </p:sp>
       <p:sp>
         <p:nvSpPr>
@@ -7320,7 +7423,7 @@
           <a:bodyPr wrap="square" rtlCol="0" anchor="ctr"/>
           <a:lstStyle/>
           <a:p>
-            <a:pPr indent="0" marL="0">
+            <a:pPr marL="0" indent="0">
               <a:buNone/>
             </a:pPr>
             <a:r>
@@ -7359,6 +7462,13 @@
           </a:solidFill>
           <a:ln/>
         </p:spPr>
+        <p:txBody>
+          <a:bodyPr/>
+          <a:lstStyle/>
+          <a:p>
+            <a:endParaRPr lang="en-GB"/>
+          </a:p>
+        </p:txBody>
       </p:sp>
       <p:sp>
         <p:nvSpPr>
@@ -7381,7 +7491,7 @@
           <a:bodyPr wrap="square" rtlCol="0" anchor="ctr"/>
           <a:lstStyle/>
           <a:p>
-            <a:pPr indent="0" marL="0">
+            <a:pPr marL="0" indent="0">
               <a:buNone/>
             </a:pPr>
             <a:r>
@@ -7420,6 +7530,13 @@
           </a:solidFill>
           <a:ln/>
         </p:spPr>
+        <p:txBody>
+          <a:bodyPr/>
+          <a:lstStyle/>
+          <a:p>
+            <a:endParaRPr lang="en-GB"/>
+          </a:p>
+        </p:txBody>
       </p:sp>
       <p:sp>
         <p:nvSpPr>
@@ -7440,6 +7557,13 @@
           </a:solidFill>
           <a:ln/>
         </p:spPr>
+        <p:txBody>
+          <a:bodyPr/>
+          <a:lstStyle/>
+          <a:p>
+            <a:endParaRPr lang="en-GB"/>
+          </a:p>
+        </p:txBody>
       </p:sp>
       <p:sp>
         <p:nvSpPr>
@@ -7462,7 +7586,7 @@
           <a:bodyPr wrap="square" rtlCol="0" anchor="ctr"/>
           <a:lstStyle/>
           <a:p>
-            <a:pPr indent="0" marL="0">
+            <a:pPr marL="0" indent="0">
               <a:buNone/>
             </a:pPr>
             <a:r>
@@ -7501,6 +7625,13 @@
           </a:solidFill>
           <a:ln/>
         </p:spPr>
+        <p:txBody>
+          <a:bodyPr/>
+          <a:lstStyle/>
+          <a:p>
+            <a:endParaRPr lang="en-GB"/>
+          </a:p>
+        </p:txBody>
       </p:sp>
       <p:sp>
         <p:nvSpPr>
@@ -7523,7 +7654,7 @@
           <a:bodyPr wrap="square" rtlCol="0" anchor="ctr"/>
           <a:lstStyle/>
           <a:p>
-            <a:pPr indent="0" marL="0">
+            <a:pPr marL="0" indent="0">
               <a:buNone/>
             </a:pPr>
             <a:r>
@@ -7562,6 +7693,13 @@
           </a:solidFill>
           <a:ln/>
         </p:spPr>
+        <p:txBody>
+          <a:bodyPr/>
+          <a:lstStyle/>
+          <a:p>
+            <a:endParaRPr lang="en-GB"/>
+          </a:p>
+        </p:txBody>
       </p:sp>
       <p:sp>
         <p:nvSpPr>
@@ -7582,6 +7720,13 @@
           </a:solidFill>
           <a:ln/>
         </p:spPr>
+        <p:txBody>
+          <a:bodyPr/>
+          <a:lstStyle/>
+          <a:p>
+            <a:endParaRPr lang="en-GB"/>
+          </a:p>
+        </p:txBody>
       </p:sp>
       <p:sp>
         <p:nvSpPr>
@@ -7604,7 +7749,7 @@
           <a:bodyPr wrap="square" rtlCol="0" anchor="ctr"/>
           <a:lstStyle/>
           <a:p>
-            <a:pPr indent="0" marL="0">
+            <a:pPr marL="0" indent="0">
               <a:buNone/>
             </a:pPr>
             <a:r>
@@ -7643,6 +7788,13 @@
           </a:solidFill>
           <a:ln/>
         </p:spPr>
+        <p:txBody>
+          <a:bodyPr/>
+          <a:lstStyle/>
+          <a:p>
+            <a:endParaRPr lang="en-GB"/>
+          </a:p>
+        </p:txBody>
       </p:sp>
       <p:sp>
         <p:nvSpPr>
@@ -7665,7 +7817,7 @@
           <a:bodyPr wrap="square" rtlCol="0" anchor="ctr"/>
           <a:lstStyle/>
           <a:p>
-            <a:pPr indent="0" marL="0">
+            <a:pPr marL="0" indent="0">
               <a:buNone/>
             </a:pPr>
             <a:r>
@@ -7704,6 +7856,13 @@
           </a:solidFill>
           <a:ln/>
         </p:spPr>
+        <p:txBody>
+          <a:bodyPr/>
+          <a:lstStyle/>
+          <a:p>
+            <a:endParaRPr lang="en-GB"/>
+          </a:p>
+        </p:txBody>
       </p:sp>
       <p:sp>
         <p:nvSpPr>
@@ -7727,6 +7886,13 @@
             <a:prstDash val="solid"/>
           </a:ln>
         </p:spPr>
+        <p:txBody>
+          <a:bodyPr/>
+          <a:lstStyle/>
+          <a:p>
+            <a:endParaRPr lang="en-GB"/>
+          </a:p>
+        </p:txBody>
       </p:sp>
       <p:sp>
         <p:nvSpPr>
@@ -7750,6 +7916,13 @@
             <a:prstDash val="solid"/>
           </a:ln>
         </p:spPr>
+        <p:txBody>
+          <a:bodyPr/>
+          <a:lstStyle/>
+          <a:p>
+            <a:endParaRPr lang="en-GB"/>
+          </a:p>
+        </p:txBody>
       </p:sp>
       <p:sp>
         <p:nvSpPr>
@@ -7773,6 +7946,13 @@
             <a:prstDash val="solid"/>
           </a:ln>
         </p:spPr>
+        <p:txBody>
+          <a:bodyPr/>
+          <a:lstStyle/>
+          <a:p>
+            <a:endParaRPr lang="en-GB"/>
+          </a:p>
+        </p:txBody>
       </p:sp>
       <p:sp>
         <p:nvSpPr>
@@ -7800,6 +7980,13 @@
             <a:prstDash val="solid"/>
           </a:ln>
         </p:spPr>
+        <p:txBody>
+          <a:bodyPr/>
+          <a:lstStyle/>
+          <a:p>
+            <a:endParaRPr lang="en-GB"/>
+          </a:p>
+        </p:txBody>
       </p:sp>
       <p:sp>
         <p:nvSpPr>
@@ -7822,7 +8009,7 @@
           <a:bodyPr wrap="square" rtlCol="0" anchor="ctr"/>
           <a:lstStyle/>
           <a:p>
-            <a:pPr indent="0" marL="0">
+            <a:pPr marL="0" indent="0">
               <a:buNone/>
             </a:pPr>
             <a:r>
@@ -7836,9 +8023,6 @@
               </a:rPr>
               <a:t>◆ Key milestone — Run #1 co-delivered, end of Q1 (Sep ’26):  </a:t>
             </a:r>
-            <a:pPr indent="0" marL="0">
-              <a:buNone/>
-            </a:pPr>
             <a:r>
               <a:rPr lang="en-US" sz="1200" dirty="0">
                 <a:solidFill>
@@ -7868,7 +8052,7 @@
     <p:bg>
       <p:bgPr>
         <a:blipFill dpi="0" rotWithShape="1">
-          <a:blip r:embed="rId1">
+          <a:blip r:embed="rId3">
             <a:lum/>
           </a:blip>
           <a:srcRect/>
@@ -7914,7 +8098,7 @@
           <a:bodyPr wrap="square" rtlCol="0" anchor="ctr"/>
           <a:lstStyle/>
           <a:p>
-            <a:pPr indent="0" marL="0">
+            <a:pPr marL="0" indent="0">
               <a:buNone/>
             </a:pPr>
             <a:r>
@@ -7953,7 +8137,7 @@
           <a:bodyPr wrap="square" rtlCol="0" anchor="ctr"/>
           <a:lstStyle/>
           <a:p>
-            <a:pPr indent="0" marL="0">
+            <a:pPr marL="0" indent="0">
               <a:buNone/>
             </a:pPr>
             <a:r>
@@ -7992,7 +8176,7 @@
           <a:bodyPr wrap="square" rtlCol="0" anchor="ctr"/>
           <a:lstStyle/>
           <a:p>
-            <a:pPr indent="0" marL="0">
+            <a:pPr marL="0" indent="0">
               <a:buNone/>
             </a:pPr>
             <a:r>
@@ -8031,7 +8215,7 @@
           <a:bodyPr wrap="square" rtlCol="0" anchor="ctr"/>
           <a:lstStyle/>
           <a:p>
-            <a:pPr algn="ctr" indent="0" marL="0">
+            <a:pPr marL="0" indent="0" algn="ctr">
               <a:buNone/>
             </a:pPr>
             <a:r>
@@ -8070,7 +8254,7 @@
           <a:bodyPr wrap="square" rtlCol="0" anchor="ctr"/>
           <a:lstStyle/>
           <a:p>
-            <a:pPr algn="r" indent="0" marL="0">
+            <a:pPr marL="0" indent="0" algn="r">
               <a:buNone/>
             </a:pPr>
             <a:r>
@@ -8084,9 +8268,6 @@
               </a:rPr>
               <a:t>EMEA </a:t>
             </a:r>
-            <a:pPr algn="r" indent="0" marL="0">
-              <a:buNone/>
-            </a:pPr>
             <a:r>
               <a:rPr lang="en-US" sz="1200" dirty="0">
                 <a:solidFill>
@@ -8098,9 +8279,6 @@
               </a:rPr>
               <a:t>| </a:t>
             </a:r>
-            <a:pPr algn="r" indent="0" marL="0">
-              <a:buNone/>
-            </a:pPr>
             <a:r>
               <a:rPr lang="en-US" sz="1200" b="1" dirty="0">
                 <a:solidFill>
@@ -8142,13 +8320,20 @@
             <a:prstDash val="solid"/>
           </a:ln>
           <a:effectLst>
-            <a:outerShdw sx="100000" sy="100000" kx="0" ky="0" algn="bl" rotWithShape="0" blurRad="88900" dist="25400" dir="5400000">
+            <a:outerShdw blurRad="88900" dist="25400" dir="5400000" algn="bl" rotWithShape="0">
               <a:srgbClr val="8AA0BC">
                 <a:alpha val="28000"/>
               </a:srgbClr>
             </a:outerShdw>
           </a:effectLst>
         </p:spPr>
+        <p:txBody>
+          <a:bodyPr/>
+          <a:lstStyle/>
+          <a:p>
+            <a:endParaRPr lang="en-GB"/>
+          </a:p>
+        </p:txBody>
       </p:sp>
       <p:sp>
         <p:nvSpPr>
@@ -8171,6 +8356,13 @@
           </a:solidFill>
           <a:ln/>
         </p:spPr>
+        <p:txBody>
+          <a:bodyPr/>
+          <a:lstStyle/>
+          <a:p>
+            <a:endParaRPr lang="en-GB"/>
+          </a:p>
+        </p:txBody>
       </p:sp>
       <p:sp>
         <p:nvSpPr>
@@ -8191,6 +8383,13 @@
           </a:solidFill>
           <a:ln/>
         </p:spPr>
+        <p:txBody>
+          <a:bodyPr/>
+          <a:lstStyle/>
+          <a:p>
+            <a:endParaRPr lang="en-GB"/>
+          </a:p>
+        </p:txBody>
       </p:sp>
       <p:sp>
         <p:nvSpPr>
@@ -8213,7 +8412,7 @@
           <a:bodyPr wrap="square" rtlCol="0" anchor="ctr"/>
           <a:lstStyle/>
           <a:p>
-            <a:pPr algn="ctr" indent="0" marL="0">
+            <a:pPr marL="0" indent="0" algn="ctr">
               <a:buNone/>
             </a:pPr>
             <a:r>
@@ -8252,7 +8451,7 @@
           <a:bodyPr wrap="square" rtlCol="0" anchor="ctr"/>
           <a:lstStyle/>
           <a:p>
-            <a:pPr algn="ctr" indent="0" marL="0">
+            <a:pPr marL="0" indent="0" algn="ctr">
               <a:buNone/>
             </a:pPr>
             <a:r>
@@ -8291,7 +8490,7 @@
           <a:bodyPr wrap="square" rtlCol="0" anchor="t"/>
           <a:lstStyle/>
           <a:p>
-            <a:pPr algn="ctr" indent="0" marL="0">
+            <a:pPr marL="0" indent="0" algn="ctr">
               <a:buNone/>
             </a:pPr>
             <a:r>
@@ -8335,13 +8534,20 @@
             <a:prstDash val="solid"/>
           </a:ln>
           <a:effectLst>
-            <a:outerShdw sx="100000" sy="100000" kx="0" ky="0" algn="bl" rotWithShape="0" blurRad="88900" dist="25400" dir="5400000">
+            <a:outerShdw blurRad="88900" dist="25400" dir="5400000" algn="bl" rotWithShape="0">
               <a:srgbClr val="8AA0BC">
                 <a:alpha val="28000"/>
               </a:srgbClr>
             </a:outerShdw>
           </a:effectLst>
         </p:spPr>
+        <p:txBody>
+          <a:bodyPr/>
+          <a:lstStyle/>
+          <a:p>
+            <a:endParaRPr lang="en-GB"/>
+          </a:p>
+        </p:txBody>
       </p:sp>
       <p:sp>
         <p:nvSpPr>
@@ -8364,6 +8570,13 @@
           </a:solidFill>
           <a:ln/>
         </p:spPr>
+        <p:txBody>
+          <a:bodyPr/>
+          <a:lstStyle/>
+          <a:p>
+            <a:endParaRPr lang="en-GB"/>
+          </a:p>
+        </p:txBody>
       </p:sp>
       <p:sp>
         <p:nvSpPr>
@@ -8384,6 +8597,13 @@
           </a:solidFill>
           <a:ln/>
         </p:spPr>
+        <p:txBody>
+          <a:bodyPr/>
+          <a:lstStyle/>
+          <a:p>
+            <a:endParaRPr lang="en-GB"/>
+          </a:p>
+        </p:txBody>
       </p:sp>
       <p:sp>
         <p:nvSpPr>
@@ -8406,7 +8626,7 @@
           <a:bodyPr wrap="square" rtlCol="0" anchor="ctr"/>
           <a:lstStyle/>
           <a:p>
-            <a:pPr algn="ctr" indent="0" marL="0">
+            <a:pPr marL="0" indent="0" algn="ctr">
               <a:buNone/>
             </a:pPr>
             <a:r>
@@ -8445,7 +8665,7 @@
           <a:bodyPr wrap="square" rtlCol="0" anchor="ctr"/>
           <a:lstStyle/>
           <a:p>
-            <a:pPr algn="ctr" indent="0" marL="0">
+            <a:pPr marL="0" indent="0" algn="ctr">
               <a:buNone/>
             </a:pPr>
             <a:r>
@@ -8484,7 +8704,7 @@
           <a:bodyPr wrap="square" rtlCol="0" anchor="t"/>
           <a:lstStyle/>
           <a:p>
-            <a:pPr algn="ctr" indent="0" marL="0">
+            <a:pPr marL="0" indent="0" algn="ctr">
               <a:buNone/>
             </a:pPr>
             <a:r>
@@ -8528,13 +8748,20 @@
             <a:prstDash val="solid"/>
           </a:ln>
           <a:effectLst>
-            <a:outerShdw sx="100000" sy="100000" kx="0" ky="0" algn="bl" rotWithShape="0" blurRad="88900" dist="25400" dir="5400000">
+            <a:outerShdw blurRad="88900" dist="25400" dir="5400000" algn="bl" rotWithShape="0">
               <a:srgbClr val="8AA0BC">
                 <a:alpha val="28000"/>
               </a:srgbClr>
             </a:outerShdw>
           </a:effectLst>
         </p:spPr>
+        <p:txBody>
+          <a:bodyPr/>
+          <a:lstStyle/>
+          <a:p>
+            <a:endParaRPr lang="en-GB"/>
+          </a:p>
+        </p:txBody>
       </p:sp>
       <p:sp>
         <p:nvSpPr>
@@ -8557,6 +8784,13 @@
           </a:solidFill>
           <a:ln/>
         </p:spPr>
+        <p:txBody>
+          <a:bodyPr/>
+          <a:lstStyle/>
+          <a:p>
+            <a:endParaRPr lang="en-GB"/>
+          </a:p>
+        </p:txBody>
       </p:sp>
       <p:sp>
         <p:nvSpPr>
@@ -8577,6 +8811,13 @@
           </a:solidFill>
           <a:ln/>
         </p:spPr>
+        <p:txBody>
+          <a:bodyPr/>
+          <a:lstStyle/>
+          <a:p>
+            <a:endParaRPr lang="en-GB"/>
+          </a:p>
+        </p:txBody>
       </p:sp>
       <p:sp>
         <p:nvSpPr>
@@ -8599,7 +8840,7 @@
           <a:bodyPr wrap="square" rtlCol="0" anchor="ctr"/>
           <a:lstStyle/>
           <a:p>
-            <a:pPr algn="ctr" indent="0" marL="0">
+            <a:pPr marL="0" indent="0" algn="ctr">
               <a:buNone/>
             </a:pPr>
             <a:r>
@@ -8638,7 +8879,7 @@
           <a:bodyPr wrap="square" rtlCol="0" anchor="ctr"/>
           <a:lstStyle/>
           <a:p>
-            <a:pPr algn="ctr" indent="0" marL="0">
+            <a:pPr marL="0" indent="0" algn="ctr">
               <a:buNone/>
             </a:pPr>
             <a:r>
@@ -8677,7 +8918,7 @@
           <a:bodyPr wrap="square" rtlCol="0" anchor="t"/>
           <a:lstStyle/>
           <a:p>
-            <a:pPr algn="ctr" indent="0" marL="0">
+            <a:pPr marL="0" indent="0" algn="ctr">
               <a:buNone/>
             </a:pPr>
             <a:r>
@@ -8721,13 +8962,20 @@
             <a:prstDash val="solid"/>
           </a:ln>
           <a:effectLst>
-            <a:outerShdw sx="100000" sy="100000" kx="0" ky="0" algn="bl" rotWithShape="0" blurRad="88900" dist="25400" dir="5400000">
+            <a:outerShdw blurRad="88900" dist="25400" dir="5400000" algn="bl" rotWithShape="0">
               <a:srgbClr val="8AA0BC">
                 <a:alpha val="28000"/>
               </a:srgbClr>
             </a:outerShdw>
           </a:effectLst>
         </p:spPr>
+        <p:txBody>
+          <a:bodyPr/>
+          <a:lstStyle/>
+          <a:p>
+            <a:endParaRPr lang="en-GB"/>
+          </a:p>
+        </p:txBody>
       </p:sp>
       <p:sp>
         <p:nvSpPr>
@@ -8750,6 +8998,13 @@
           </a:solidFill>
           <a:ln/>
         </p:spPr>
+        <p:txBody>
+          <a:bodyPr/>
+          <a:lstStyle/>
+          <a:p>
+            <a:endParaRPr lang="en-GB"/>
+          </a:p>
+        </p:txBody>
       </p:sp>
       <p:sp>
         <p:nvSpPr>
@@ -8770,6 +9025,13 @@
           </a:solidFill>
           <a:ln/>
         </p:spPr>
+        <p:txBody>
+          <a:bodyPr/>
+          <a:lstStyle/>
+          <a:p>
+            <a:endParaRPr lang="en-GB"/>
+          </a:p>
+        </p:txBody>
       </p:sp>
       <p:sp>
         <p:nvSpPr>
@@ -8792,7 +9054,7 @@
           <a:bodyPr wrap="square" rtlCol="0" anchor="ctr"/>
           <a:lstStyle/>
           <a:p>
-            <a:pPr algn="ctr" indent="0" marL="0">
+            <a:pPr marL="0" indent="0" algn="ctr">
               <a:buNone/>
             </a:pPr>
             <a:r>
@@ -8831,7 +9093,7 @@
           <a:bodyPr wrap="square" rtlCol="0" anchor="ctr"/>
           <a:lstStyle/>
           <a:p>
-            <a:pPr algn="ctr" indent="0" marL="0">
+            <a:pPr marL="0" indent="0" algn="ctr">
               <a:buNone/>
             </a:pPr>
             <a:r>
@@ -8870,7 +9132,7 @@
           <a:bodyPr wrap="square" rtlCol="0" anchor="t"/>
           <a:lstStyle/>
           <a:p>
-            <a:pPr algn="ctr" indent="0" marL="0">
+            <a:pPr marL="0" indent="0" algn="ctr">
               <a:buNone/>
             </a:pPr>
             <a:r>
@@ -8909,6 +9171,13 @@
           </a:solidFill>
           <a:ln/>
         </p:spPr>
+        <p:txBody>
+          <a:bodyPr/>
+          <a:lstStyle/>
+          <a:p>
+            <a:endParaRPr lang="en-GB"/>
+          </a:p>
+        </p:txBody>
       </p:sp>
       <p:sp>
         <p:nvSpPr>
@@ -8931,7 +9200,7 @@
           <a:bodyPr wrap="square" rtlCol="0" anchor="ctr"/>
           <a:lstStyle/>
           <a:p>
-            <a:pPr indent="0" marL="0">
+            <a:pPr marL="0" indent="0">
               <a:buNone/>
             </a:pPr>
             <a:r>
@@ -8945,9 +9214,6 @@
               </a:rPr>
               <a:t>What “good” looks like   </a:t>
             </a:r>
-            <a:pPr indent="0" marL="0">
-              <a:buNone/>
-            </a:pPr>
             <a:r>
               <a:rPr lang="en-US" sz="1300" dirty="0">
                 <a:solidFill>
@@ -8959,9 +9225,6 @@
               </a:rPr>
               <a:t>every Fabric / app conversation becomes a real opportunity or a built workload — </a:t>
             </a:r>
-            <a:pPr indent="0" marL="0">
-              <a:buNone/>
-            </a:pPr>
             <a:r>
               <a:rPr lang="en-US" sz="1300" b="1" dirty="0">
                 <a:solidFill>
@@ -8991,7 +9254,7 @@
     <p:bg>
       <p:bgPr>
         <a:blipFill dpi="0" rotWithShape="1">
-          <a:blip r:embed="rId1">
+          <a:blip r:embed="rId3">
             <a:lum/>
           </a:blip>
           <a:srcRect/>
@@ -9037,7 +9300,7 @@
           <a:bodyPr wrap="square" rtlCol="0" anchor="ctr"/>
           <a:lstStyle/>
           <a:p>
-            <a:pPr algn="l" indent="0" marL="0">
+            <a:pPr marL="0" indent="0" algn="l">
               <a:buNone/>
             </a:pPr>
             <a:r>
@@ -9051,9 +9314,6 @@
               </a:rPr>
               <a:t>EMEA </a:t>
             </a:r>
-            <a:pPr algn="l" indent="0" marL="0">
-              <a:buNone/>
-            </a:pPr>
             <a:r>
               <a:rPr lang="en-US" sz="1200" dirty="0">
                 <a:solidFill>
@@ -9065,9 +9325,6 @@
               </a:rPr>
               <a:t>| </a:t>
             </a:r>
-            <a:pPr algn="l" indent="0" marL="0">
-              <a:buNone/>
-            </a:pPr>
             <a:r>
               <a:rPr lang="en-US" sz="1200" b="1" dirty="0">
                 <a:solidFill>
@@ -9104,7 +9361,7 @@
           <a:bodyPr wrap="square" rtlCol="0" anchor="ctr"/>
           <a:lstStyle/>
           <a:p>
-            <a:pPr indent="0" marL="0">
+            <a:pPr marL="0" indent="0">
               <a:buNone/>
             </a:pPr>
             <a:r>
@@ -9143,7 +9400,7 @@
           <a:bodyPr wrap="square" rtlCol="0" anchor="ctr"/>
           <a:lstStyle/>
           <a:p>
-            <a:pPr indent="0" marL="0">
+            <a:pPr marL="0" indent="0">
               <a:buNone/>
             </a:pPr>
             <a:r>
@@ -9157,9 +9414,6 @@
               </a:rPr>
               <a:t>One motion · two paths · one repeatable vehicle — </a:t>
             </a:r>
-            <a:pPr indent="0" marL="0">
-              <a:buNone/>
-            </a:pPr>
             <a:r>
               <a:rPr lang="en-US" sz="2200" b="1" i="1" dirty="0">
                 <a:solidFill>
@@ -9172,45 +9426,6 @@
               <a:t>the “Micro Hack”.</a:t>
             </a:r>
             <a:endParaRPr lang="en-US" sz="2200" dirty="0"/>
-          </a:p>
-        </p:txBody>
-      </p:sp>
-      <p:sp>
-        <p:nvSpPr>
-          <p:cNvPr id="5" name="Text 3"/>
-          <p:cNvSpPr/>
-          <p:nvPr/>
-        </p:nvSpPr>
-        <p:spPr>
-          <a:xfrm>
-            <a:off x="566928" y="5943600"/>
-            <a:ext cx="10058400" cy="274320"/>
-          </a:xfrm>
-          <a:prstGeom prst="rect">
-            <a:avLst/>
-          </a:prstGeom>
-          <a:noFill/>
-          <a:ln/>
-        </p:spPr>
-        <p:txBody>
-          <a:bodyPr wrap="square" rtlCol="0" anchor="ctr"/>
-          <a:lstStyle/>
-          <a:p>
-            <a:pPr indent="0" marL="0">
-              <a:buNone/>
-            </a:pPr>
-            <a:r>
-              <a:rPr lang="en-US" sz="1200" dirty="0">
-                <a:solidFill>
-                  <a:srgbClr val="BFD6F2"/>
-                </a:solidFill>
-                <a:latin typeface="Calibri" pitchFamily="34" charset="0"/>
-                <a:ea typeface="Calibri" pitchFamily="34" charset="-122"/>
-                <a:cs typeface="Calibri" pitchFamily="34" charset="-120"/>
-              </a:rPr>
-              <a:t>Draft for v-team review · FY27 EMEA EPS — Fabric Apps Motion · June 2026</a:t>
-            </a:r>
-            <a:endParaRPr lang="en-US" sz="1200" dirty="0"/>
           </a:p>
         </p:txBody>
       </p:sp>
@@ -9235,7 +9450,7 @@
           <a:bodyPr wrap="square" rtlCol="0" anchor="ctr"/>
           <a:lstStyle/>
           <a:p>
-            <a:pPr algn="r" indent="0" marL="0">
+            <a:pPr marL="0" indent="0" algn="r">
               <a:buNone/>
             </a:pPr>
             <a:r>
@@ -9249,9 +9464,6 @@
               </a:rPr>
               <a:t>EMEA </a:t>
             </a:r>
-            <a:pPr algn="r" indent="0" marL="0">
-              <a:buNone/>
-            </a:pPr>
             <a:r>
               <a:rPr lang="en-US" sz="1200" dirty="0">
                 <a:solidFill>
@@ -9263,9 +9475,6 @@
               </a:rPr>
               <a:t>| </a:t>
             </a:r>
-            <a:pPr algn="r" indent="0" marL="0">
-              <a:buNone/>
-            </a:pPr>
             <a:r>
               <a:rPr lang="en-US" sz="1200" b="1" dirty="0">
                 <a:solidFill>
@@ -9295,7 +9504,7 @@
     <p:bg>
       <p:bgPr>
         <a:blipFill dpi="0" rotWithShape="1">
-          <a:blip r:embed="rId1">
+          <a:blip r:embed="rId3">
             <a:lum/>
           </a:blip>
           <a:srcRect/>
@@ -9341,7 +9550,7 @@
           <a:bodyPr wrap="square" rtlCol="0" anchor="ctr"/>
           <a:lstStyle/>
           <a:p>
-            <a:pPr indent="0" marL="0">
+            <a:pPr marL="0" indent="0">
               <a:buNone/>
             </a:pPr>
             <a:r>
@@ -9380,7 +9589,7 @@
           <a:bodyPr wrap="square" rtlCol="0" anchor="ctr"/>
           <a:lstStyle/>
           <a:p>
-            <a:pPr indent="0" marL="0">
+            <a:pPr marL="0" indent="0">
               <a:buNone/>
             </a:pPr>
             <a:r>
@@ -9419,7 +9628,7 @@
           <a:bodyPr wrap="square" rtlCol="0" anchor="ctr"/>
           <a:lstStyle/>
           <a:p>
-            <a:pPr indent="0" marL="0">
+            <a:pPr marL="0" indent="0">
               <a:buNone/>
             </a:pPr>
             <a:r>
@@ -9458,7 +9667,7 @@
           <a:bodyPr wrap="square" rtlCol="0" anchor="ctr"/>
           <a:lstStyle/>
           <a:p>
-            <a:pPr algn="ctr" indent="0" marL="0">
+            <a:pPr marL="0" indent="0" algn="ctr">
               <a:buNone/>
             </a:pPr>
             <a:r>
@@ -9497,7 +9706,7 @@
           <a:bodyPr wrap="square" rtlCol="0" anchor="ctr"/>
           <a:lstStyle/>
           <a:p>
-            <a:pPr algn="r" indent="0" marL="0">
+            <a:pPr marL="0" indent="0" algn="r">
               <a:buNone/>
             </a:pPr>
             <a:r>
@@ -9511,9 +9720,6 @@
               </a:rPr>
               <a:t>EMEA </a:t>
             </a:r>
-            <a:pPr algn="r" indent="0" marL="0">
-              <a:buNone/>
-            </a:pPr>
             <a:r>
               <a:rPr lang="en-US" sz="1200" dirty="0">
                 <a:solidFill>
@@ -9525,9 +9731,6 @@
               </a:rPr>
               <a:t>| </a:t>
             </a:r>
-            <a:pPr algn="r" indent="0" marL="0">
-              <a:buNone/>
-            </a:pPr>
             <a:r>
               <a:rPr lang="en-US" sz="1200" b="1" dirty="0">
                 <a:solidFill>
@@ -9569,13 +9772,20 @@
             <a:prstDash val="solid"/>
           </a:ln>
           <a:effectLst>
-            <a:outerShdw sx="100000" sy="100000" kx="0" ky="0" algn="bl" rotWithShape="0" blurRad="88900" dist="25400" dir="5400000">
+            <a:outerShdw blurRad="88900" dist="25400" dir="5400000" algn="bl" rotWithShape="0">
               <a:srgbClr val="8AA0BC">
                 <a:alpha val="28000"/>
               </a:srgbClr>
             </a:outerShdw>
           </a:effectLst>
         </p:spPr>
+        <p:txBody>
+          <a:bodyPr/>
+          <a:lstStyle/>
+          <a:p>
+            <a:endParaRPr lang="en-GB"/>
+          </a:p>
+        </p:txBody>
       </p:sp>
       <p:sp>
         <p:nvSpPr>
@@ -9598,6 +9808,13 @@
           </a:solidFill>
           <a:ln/>
         </p:spPr>
+        <p:txBody>
+          <a:bodyPr/>
+          <a:lstStyle/>
+          <a:p>
+            <a:endParaRPr lang="en-GB"/>
+          </a:p>
+        </p:txBody>
       </p:sp>
       <p:sp>
         <p:nvSpPr>
@@ -9618,6 +9835,13 @@
           </a:solidFill>
           <a:ln/>
         </p:spPr>
+        <p:txBody>
+          <a:bodyPr/>
+          <a:lstStyle/>
+          <a:p>
+            <a:endParaRPr lang="en-GB"/>
+          </a:p>
+        </p:txBody>
       </p:sp>
       <p:sp>
         <p:nvSpPr>
@@ -9640,7 +9864,7 @@
           <a:bodyPr wrap="square" rtlCol="0" anchor="ctr"/>
           <a:lstStyle/>
           <a:p>
-            <a:pPr algn="ctr" indent="0" marL="0">
+            <a:pPr marL="0" indent="0" algn="ctr">
               <a:buNone/>
             </a:pPr>
             <a:r>
@@ -9679,7 +9903,7 @@
           <a:bodyPr wrap="square" rtlCol="0" anchor="ctr"/>
           <a:lstStyle/>
           <a:p>
-            <a:pPr indent="0" marL="0">
+            <a:pPr marL="0" indent="0">
               <a:buNone/>
             </a:pPr>
             <a:r>
@@ -9718,7 +9942,7 @@
           <a:bodyPr wrap="square" rtlCol="0" anchor="ctr"/>
           <a:lstStyle/>
           <a:p>
-            <a:pPr indent="0" marL="0">
+            <a:pPr marL="0" indent="0">
               <a:buNone/>
             </a:pPr>
             <a:r>
@@ -9757,7 +9981,7 @@
           <a:bodyPr wrap="square" rtlCol="0" anchor="ctr"/>
           <a:lstStyle/>
           <a:p>
-            <a:pPr indent="0" marL="0">
+            <a:pPr marL="0" indent="0">
               <a:buNone/>
             </a:pPr>
             <a:r>
@@ -9796,7 +10020,7 @@
           <a:bodyPr wrap="square" rtlCol="0" anchor="t"/>
           <a:lstStyle/>
           <a:p>
-            <a:pPr indent="0" marL="0">
+            <a:pPr marL="0" indent="0">
               <a:buNone/>
             </a:pPr>
             <a:r>
@@ -9835,6 +10059,13 @@
           </a:solidFill>
           <a:ln/>
         </p:spPr>
+        <p:txBody>
+          <a:bodyPr/>
+          <a:lstStyle/>
+          <a:p>
+            <a:endParaRPr lang="en-GB"/>
+          </a:p>
+        </p:txBody>
       </p:sp>
       <p:sp>
         <p:nvSpPr>
@@ -9857,7 +10088,7 @@
           <a:bodyPr wrap="square" rtlCol="0" anchor="ctr"/>
           <a:lstStyle/>
           <a:p>
-            <a:pPr indent="0" marL="0">
+            <a:pPr marL="0" indent="0">
               <a:buNone/>
             </a:pPr>
             <a:r>
@@ -9871,9 +10102,6 @@
               </a:rPr>
               <a:t>PRIMARY KPI   </a:t>
             </a:r>
-            <a:pPr indent="0" marL="0">
-              <a:buNone/>
-            </a:pPr>
             <a:r>
               <a:rPr lang="en-US" sz="1250" b="1" dirty="0">
                 <a:solidFill>
@@ -9915,13 +10143,20 @@
             <a:prstDash val="solid"/>
           </a:ln>
           <a:effectLst>
-            <a:outerShdw sx="100000" sy="100000" kx="0" ky="0" algn="bl" rotWithShape="0" blurRad="88900" dist="25400" dir="5400000">
+            <a:outerShdw blurRad="88900" dist="25400" dir="5400000" algn="bl" rotWithShape="0">
               <a:srgbClr val="8AA0BC">
                 <a:alpha val="28000"/>
               </a:srgbClr>
             </a:outerShdw>
           </a:effectLst>
         </p:spPr>
+        <p:txBody>
+          <a:bodyPr/>
+          <a:lstStyle/>
+          <a:p>
+            <a:endParaRPr lang="en-GB"/>
+          </a:p>
+        </p:txBody>
       </p:sp>
       <p:sp>
         <p:nvSpPr>
@@ -9944,6 +10179,13 @@
           </a:solidFill>
           <a:ln/>
         </p:spPr>
+        <p:txBody>
+          <a:bodyPr/>
+          <a:lstStyle/>
+          <a:p>
+            <a:endParaRPr lang="en-GB"/>
+          </a:p>
+        </p:txBody>
       </p:sp>
       <p:sp>
         <p:nvSpPr>
@@ -9964,6 +10206,13 @@
           </a:solidFill>
           <a:ln/>
         </p:spPr>
+        <p:txBody>
+          <a:bodyPr/>
+          <a:lstStyle/>
+          <a:p>
+            <a:endParaRPr lang="en-GB"/>
+          </a:p>
+        </p:txBody>
       </p:sp>
       <p:sp>
         <p:nvSpPr>
@@ -9986,7 +10235,7 @@
           <a:bodyPr wrap="square" rtlCol="0" anchor="ctr"/>
           <a:lstStyle/>
           <a:p>
-            <a:pPr algn="ctr" indent="0" marL="0">
+            <a:pPr marL="0" indent="0" algn="ctr">
               <a:buNone/>
             </a:pPr>
             <a:r>
@@ -10025,7 +10274,7 @@
           <a:bodyPr wrap="square" rtlCol="0" anchor="ctr"/>
           <a:lstStyle/>
           <a:p>
-            <a:pPr indent="0" marL="0">
+            <a:pPr marL="0" indent="0">
               <a:buNone/>
             </a:pPr>
             <a:r>
@@ -10064,7 +10313,7 @@
           <a:bodyPr wrap="square" rtlCol="0" anchor="ctr"/>
           <a:lstStyle/>
           <a:p>
-            <a:pPr indent="0" marL="0">
+            <a:pPr marL="0" indent="0">
               <a:buNone/>
             </a:pPr>
             <a:r>
@@ -10103,7 +10352,7 @@
           <a:bodyPr wrap="square" rtlCol="0" anchor="ctr"/>
           <a:lstStyle/>
           <a:p>
-            <a:pPr indent="0" marL="0">
+            <a:pPr marL="0" indent="0">
               <a:buNone/>
             </a:pPr>
             <a:r>
@@ -10142,7 +10391,7 @@
           <a:bodyPr wrap="square" rtlCol="0" anchor="t"/>
           <a:lstStyle/>
           <a:p>
-            <a:pPr indent="0" marL="0">
+            <a:pPr marL="0" indent="0">
               <a:buNone/>
             </a:pPr>
             <a:r>
@@ -10181,6 +10430,13 @@
           </a:solidFill>
           <a:ln/>
         </p:spPr>
+        <p:txBody>
+          <a:bodyPr/>
+          <a:lstStyle/>
+          <a:p>
+            <a:endParaRPr lang="en-GB"/>
+          </a:p>
+        </p:txBody>
       </p:sp>
       <p:sp>
         <p:nvSpPr>
@@ -10203,7 +10459,7 @@
           <a:bodyPr wrap="square" rtlCol="0" anchor="ctr"/>
           <a:lstStyle/>
           <a:p>
-            <a:pPr indent="0" marL="0">
+            <a:pPr marL="0" indent="0">
               <a:buNone/>
             </a:pPr>
             <a:r>
@@ -10217,9 +10473,6 @@
               </a:rPr>
               <a:t>PRIMARY KPI   </a:t>
             </a:r>
-            <a:pPr indent="0" marL="0">
-              <a:buNone/>
-            </a:pPr>
             <a:r>
               <a:rPr lang="en-US" sz="1250" b="1" dirty="0">
                 <a:solidFill>
@@ -10256,6 +10509,13 @@
           </a:solidFill>
           <a:ln/>
         </p:spPr>
+        <p:txBody>
+          <a:bodyPr/>
+          <a:lstStyle/>
+          <a:p>
+            <a:endParaRPr lang="en-GB"/>
+          </a:p>
+        </p:txBody>
       </p:sp>
       <p:sp>
         <p:nvSpPr>
@@ -10278,7 +10538,7 @@
           <a:bodyPr wrap="square" rtlCol="0" anchor="ctr"/>
           <a:lstStyle/>
           <a:p>
-            <a:pPr indent="0" marL="0">
+            <a:pPr marL="0" indent="0">
               <a:buNone/>
             </a:pPr>
             <a:r>
@@ -10292,9 +10552,6 @@
               </a:rPr>
               <a:t>The core idea   </a:t>
             </a:r>
-            <a:pPr indent="0" marL="0">
-              <a:buNone/>
-            </a:pPr>
             <a:r>
               <a:rPr lang="en-US" sz="1300" dirty="0">
                 <a:solidFill>
@@ -10306,9 +10563,6 @@
               </a:rPr>
               <a:t>Microsoft does not build new tooling — Fabric, Rayfin, the Extensibility Toolkit and the GitHub Copilot CLI already exist. We package </a:t>
             </a:r>
-            <a:pPr indent="0" marL="0">
-              <a:buNone/>
-            </a:pPr>
             <a:r>
               <a:rPr lang="en-US" sz="1300" b="1" dirty="0">
                 <a:solidFill>
@@ -10338,7 +10592,7 @@
     <p:bg>
       <p:bgPr>
         <a:blipFill dpi="0" rotWithShape="1">
-          <a:blip r:embed="rId1">
+          <a:blip r:embed="rId3">
             <a:lum/>
           </a:blip>
           <a:srcRect/>
@@ -10384,7 +10638,7 @@
           <a:bodyPr wrap="square" rtlCol="0" anchor="ctr"/>
           <a:lstStyle/>
           <a:p>
-            <a:pPr indent="0" marL="0">
+            <a:pPr marL="0" indent="0">
               <a:buNone/>
             </a:pPr>
             <a:r>
@@ -10423,7 +10677,7 @@
           <a:bodyPr wrap="square" rtlCol="0" anchor="ctr"/>
           <a:lstStyle/>
           <a:p>
-            <a:pPr indent="0" marL="0">
+            <a:pPr marL="0" indent="0">
               <a:buNone/>
             </a:pPr>
             <a:r>
@@ -10462,7 +10716,7 @@
           <a:bodyPr wrap="square" rtlCol="0" anchor="ctr"/>
           <a:lstStyle/>
           <a:p>
-            <a:pPr indent="0" marL="0">
+            <a:pPr marL="0" indent="0">
               <a:buNone/>
             </a:pPr>
             <a:r>
@@ -10501,7 +10755,7 @@
           <a:bodyPr wrap="square" rtlCol="0" anchor="ctr"/>
           <a:lstStyle/>
           <a:p>
-            <a:pPr algn="ctr" indent="0" marL="0">
+            <a:pPr marL="0" indent="0" algn="ctr">
               <a:buNone/>
             </a:pPr>
             <a:r>
@@ -10540,7 +10794,7 @@
           <a:bodyPr wrap="square" rtlCol="0" anchor="ctr"/>
           <a:lstStyle/>
           <a:p>
-            <a:pPr algn="r" indent="0" marL="0">
+            <a:pPr marL="0" indent="0" algn="r">
               <a:buNone/>
             </a:pPr>
             <a:r>
@@ -10554,9 +10808,6 @@
               </a:rPr>
               <a:t>EMEA </a:t>
             </a:r>
-            <a:pPr algn="r" indent="0" marL="0">
-              <a:buNone/>
-            </a:pPr>
             <a:r>
               <a:rPr lang="en-US" sz="1200" dirty="0">
                 <a:solidFill>
@@ -10568,9 +10819,6 @@
               </a:rPr>
               <a:t>| </a:t>
             </a:r>
-            <a:pPr algn="r" indent="0" marL="0">
-              <a:buNone/>
-            </a:pPr>
             <a:r>
               <a:rPr lang="en-US" sz="1200" b="1" dirty="0">
                 <a:solidFill>
@@ -10607,6 +10855,13 @@
           </a:solidFill>
           <a:ln/>
         </p:spPr>
+        <p:txBody>
+          <a:bodyPr/>
+          <a:lstStyle/>
+          <a:p>
+            <a:endParaRPr lang="en-GB"/>
+          </a:p>
+        </p:txBody>
       </p:sp>
       <p:sp>
         <p:nvSpPr>
@@ -10627,6 +10882,13 @@
           </a:solidFill>
           <a:ln/>
         </p:spPr>
+        <p:txBody>
+          <a:bodyPr/>
+          <a:lstStyle/>
+          <a:p>
+            <a:endParaRPr lang="en-GB"/>
+          </a:p>
+        </p:txBody>
       </p:sp>
       <p:sp>
         <p:nvSpPr>
@@ -10649,7 +10911,7 @@
           <a:bodyPr wrap="square" rtlCol="0" anchor="ctr"/>
           <a:lstStyle/>
           <a:p>
-            <a:pPr algn="ctr" indent="0" marL="0">
+            <a:pPr marL="0" indent="0" algn="ctr">
               <a:buNone/>
             </a:pPr>
             <a:r>
@@ -10688,7 +10950,7 @@
           <a:bodyPr wrap="square" rtlCol="0" anchor="ctr"/>
           <a:lstStyle/>
           <a:p>
-            <a:pPr algn="ctr" indent="0" marL="0">
+            <a:pPr marL="0" indent="0" algn="ctr">
               <a:buNone/>
             </a:pPr>
             <a:r>
@@ -10727,7 +10989,7 @@
           <a:bodyPr wrap="square" rtlCol="0" anchor="t"/>
           <a:lstStyle/>
           <a:p>
-            <a:pPr algn="ctr" indent="0" marL="0">
+            <a:pPr marL="0" indent="0" algn="ctr">
               <a:buNone/>
             </a:pPr>
             <a:r>
@@ -10768,6 +11030,13 @@
             <a:tailEnd type="triangle"/>
           </a:ln>
         </p:spPr>
+        <p:txBody>
+          <a:bodyPr/>
+          <a:lstStyle/>
+          <a:p>
+            <a:endParaRPr lang="en-GB"/>
+          </a:p>
+        </p:txBody>
       </p:sp>
       <p:sp>
         <p:nvSpPr>
@@ -10795,6 +11064,13 @@
             <a:prstDash val="solid"/>
           </a:ln>
         </p:spPr>
+        <p:txBody>
+          <a:bodyPr/>
+          <a:lstStyle/>
+          <a:p>
+            <a:endParaRPr lang="en-GB"/>
+          </a:p>
+        </p:txBody>
       </p:sp>
       <p:sp>
         <p:nvSpPr>
@@ -10815,6 +11091,13 @@
           </a:solidFill>
           <a:ln/>
         </p:spPr>
+        <p:txBody>
+          <a:bodyPr/>
+          <a:lstStyle/>
+          <a:p>
+            <a:endParaRPr lang="en-GB"/>
+          </a:p>
+        </p:txBody>
       </p:sp>
       <p:sp>
         <p:nvSpPr>
@@ -10837,7 +11120,7 @@
           <a:bodyPr wrap="square" rtlCol="0" anchor="ctr"/>
           <a:lstStyle/>
           <a:p>
-            <a:pPr algn="ctr" indent="0" marL="0">
+            <a:pPr marL="0" indent="0" algn="ctr">
               <a:buNone/>
             </a:pPr>
             <a:r>
@@ -10876,7 +11159,7 @@
           <a:bodyPr wrap="square" rtlCol="0" anchor="ctr"/>
           <a:lstStyle/>
           <a:p>
-            <a:pPr algn="ctr" indent="0" marL="0">
+            <a:pPr marL="0" indent="0" algn="ctr">
               <a:buNone/>
             </a:pPr>
             <a:r>
@@ -10915,7 +11198,7 @@
           <a:bodyPr wrap="square" rtlCol="0" anchor="ctr"/>
           <a:lstStyle/>
           <a:p>
-            <a:pPr algn="ctr" indent="0" marL="0">
+            <a:pPr marL="0" indent="0" algn="ctr">
               <a:buNone/>
             </a:pPr>
             <a:r>
@@ -10954,6 +11237,13 @@
           </a:solidFill>
           <a:ln/>
         </p:spPr>
+        <p:txBody>
+          <a:bodyPr/>
+          <a:lstStyle/>
+          <a:p>
+            <a:endParaRPr lang="en-GB"/>
+          </a:p>
+        </p:txBody>
       </p:sp>
       <p:sp>
         <p:nvSpPr>
@@ -10976,7 +11266,7 @@
           <a:bodyPr wrap="square" rtlCol="0" anchor="ctr"/>
           <a:lstStyle/>
           <a:p>
-            <a:pPr indent="0" marL="0">
+            <a:pPr marL="0" indent="0">
               <a:buNone/>
             </a:pPr>
             <a:r>
@@ -10990,9 +11280,6 @@
               </a:rPr>
               <a:t>Morning — Content  </a:t>
             </a:r>
-            <a:pPr indent="0" marL="0">
-              <a:buNone/>
-            </a:pPr>
             <a:r>
               <a:rPr lang="en-US" sz="1100" dirty="0">
                 <a:solidFill>
@@ -11029,6 +11316,13 @@
           </a:solidFill>
           <a:ln/>
         </p:spPr>
+        <p:txBody>
+          <a:bodyPr/>
+          <a:lstStyle/>
+          <a:p>
+            <a:endParaRPr lang="en-GB"/>
+          </a:p>
+        </p:txBody>
       </p:sp>
       <p:sp>
         <p:nvSpPr>
@@ -11051,7 +11345,7 @@
           <a:bodyPr wrap="square" rtlCol="0" anchor="ctr"/>
           <a:lstStyle/>
           <a:p>
-            <a:pPr indent="0" marL="0">
+            <a:pPr marL="0" indent="0">
               <a:buNone/>
             </a:pPr>
             <a:r>
@@ -11065,9 +11359,6 @@
               </a:rPr>
               <a:t>Afternoon — Build  </a:t>
             </a:r>
-            <a:pPr indent="0" marL="0">
-              <a:buNone/>
-            </a:pPr>
             <a:r>
               <a:rPr lang="en-US" sz="1100" dirty="0">
                 <a:solidFill>
@@ -11106,6 +11397,13 @@
             <a:tailEnd type="triangle"/>
           </a:ln>
         </p:spPr>
+        <p:txBody>
+          <a:bodyPr/>
+          <a:lstStyle/>
+          <a:p>
+            <a:endParaRPr lang="en-GB"/>
+          </a:p>
+        </p:txBody>
       </p:sp>
       <p:sp>
         <p:nvSpPr>
@@ -11130,6 +11428,13 @@
             <a:tailEnd type="triangle"/>
           </a:ln>
         </p:spPr>
+        <p:txBody>
+          <a:bodyPr/>
+          <a:lstStyle/>
+          <a:p>
+            <a:endParaRPr lang="en-GB"/>
+          </a:p>
+        </p:txBody>
       </p:sp>
       <p:sp>
         <p:nvSpPr>
@@ -11157,6 +11462,13 @@
             <a:prstDash val="solid"/>
           </a:ln>
         </p:spPr>
+        <p:txBody>
+          <a:bodyPr/>
+          <a:lstStyle/>
+          <a:p>
+            <a:endParaRPr lang="en-GB"/>
+          </a:p>
+        </p:txBody>
       </p:sp>
       <p:sp>
         <p:nvSpPr>
@@ -11177,6 +11489,13 @@
           </a:solidFill>
           <a:ln/>
         </p:spPr>
+        <p:txBody>
+          <a:bodyPr/>
+          <a:lstStyle/>
+          <a:p>
+            <a:endParaRPr lang="en-GB"/>
+          </a:p>
+        </p:txBody>
       </p:sp>
       <p:sp>
         <p:nvSpPr>
@@ -11199,7 +11518,7 @@
           <a:bodyPr wrap="square" rtlCol="0" anchor="ctr"/>
           <a:lstStyle/>
           <a:p>
-            <a:pPr indent="0" marL="0">
+            <a:pPr marL="0" indent="0">
               <a:buNone/>
             </a:pPr>
             <a:r>
@@ -11238,7 +11557,7 @@
           <a:bodyPr wrap="square" rtlCol="0" anchor="ctr"/>
           <a:lstStyle/>
           <a:p>
-            <a:pPr indent="0" marL="0">
+            <a:pPr marL="0" indent="0">
               <a:buNone/>
             </a:pPr>
             <a:r>
@@ -11277,6 +11596,13 @@
           </a:solidFill>
           <a:ln/>
         </p:spPr>
+        <p:txBody>
+          <a:bodyPr/>
+          <a:lstStyle/>
+          <a:p>
+            <a:endParaRPr lang="en-GB"/>
+          </a:p>
+        </p:txBody>
       </p:sp>
       <p:sp>
         <p:nvSpPr>
@@ -11299,7 +11625,7 @@
           <a:bodyPr wrap="square" rtlCol="0" anchor="ctr"/>
           <a:lstStyle/>
           <a:p>
-            <a:pPr indent="0" marL="0">
+            <a:pPr marL="0" indent="0">
               <a:buNone/>
             </a:pPr>
             <a:r>
@@ -11313,9 +11639,6 @@
               </a:rPr>
               <a:t>KPI   </a:t>
             </a:r>
-            <a:pPr indent="0" marL="0">
-              <a:buNone/>
-            </a:pPr>
             <a:r>
               <a:rPr lang="en-US" sz="1250" b="1" dirty="0">
                 <a:solidFill>
@@ -11357,6 +11680,13 @@
             <a:prstDash val="solid"/>
           </a:ln>
         </p:spPr>
+        <p:txBody>
+          <a:bodyPr/>
+          <a:lstStyle/>
+          <a:p>
+            <a:endParaRPr lang="en-GB"/>
+          </a:p>
+        </p:txBody>
       </p:sp>
       <p:sp>
         <p:nvSpPr>
@@ -11377,6 +11707,13 @@
           </a:solidFill>
           <a:ln/>
         </p:spPr>
+        <p:txBody>
+          <a:bodyPr/>
+          <a:lstStyle/>
+          <a:p>
+            <a:endParaRPr lang="en-GB"/>
+          </a:p>
+        </p:txBody>
       </p:sp>
       <p:sp>
         <p:nvSpPr>
@@ -11399,7 +11736,7 @@
           <a:bodyPr wrap="square" rtlCol="0" anchor="ctr"/>
           <a:lstStyle/>
           <a:p>
-            <a:pPr indent="0" marL="0">
+            <a:pPr marL="0" indent="0">
               <a:buNone/>
             </a:pPr>
             <a:r>
@@ -11438,7 +11775,7 @@
           <a:bodyPr wrap="square" rtlCol="0" anchor="ctr"/>
           <a:lstStyle/>
           <a:p>
-            <a:pPr indent="0" marL="0">
+            <a:pPr marL="0" indent="0">
               <a:buNone/>
             </a:pPr>
             <a:r>
@@ -11477,6 +11814,13 @@
           </a:solidFill>
           <a:ln/>
         </p:spPr>
+        <p:txBody>
+          <a:bodyPr/>
+          <a:lstStyle/>
+          <a:p>
+            <a:endParaRPr lang="en-GB"/>
+          </a:p>
+        </p:txBody>
       </p:sp>
       <p:sp>
         <p:nvSpPr>
@@ -11499,7 +11843,7 @@
           <a:bodyPr wrap="square" rtlCol="0" anchor="ctr"/>
           <a:lstStyle/>
           <a:p>
-            <a:pPr indent="0" marL="0">
+            <a:pPr marL="0" indent="0">
               <a:buNone/>
             </a:pPr>
             <a:r>
@@ -11513,9 +11857,6 @@
               </a:rPr>
               <a:t>KPI   </a:t>
             </a:r>
-            <a:pPr indent="0" marL="0">
-              <a:buNone/>
-            </a:pPr>
             <a:r>
               <a:rPr lang="en-US" sz="1250" b="1" dirty="0">
                 <a:solidFill>
@@ -11557,6 +11898,13 @@
             <a:prstDash val="solid"/>
           </a:ln>
         </p:spPr>
+        <p:txBody>
+          <a:bodyPr/>
+          <a:lstStyle/>
+          <a:p>
+            <a:endParaRPr lang="en-GB"/>
+          </a:p>
+        </p:txBody>
       </p:sp>
       <p:sp>
         <p:nvSpPr>
@@ -11579,7 +11927,7 @@
           <a:bodyPr wrap="square" rtlCol="0" anchor="ctr"/>
           <a:lstStyle/>
           <a:p>
-            <a:pPr indent="0" marL="0">
+            <a:pPr marL="0" indent="0">
               <a:buNone/>
             </a:pPr>
             <a:r>
@@ -11593,9 +11941,6 @@
               </a:rPr>
               <a:t>Operating principle   </a:t>
             </a:r>
-            <a:pPr indent="0" marL="0">
-              <a:buNone/>
-            </a:pPr>
             <a:r>
               <a:rPr lang="en-US" sz="1300" dirty="0">
                 <a:solidFill>
@@ -11625,7 +11970,7 @@
     <p:bg>
       <p:bgPr>
         <a:blipFill dpi="0" rotWithShape="1">
-          <a:blip r:embed="rId1">
+          <a:blip r:embed="rId3">
             <a:lum/>
           </a:blip>
           <a:srcRect/>
@@ -11671,7 +12016,7 @@
           <a:bodyPr wrap="square" rtlCol="0" anchor="ctr"/>
           <a:lstStyle/>
           <a:p>
-            <a:pPr indent="0" marL="0">
+            <a:pPr marL="0" indent="0">
               <a:buNone/>
             </a:pPr>
             <a:r>
@@ -11710,7 +12055,7 @@
           <a:bodyPr wrap="square" rtlCol="0" anchor="ctr"/>
           <a:lstStyle/>
           <a:p>
-            <a:pPr indent="0" marL="0">
+            <a:pPr marL="0" indent="0">
               <a:buNone/>
             </a:pPr>
             <a:r>
@@ -11749,7 +12094,7 @@
           <a:bodyPr wrap="square" rtlCol="0" anchor="ctr"/>
           <a:lstStyle/>
           <a:p>
-            <a:pPr indent="0" marL="0">
+            <a:pPr marL="0" indent="0">
               <a:buNone/>
             </a:pPr>
             <a:r>
@@ -11788,7 +12133,7 @@
           <a:bodyPr wrap="square" rtlCol="0" anchor="ctr"/>
           <a:lstStyle/>
           <a:p>
-            <a:pPr algn="ctr" indent="0" marL="0">
+            <a:pPr marL="0" indent="0" algn="ctr">
               <a:buNone/>
             </a:pPr>
             <a:r>
@@ -11827,7 +12172,7 @@
           <a:bodyPr wrap="square" rtlCol="0" anchor="ctr"/>
           <a:lstStyle/>
           <a:p>
-            <a:pPr algn="r" indent="0" marL="0">
+            <a:pPr marL="0" indent="0" algn="r">
               <a:buNone/>
             </a:pPr>
             <a:r>
@@ -11841,9 +12186,6 @@
               </a:rPr>
               <a:t>EMEA </a:t>
             </a:r>
-            <a:pPr algn="r" indent="0" marL="0">
-              <a:buNone/>
-            </a:pPr>
             <a:r>
               <a:rPr lang="en-US" sz="1200" dirty="0">
                 <a:solidFill>
@@ -11855,9 +12197,6 @@
               </a:rPr>
               <a:t>| </a:t>
             </a:r>
-            <a:pPr algn="r" indent="0" marL="0">
-              <a:buNone/>
-            </a:pPr>
             <a:r>
               <a:rPr lang="en-US" sz="1200" b="1" dirty="0">
                 <a:solidFill>
@@ -11899,13 +12238,20 @@
             <a:prstDash val="solid"/>
           </a:ln>
           <a:effectLst>
-            <a:outerShdw sx="100000" sy="100000" kx="0" ky="0" algn="bl" rotWithShape="0" blurRad="88900" dist="25400" dir="5400000">
+            <a:outerShdw blurRad="88900" dist="25400" dir="5400000" algn="bl" rotWithShape="0">
               <a:srgbClr val="8AA0BC">
                 <a:alpha val="28000"/>
               </a:srgbClr>
             </a:outerShdw>
           </a:effectLst>
         </p:spPr>
+        <p:txBody>
+          <a:bodyPr/>
+          <a:lstStyle/>
+          <a:p>
+            <a:endParaRPr lang="en-GB"/>
+          </a:p>
+        </p:txBody>
       </p:sp>
       <p:sp>
         <p:nvSpPr>
@@ -11928,6 +12274,13 @@
           </a:solidFill>
           <a:ln/>
         </p:spPr>
+        <p:txBody>
+          <a:bodyPr/>
+          <a:lstStyle/>
+          <a:p>
+            <a:endParaRPr lang="en-GB"/>
+          </a:p>
+        </p:txBody>
       </p:sp>
       <p:sp>
         <p:nvSpPr>
@@ -11950,7 +12303,7 @@
           <a:bodyPr wrap="square" rtlCol="0" anchor="ctr"/>
           <a:lstStyle/>
           <a:p>
-            <a:pPr algn="ctr" indent="0" marL="0">
+            <a:pPr marL="0" indent="0" algn="ctr">
               <a:buNone/>
             </a:pPr>
             <a:r>
@@ -11989,7 +12342,7 @@
           <a:bodyPr wrap="square" rtlCol="0" anchor="t"/>
           <a:lstStyle/>
           <a:p>
-            <a:pPr algn="ctr" indent="0" marL="0">
+            <a:pPr marL="0" indent="0" algn="ctr">
               <a:buNone/>
             </a:pPr>
             <a:r>
@@ -12028,7 +12381,7 @@
           <a:bodyPr wrap="square" rtlCol="0" anchor="ctr"/>
           <a:lstStyle/>
           <a:p>
-            <a:pPr algn="ctr" indent="0" marL="0">
+            <a:pPr marL="0" indent="0" algn="ctr">
               <a:buNone/>
             </a:pPr>
             <a:r>
@@ -12072,13 +12425,20 @@
             <a:prstDash val="solid"/>
           </a:ln>
           <a:effectLst>
-            <a:outerShdw sx="100000" sy="100000" kx="0" ky="0" algn="bl" rotWithShape="0" blurRad="88900" dist="25400" dir="5400000">
+            <a:outerShdw blurRad="88900" dist="25400" dir="5400000" algn="bl" rotWithShape="0">
               <a:srgbClr val="8AA0BC">
                 <a:alpha val="28000"/>
               </a:srgbClr>
             </a:outerShdw>
           </a:effectLst>
         </p:spPr>
+        <p:txBody>
+          <a:bodyPr/>
+          <a:lstStyle/>
+          <a:p>
+            <a:endParaRPr lang="en-GB"/>
+          </a:p>
+        </p:txBody>
       </p:sp>
       <p:sp>
         <p:nvSpPr>
@@ -12101,6 +12461,13 @@
           </a:solidFill>
           <a:ln/>
         </p:spPr>
+        <p:txBody>
+          <a:bodyPr/>
+          <a:lstStyle/>
+          <a:p>
+            <a:endParaRPr lang="en-GB"/>
+          </a:p>
+        </p:txBody>
       </p:sp>
       <p:sp>
         <p:nvSpPr>
@@ -12123,7 +12490,7 @@
           <a:bodyPr wrap="square" rtlCol="0" anchor="ctr"/>
           <a:lstStyle/>
           <a:p>
-            <a:pPr algn="ctr" indent="0" marL="0">
+            <a:pPr marL="0" indent="0" algn="ctr">
               <a:buNone/>
             </a:pPr>
             <a:r>
@@ -12162,7 +12529,7 @@
           <a:bodyPr wrap="square" rtlCol="0" anchor="t"/>
           <a:lstStyle/>
           <a:p>
-            <a:pPr algn="ctr" indent="0" marL="0">
+            <a:pPr marL="0" indent="0" algn="ctr">
               <a:buNone/>
             </a:pPr>
             <a:r>
@@ -12201,7 +12568,7 @@
           <a:bodyPr wrap="square" rtlCol="0" anchor="ctr"/>
           <a:lstStyle/>
           <a:p>
-            <a:pPr algn="ctr" indent="0" marL="0">
+            <a:pPr marL="0" indent="0" algn="ctr">
               <a:buNone/>
             </a:pPr>
             <a:r>
@@ -12245,13 +12612,20 @@
             <a:prstDash val="solid"/>
           </a:ln>
           <a:effectLst>
-            <a:outerShdw sx="100000" sy="100000" kx="0" ky="0" algn="bl" rotWithShape="0" blurRad="88900" dist="25400" dir="5400000">
+            <a:outerShdw blurRad="88900" dist="25400" dir="5400000" algn="bl" rotWithShape="0">
               <a:srgbClr val="8AA0BC">
                 <a:alpha val="28000"/>
               </a:srgbClr>
             </a:outerShdw>
           </a:effectLst>
         </p:spPr>
+        <p:txBody>
+          <a:bodyPr/>
+          <a:lstStyle/>
+          <a:p>
+            <a:endParaRPr lang="en-GB"/>
+          </a:p>
+        </p:txBody>
       </p:sp>
       <p:sp>
         <p:nvSpPr>
@@ -12274,6 +12648,13 @@
           </a:solidFill>
           <a:ln/>
         </p:spPr>
+        <p:txBody>
+          <a:bodyPr/>
+          <a:lstStyle/>
+          <a:p>
+            <a:endParaRPr lang="en-GB"/>
+          </a:p>
+        </p:txBody>
       </p:sp>
       <p:sp>
         <p:nvSpPr>
@@ -12296,7 +12677,7 @@
           <a:bodyPr wrap="square" rtlCol="0" anchor="ctr"/>
           <a:lstStyle/>
           <a:p>
-            <a:pPr algn="ctr" indent="0" marL="0">
+            <a:pPr marL="0" indent="0" algn="ctr">
               <a:buNone/>
             </a:pPr>
             <a:r>
@@ -12335,7 +12716,7 @@
           <a:bodyPr wrap="square" rtlCol="0" anchor="t"/>
           <a:lstStyle/>
           <a:p>
-            <a:pPr algn="ctr" indent="0" marL="0">
+            <a:pPr marL="0" indent="0" algn="ctr">
               <a:buNone/>
             </a:pPr>
             <a:r>
@@ -12374,7 +12755,7 @@
           <a:bodyPr wrap="square" rtlCol="0" anchor="ctr"/>
           <a:lstStyle/>
           <a:p>
-            <a:pPr algn="ctr" indent="0" marL="0">
+            <a:pPr marL="0" indent="0" algn="ctr">
               <a:buNone/>
             </a:pPr>
             <a:r>
@@ -12418,13 +12799,20 @@
             <a:prstDash val="solid"/>
           </a:ln>
           <a:effectLst>
-            <a:outerShdw sx="100000" sy="100000" kx="0" ky="0" algn="bl" rotWithShape="0" blurRad="88900" dist="25400" dir="5400000">
+            <a:outerShdw blurRad="88900" dist="25400" dir="5400000" algn="bl" rotWithShape="0">
               <a:srgbClr val="8AA0BC">
                 <a:alpha val="28000"/>
               </a:srgbClr>
             </a:outerShdw>
           </a:effectLst>
         </p:spPr>
+        <p:txBody>
+          <a:bodyPr/>
+          <a:lstStyle/>
+          <a:p>
+            <a:endParaRPr lang="en-GB"/>
+          </a:p>
+        </p:txBody>
       </p:sp>
       <p:sp>
         <p:nvSpPr>
@@ -12447,6 +12835,13 @@
           </a:solidFill>
           <a:ln/>
         </p:spPr>
+        <p:txBody>
+          <a:bodyPr/>
+          <a:lstStyle/>
+          <a:p>
+            <a:endParaRPr lang="en-GB"/>
+          </a:p>
+        </p:txBody>
       </p:sp>
       <p:sp>
         <p:nvSpPr>
@@ -12469,7 +12864,7 @@
           <a:bodyPr wrap="square" rtlCol="0" anchor="ctr"/>
           <a:lstStyle/>
           <a:p>
-            <a:pPr algn="ctr" indent="0" marL="0">
+            <a:pPr marL="0" indent="0" algn="ctr">
               <a:buNone/>
             </a:pPr>
             <a:r>
@@ -12508,7 +12903,7 @@
           <a:bodyPr wrap="square" rtlCol="0" anchor="t"/>
           <a:lstStyle/>
           <a:p>
-            <a:pPr algn="ctr" indent="0" marL="0">
+            <a:pPr marL="0" indent="0" algn="ctr">
               <a:buNone/>
             </a:pPr>
             <a:r>
@@ -12547,7 +12942,7 @@
           <a:bodyPr wrap="square" rtlCol="0" anchor="ctr"/>
           <a:lstStyle/>
           <a:p>
-            <a:pPr algn="ctr" indent="0" marL="0">
+            <a:pPr marL="0" indent="0" algn="ctr">
               <a:buNone/>
             </a:pPr>
             <a:r>
@@ -12591,6 +12986,13 @@
             <a:prstDash val="solid"/>
           </a:ln>
         </p:spPr>
+        <p:txBody>
+          <a:bodyPr/>
+          <a:lstStyle/>
+          <a:p>
+            <a:endParaRPr lang="en-GB"/>
+          </a:p>
+        </p:txBody>
       </p:sp>
       <p:sp>
         <p:nvSpPr>
@@ -12611,6 +13013,13 @@
           </a:solidFill>
           <a:ln/>
         </p:spPr>
+        <p:txBody>
+          <a:bodyPr/>
+          <a:lstStyle/>
+          <a:p>
+            <a:endParaRPr lang="en-GB"/>
+          </a:p>
+        </p:txBody>
       </p:sp>
       <p:sp>
         <p:nvSpPr>
@@ -12633,7 +13042,7 @@
           <a:bodyPr wrap="square" rtlCol="0" anchor="ctr"/>
           <a:lstStyle/>
           <a:p>
-            <a:pPr algn="ctr" indent="0" marL="0">
+            <a:pPr marL="0" indent="0" algn="ctr">
               <a:buNone/>
             </a:pPr>
             <a:r>
@@ -12672,7 +13081,7 @@
           <a:bodyPr wrap="square" rtlCol="0" anchor="ctr"/>
           <a:lstStyle/>
           <a:p>
-            <a:pPr indent="0" marL="0">
+            <a:pPr marL="0" indent="0">
               <a:buNone/>
             </a:pPr>
             <a:r>
@@ -12686,9 +13095,6 @@
               </a:rPr>
               <a:t>Apps are the new compelling event.   </a:t>
             </a:r>
-            <a:pPr indent="0" marL="0">
-              <a:buNone/>
-            </a:pPr>
             <a:r>
               <a:rPr lang="en-US" sz="1250" dirty="0">
                 <a:solidFill>
@@ -12725,7 +13131,7 @@
           <a:bodyPr wrap="square" rtlCol="0" anchor="ctr"/>
           <a:lstStyle/>
           <a:p>
-            <a:pPr indent="0" marL="0">
+            <a:pPr marL="0" indent="0">
               <a:buNone/>
             </a:pPr>
             <a:r>
@@ -12769,13 +13175,20 @@
             <a:prstDash val="solid"/>
           </a:ln>
           <a:effectLst>
-            <a:outerShdw sx="100000" sy="100000" kx="0" ky="0" algn="bl" rotWithShape="0" blurRad="76200" dist="25400" dir="5400000">
+            <a:outerShdw blurRad="76200" dist="25400" dir="5400000" algn="bl" rotWithShape="0">
               <a:srgbClr val="8AA0BC">
                 <a:alpha val="25000"/>
               </a:srgbClr>
             </a:outerShdw>
           </a:effectLst>
         </p:spPr>
+        <p:txBody>
+          <a:bodyPr/>
+          <a:lstStyle/>
+          <a:p>
+            <a:endParaRPr lang="en-GB"/>
+          </a:p>
+        </p:txBody>
       </p:sp>
       <p:sp>
         <p:nvSpPr>
@@ -12796,6 +13209,13 @@
           </a:solidFill>
           <a:ln/>
         </p:spPr>
+        <p:txBody>
+          <a:bodyPr/>
+          <a:lstStyle/>
+          <a:p>
+            <a:endParaRPr lang="en-GB"/>
+          </a:p>
+        </p:txBody>
       </p:sp>
       <p:sp>
         <p:nvSpPr>
@@ -12818,7 +13238,7 @@
           <a:bodyPr wrap="square" rtlCol="0" anchor="ctr"/>
           <a:lstStyle/>
           <a:p>
-            <a:pPr algn="ctr" indent="0" marL="0">
+            <a:pPr marL="0" indent="0" algn="ctr">
               <a:buNone/>
             </a:pPr>
             <a:r>
@@ -12857,7 +13277,7 @@
           <a:bodyPr wrap="square" rtlCol="0" anchor="ctr"/>
           <a:lstStyle/>
           <a:p>
-            <a:pPr indent="0" marL="0">
+            <a:pPr marL="0" indent="0">
               <a:buNone/>
             </a:pPr>
             <a:r>
@@ -12901,13 +13321,20 @@
             <a:prstDash val="solid"/>
           </a:ln>
           <a:effectLst>
-            <a:outerShdw sx="100000" sy="100000" kx="0" ky="0" algn="bl" rotWithShape="0" blurRad="76200" dist="25400" dir="5400000">
+            <a:outerShdw blurRad="76200" dist="25400" dir="5400000" algn="bl" rotWithShape="0">
               <a:srgbClr val="8AA0BC">
                 <a:alpha val="25000"/>
               </a:srgbClr>
             </a:outerShdw>
           </a:effectLst>
         </p:spPr>
+        <p:txBody>
+          <a:bodyPr/>
+          <a:lstStyle/>
+          <a:p>
+            <a:endParaRPr lang="en-GB"/>
+          </a:p>
+        </p:txBody>
       </p:sp>
       <p:sp>
         <p:nvSpPr>
@@ -12928,6 +13355,13 @@
           </a:solidFill>
           <a:ln/>
         </p:spPr>
+        <p:txBody>
+          <a:bodyPr/>
+          <a:lstStyle/>
+          <a:p>
+            <a:endParaRPr lang="en-GB"/>
+          </a:p>
+        </p:txBody>
       </p:sp>
       <p:sp>
         <p:nvSpPr>
@@ -12950,7 +13384,7 @@
           <a:bodyPr wrap="square" rtlCol="0" anchor="ctr"/>
           <a:lstStyle/>
           <a:p>
-            <a:pPr algn="ctr" indent="0" marL="0">
+            <a:pPr marL="0" indent="0" algn="ctr">
               <a:buNone/>
             </a:pPr>
             <a:r>
@@ -12989,7 +13423,7 @@
           <a:bodyPr wrap="square" rtlCol="0" anchor="ctr"/>
           <a:lstStyle/>
           <a:p>
-            <a:pPr indent="0" marL="0">
+            <a:pPr marL="0" indent="0">
               <a:buNone/>
             </a:pPr>
             <a:r>
@@ -13033,13 +13467,20 @@
             <a:prstDash val="solid"/>
           </a:ln>
           <a:effectLst>
-            <a:outerShdw sx="100000" sy="100000" kx="0" ky="0" algn="bl" rotWithShape="0" blurRad="76200" dist="25400" dir="5400000">
+            <a:outerShdw blurRad="76200" dist="25400" dir="5400000" algn="bl" rotWithShape="0">
               <a:srgbClr val="8AA0BC">
                 <a:alpha val="25000"/>
               </a:srgbClr>
             </a:outerShdw>
           </a:effectLst>
         </p:spPr>
+        <p:txBody>
+          <a:bodyPr/>
+          <a:lstStyle/>
+          <a:p>
+            <a:endParaRPr lang="en-GB"/>
+          </a:p>
+        </p:txBody>
       </p:sp>
       <p:sp>
         <p:nvSpPr>
@@ -13060,6 +13501,13 @@
           </a:solidFill>
           <a:ln/>
         </p:spPr>
+        <p:txBody>
+          <a:bodyPr/>
+          <a:lstStyle/>
+          <a:p>
+            <a:endParaRPr lang="en-GB"/>
+          </a:p>
+        </p:txBody>
       </p:sp>
       <p:sp>
         <p:nvSpPr>
@@ -13082,7 +13530,7 @@
           <a:bodyPr wrap="square" rtlCol="0" anchor="ctr"/>
           <a:lstStyle/>
           <a:p>
-            <a:pPr algn="ctr" indent="0" marL="0">
+            <a:pPr marL="0" indent="0" algn="ctr">
               <a:buNone/>
             </a:pPr>
             <a:r>
@@ -13121,7 +13569,7 @@
           <a:bodyPr wrap="square" rtlCol="0" anchor="ctr"/>
           <a:lstStyle/>
           <a:p>
-            <a:pPr indent="0" marL="0">
+            <a:pPr marL="0" indent="0">
               <a:buNone/>
             </a:pPr>
             <a:r>
@@ -13153,7 +13601,7 @@
     <p:bg>
       <p:bgPr>
         <a:blipFill dpi="0" rotWithShape="1">
-          <a:blip r:embed="rId1">
+          <a:blip r:embed="rId3">
             <a:lum/>
           </a:blip>
           <a:srcRect/>
@@ -13199,7 +13647,7 @@
           <a:bodyPr wrap="square" rtlCol="0" anchor="ctr"/>
           <a:lstStyle/>
           <a:p>
-            <a:pPr indent="0" marL="0">
+            <a:pPr marL="0" indent="0">
               <a:buNone/>
             </a:pPr>
             <a:r>
@@ -13238,7 +13686,7 @@
           <a:bodyPr wrap="square" rtlCol="0" anchor="ctr"/>
           <a:lstStyle/>
           <a:p>
-            <a:pPr indent="0" marL="0">
+            <a:pPr marL="0" indent="0">
               <a:buNone/>
             </a:pPr>
             <a:r>
@@ -13277,7 +13725,7 @@
           <a:bodyPr wrap="square" rtlCol="0" anchor="ctr"/>
           <a:lstStyle/>
           <a:p>
-            <a:pPr indent="0" marL="0">
+            <a:pPr marL="0" indent="0">
               <a:buNone/>
             </a:pPr>
             <a:r>
@@ -13316,7 +13764,7 @@
           <a:bodyPr wrap="square" rtlCol="0" anchor="ctr"/>
           <a:lstStyle/>
           <a:p>
-            <a:pPr algn="ctr" indent="0" marL="0">
+            <a:pPr marL="0" indent="0" algn="ctr">
               <a:buNone/>
             </a:pPr>
             <a:r>
@@ -13355,7 +13803,7 @@
           <a:bodyPr wrap="square" rtlCol="0" anchor="ctr"/>
           <a:lstStyle/>
           <a:p>
-            <a:pPr algn="r" indent="0" marL="0">
+            <a:pPr marL="0" indent="0" algn="r">
               <a:buNone/>
             </a:pPr>
             <a:r>
@@ -13369,9 +13817,6 @@
               </a:rPr>
               <a:t>EMEA </a:t>
             </a:r>
-            <a:pPr algn="r" indent="0" marL="0">
-              <a:buNone/>
-            </a:pPr>
             <a:r>
               <a:rPr lang="en-US" sz="1200" dirty="0">
                 <a:solidFill>
@@ -13383,9 +13828,6 @@
               </a:rPr>
               <a:t>| </a:t>
             </a:r>
-            <a:pPr algn="r" indent="0" marL="0">
-              <a:buNone/>
-            </a:pPr>
             <a:r>
               <a:rPr lang="en-US" sz="1200" b="1" dirty="0">
                 <a:solidFill>
@@ -13427,13 +13869,20 @@
             <a:prstDash val="solid"/>
           </a:ln>
           <a:effectLst>
-            <a:outerShdw sx="100000" sy="100000" kx="0" ky="0" algn="bl" rotWithShape="0" blurRad="76200" dist="25400" dir="5400000">
+            <a:outerShdw blurRad="76200" dist="25400" dir="5400000" algn="bl" rotWithShape="0">
               <a:srgbClr val="8AA0BC">
                 <a:alpha val="25000"/>
               </a:srgbClr>
             </a:outerShdw>
           </a:effectLst>
         </p:spPr>
+        <p:txBody>
+          <a:bodyPr/>
+          <a:lstStyle/>
+          <a:p>
+            <a:endParaRPr lang="en-GB"/>
+          </a:p>
+        </p:txBody>
       </p:sp>
       <p:sp>
         <p:nvSpPr>
@@ -13454,6 +13903,13 @@
           </a:solidFill>
           <a:ln/>
         </p:spPr>
+        <p:txBody>
+          <a:bodyPr/>
+          <a:lstStyle/>
+          <a:p>
+            <a:endParaRPr lang="en-GB"/>
+          </a:p>
+        </p:txBody>
       </p:sp>
       <p:sp>
         <p:nvSpPr>
@@ -13476,7 +13932,7 @@
           <a:bodyPr wrap="square" rtlCol="0" anchor="ctr"/>
           <a:lstStyle/>
           <a:p>
-            <a:pPr algn="ctr" indent="0" marL="0">
+            <a:pPr marL="0" indent="0" algn="ctr">
               <a:buNone/>
             </a:pPr>
             <a:r>
@@ -13515,7 +13971,7 @@
           <a:bodyPr wrap="square" rtlCol="0" anchor="ctr"/>
           <a:lstStyle/>
           <a:p>
-            <a:pPr indent="0" marL="0">
+            <a:pPr marL="0" indent="0">
               <a:buNone/>
             </a:pPr>
             <a:r>
@@ -13554,7 +14010,7 @@
           <a:bodyPr wrap="square" rtlCol="0" anchor="t"/>
           <a:lstStyle/>
           <a:p>
-            <a:pPr indent="0" marL="0">
+            <a:pPr marL="0" indent="0">
               <a:buNone/>
             </a:pPr>
             <a:r>
@@ -13598,13 +14054,20 @@
             <a:prstDash val="solid"/>
           </a:ln>
           <a:effectLst>
-            <a:outerShdw sx="100000" sy="100000" kx="0" ky="0" algn="bl" rotWithShape="0" blurRad="76200" dist="25400" dir="5400000">
+            <a:outerShdw blurRad="76200" dist="25400" dir="5400000" algn="bl" rotWithShape="0">
               <a:srgbClr val="8AA0BC">
                 <a:alpha val="25000"/>
               </a:srgbClr>
             </a:outerShdw>
           </a:effectLst>
         </p:spPr>
+        <p:txBody>
+          <a:bodyPr/>
+          <a:lstStyle/>
+          <a:p>
+            <a:endParaRPr lang="en-GB"/>
+          </a:p>
+        </p:txBody>
       </p:sp>
       <p:sp>
         <p:nvSpPr>
@@ -13625,6 +14088,13 @@
           </a:solidFill>
           <a:ln/>
         </p:spPr>
+        <p:txBody>
+          <a:bodyPr/>
+          <a:lstStyle/>
+          <a:p>
+            <a:endParaRPr lang="en-GB"/>
+          </a:p>
+        </p:txBody>
       </p:sp>
       <p:sp>
         <p:nvSpPr>
@@ -13647,7 +14117,7 @@
           <a:bodyPr wrap="square" rtlCol="0" anchor="ctr"/>
           <a:lstStyle/>
           <a:p>
-            <a:pPr algn="ctr" indent="0" marL="0">
+            <a:pPr marL="0" indent="0" algn="ctr">
               <a:buNone/>
             </a:pPr>
             <a:r>
@@ -13686,7 +14156,7 @@
           <a:bodyPr wrap="square" rtlCol="0" anchor="ctr"/>
           <a:lstStyle/>
           <a:p>
-            <a:pPr indent="0" marL="0">
+            <a:pPr marL="0" indent="0">
               <a:buNone/>
             </a:pPr>
             <a:r>
@@ -13725,7 +14195,7 @@
           <a:bodyPr wrap="square" rtlCol="0" anchor="t"/>
           <a:lstStyle/>
           <a:p>
-            <a:pPr indent="0" marL="0">
+            <a:pPr marL="0" indent="0">
               <a:buNone/>
             </a:pPr>
             <a:r>
@@ -13769,13 +14239,20 @@
             <a:prstDash val="solid"/>
           </a:ln>
           <a:effectLst>
-            <a:outerShdw sx="100000" sy="100000" kx="0" ky="0" algn="bl" rotWithShape="0" blurRad="76200" dist="25400" dir="5400000">
+            <a:outerShdw blurRad="76200" dist="25400" dir="5400000" algn="bl" rotWithShape="0">
               <a:srgbClr val="8AA0BC">
                 <a:alpha val="25000"/>
               </a:srgbClr>
             </a:outerShdw>
           </a:effectLst>
         </p:spPr>
+        <p:txBody>
+          <a:bodyPr/>
+          <a:lstStyle/>
+          <a:p>
+            <a:endParaRPr lang="en-GB"/>
+          </a:p>
+        </p:txBody>
       </p:sp>
       <p:sp>
         <p:nvSpPr>
@@ -13796,6 +14273,13 @@
           </a:solidFill>
           <a:ln/>
         </p:spPr>
+        <p:txBody>
+          <a:bodyPr/>
+          <a:lstStyle/>
+          <a:p>
+            <a:endParaRPr lang="en-GB"/>
+          </a:p>
+        </p:txBody>
       </p:sp>
       <p:sp>
         <p:nvSpPr>
@@ -13818,7 +14302,7 @@
           <a:bodyPr wrap="square" rtlCol="0" anchor="ctr"/>
           <a:lstStyle/>
           <a:p>
-            <a:pPr algn="ctr" indent="0" marL="0">
+            <a:pPr marL="0" indent="0" algn="ctr">
               <a:buNone/>
             </a:pPr>
             <a:r>
@@ -13857,7 +14341,7 @@
           <a:bodyPr wrap="square" rtlCol="0" anchor="ctr"/>
           <a:lstStyle/>
           <a:p>
-            <a:pPr indent="0" marL="0">
+            <a:pPr marL="0" indent="0">
               <a:buNone/>
             </a:pPr>
             <a:r>
@@ -13896,7 +14380,7 @@
           <a:bodyPr wrap="square" rtlCol="0" anchor="t"/>
           <a:lstStyle/>
           <a:p>
-            <a:pPr indent="0" marL="0">
+            <a:pPr marL="0" indent="0">
               <a:buNone/>
             </a:pPr>
             <a:r>
@@ -13940,13 +14424,20 @@
             <a:prstDash val="solid"/>
           </a:ln>
           <a:effectLst>
-            <a:outerShdw sx="100000" sy="100000" kx="0" ky="0" algn="bl" rotWithShape="0" blurRad="76200" dist="25400" dir="5400000">
+            <a:outerShdw blurRad="76200" dist="25400" dir="5400000" algn="bl" rotWithShape="0">
               <a:srgbClr val="8AA0BC">
                 <a:alpha val="25000"/>
               </a:srgbClr>
             </a:outerShdw>
           </a:effectLst>
         </p:spPr>
+        <p:txBody>
+          <a:bodyPr/>
+          <a:lstStyle/>
+          <a:p>
+            <a:endParaRPr lang="en-GB"/>
+          </a:p>
+        </p:txBody>
       </p:sp>
       <p:sp>
         <p:nvSpPr>
@@ -13967,6 +14458,13 @@
           </a:solidFill>
           <a:ln/>
         </p:spPr>
+        <p:txBody>
+          <a:bodyPr/>
+          <a:lstStyle/>
+          <a:p>
+            <a:endParaRPr lang="en-GB"/>
+          </a:p>
+        </p:txBody>
       </p:sp>
       <p:sp>
         <p:nvSpPr>
@@ -13989,7 +14487,7 @@
           <a:bodyPr wrap="square" rtlCol="0" anchor="ctr"/>
           <a:lstStyle/>
           <a:p>
-            <a:pPr algn="ctr" indent="0" marL="0">
+            <a:pPr marL="0" indent="0" algn="ctr">
               <a:buNone/>
             </a:pPr>
             <a:r>
@@ -14028,7 +14526,7 @@
           <a:bodyPr wrap="square" rtlCol="0" anchor="ctr"/>
           <a:lstStyle/>
           <a:p>
-            <a:pPr indent="0" marL="0">
+            <a:pPr marL="0" indent="0">
               <a:buNone/>
             </a:pPr>
             <a:r>
@@ -14067,7 +14565,7 @@
           <a:bodyPr wrap="square" rtlCol="0" anchor="t"/>
           <a:lstStyle/>
           <a:p>
-            <a:pPr indent="0" marL="0">
+            <a:pPr marL="0" indent="0">
               <a:buNone/>
             </a:pPr>
             <a:r>
@@ -14099,7 +14597,7 @@
     <p:bg>
       <p:bgPr>
         <a:blipFill dpi="0" rotWithShape="1">
-          <a:blip r:embed="rId1">
+          <a:blip r:embed="rId3">
             <a:lum/>
           </a:blip>
           <a:srcRect/>
@@ -14145,7 +14643,7 @@
           <a:bodyPr wrap="square" rtlCol="0" anchor="ctr"/>
           <a:lstStyle/>
           <a:p>
-            <a:pPr indent="0" marL="0">
+            <a:pPr marL="0" indent="0">
               <a:buNone/>
             </a:pPr>
             <a:r>
@@ -14184,7 +14682,7 @@
           <a:bodyPr wrap="square" rtlCol="0" anchor="ctr"/>
           <a:lstStyle/>
           <a:p>
-            <a:pPr indent="0" marL="0">
+            <a:pPr marL="0" indent="0">
               <a:buNone/>
             </a:pPr>
             <a:r>
@@ -14223,7 +14721,7 @@
           <a:bodyPr wrap="square" rtlCol="0" anchor="ctr"/>
           <a:lstStyle/>
           <a:p>
-            <a:pPr indent="0" marL="0">
+            <a:pPr marL="0" indent="0">
               <a:buNone/>
             </a:pPr>
             <a:r>
@@ -14262,7 +14760,7 @@
           <a:bodyPr wrap="square" rtlCol="0" anchor="ctr"/>
           <a:lstStyle/>
           <a:p>
-            <a:pPr algn="ctr" indent="0" marL="0">
+            <a:pPr marL="0" indent="0" algn="ctr">
               <a:buNone/>
             </a:pPr>
             <a:r>
@@ -14301,7 +14799,7 @@
           <a:bodyPr wrap="square" rtlCol="0" anchor="ctr"/>
           <a:lstStyle/>
           <a:p>
-            <a:pPr algn="r" indent="0" marL="0">
+            <a:pPr marL="0" indent="0" algn="r">
               <a:buNone/>
             </a:pPr>
             <a:r>
@@ -14315,9 +14813,6 @@
               </a:rPr>
               <a:t>EMEA </a:t>
             </a:r>
-            <a:pPr algn="r" indent="0" marL="0">
-              <a:buNone/>
-            </a:pPr>
             <a:r>
               <a:rPr lang="en-US" sz="1200" dirty="0">
                 <a:solidFill>
@@ -14329,9 +14824,6 @@
               </a:rPr>
               <a:t>| </a:t>
             </a:r>
-            <a:pPr algn="r" indent="0" marL="0">
-              <a:buNone/>
-            </a:pPr>
             <a:r>
               <a:rPr lang="en-US" sz="1200" b="1" dirty="0">
                 <a:solidFill>
@@ -14368,6 +14860,13 @@
           </a:solidFill>
           <a:ln/>
         </p:spPr>
+        <p:txBody>
+          <a:bodyPr/>
+          <a:lstStyle/>
+          <a:p>
+            <a:endParaRPr lang="en-GB"/>
+          </a:p>
+        </p:txBody>
       </p:sp>
       <p:sp>
         <p:nvSpPr>
@@ -14390,7 +14889,7 @@
           <a:bodyPr wrap="square" rtlCol="0" anchor="ctr"/>
           <a:lstStyle/>
           <a:p>
-            <a:pPr algn="ctr" indent="0" marL="0">
+            <a:pPr marL="0" indent="0" algn="ctr">
               <a:buNone/>
             </a:pPr>
             <a:r>
@@ -14429,7 +14928,7 @@
           <a:bodyPr wrap="square" rtlCol="0" anchor="ctr"/>
           <a:lstStyle/>
           <a:p>
-            <a:pPr indent="0" marL="0">
+            <a:pPr marL="0" indent="0">
               <a:buNone/>
             </a:pPr>
             <a:r>
@@ -14468,6 +14967,13 @@
           </a:solidFill>
           <a:ln/>
         </p:spPr>
+        <p:txBody>
+          <a:bodyPr/>
+          <a:lstStyle/>
+          <a:p>
+            <a:endParaRPr lang="en-GB"/>
+          </a:p>
+        </p:txBody>
       </p:sp>
       <p:sp>
         <p:nvSpPr>
@@ -14490,7 +14996,7 @@
           <a:bodyPr wrap="square" rtlCol="0" anchor="ctr"/>
           <a:lstStyle/>
           <a:p>
-            <a:pPr algn="ctr" indent="0" marL="0">
+            <a:pPr marL="0" indent="0" algn="ctr">
               <a:buNone/>
             </a:pPr>
             <a:r>
@@ -14529,7 +15035,7 @@
           <a:bodyPr wrap="square" rtlCol="0" anchor="ctr"/>
           <a:lstStyle/>
           <a:p>
-            <a:pPr indent="0" marL="0">
+            <a:pPr marL="0" indent="0">
               <a:buNone/>
             </a:pPr>
             <a:r>
@@ -14573,6 +15079,13 @@
             <a:prstDash val="solid"/>
           </a:ln>
         </p:spPr>
+        <p:txBody>
+          <a:bodyPr/>
+          <a:lstStyle/>
+          <a:p>
+            <a:endParaRPr lang="en-GB"/>
+          </a:p>
+        </p:txBody>
       </p:sp>
       <p:sp>
         <p:nvSpPr>
@@ -14593,6 +15106,13 @@
           </a:solidFill>
           <a:ln/>
         </p:spPr>
+        <p:txBody>
+          <a:bodyPr/>
+          <a:lstStyle/>
+          <a:p>
+            <a:endParaRPr lang="en-GB"/>
+          </a:p>
+        </p:txBody>
       </p:sp>
       <p:sp>
         <p:nvSpPr>
@@ -14615,7 +15135,7 @@
           <a:bodyPr wrap="square" rtlCol="0" anchor="ctr"/>
           <a:lstStyle/>
           <a:p>
-            <a:pPr algn="ctr" indent="0" marL="0">
+            <a:pPr marL="0" indent="0" algn="ctr">
               <a:buNone/>
             </a:pPr>
             <a:r>
@@ -14654,7 +15174,7 @@
           <a:bodyPr wrap="square" rtlCol="0" anchor="ctr"/>
           <a:lstStyle/>
           <a:p>
-            <a:pPr indent="0" marL="0">
+            <a:pPr marL="0" indent="0">
               <a:buNone/>
             </a:pPr>
             <a:r>
@@ -14668,9 +15188,6 @@
               </a:rPr>
               <a:t>Why build on Fabric   </a:t>
             </a:r>
-            <a:pPr indent="0" marL="0">
-              <a:buNone/>
-            </a:pPr>
             <a:r>
               <a:rPr lang="en-US" sz="1150" dirty="0">
                 <a:solidFill>
@@ -14712,6 +15229,13 @@
             <a:prstDash val="solid"/>
           </a:ln>
         </p:spPr>
+        <p:txBody>
+          <a:bodyPr/>
+          <a:lstStyle/>
+          <a:p>
+            <a:endParaRPr lang="en-GB"/>
+          </a:p>
+        </p:txBody>
       </p:sp>
       <p:sp>
         <p:nvSpPr>
@@ -14732,6 +15256,13 @@
           </a:solidFill>
           <a:ln/>
         </p:spPr>
+        <p:txBody>
+          <a:bodyPr/>
+          <a:lstStyle/>
+          <a:p>
+            <a:endParaRPr lang="en-GB"/>
+          </a:p>
+        </p:txBody>
       </p:sp>
       <p:sp>
         <p:nvSpPr>
@@ -14754,7 +15285,7 @@
           <a:bodyPr wrap="square" rtlCol="0" anchor="ctr"/>
           <a:lstStyle/>
           <a:p>
-            <a:pPr algn="ctr" indent="0" marL="0">
+            <a:pPr marL="0" indent="0" algn="ctr">
               <a:buNone/>
             </a:pPr>
             <a:r>
@@ -14793,7 +15324,7 @@
           <a:bodyPr wrap="square" rtlCol="0" anchor="ctr"/>
           <a:lstStyle/>
           <a:p>
-            <a:pPr indent="0" marL="0">
+            <a:pPr marL="0" indent="0">
               <a:buNone/>
             </a:pPr>
             <a:r>
@@ -14807,9 +15338,6 @@
               </a:rPr>
               <a:t>Rayfin foundations   </a:t>
             </a:r>
-            <a:pPr indent="0" marL="0">
-              <a:buNone/>
-            </a:pPr>
             <a:r>
               <a:rPr lang="en-US" sz="1150" dirty="0">
                 <a:solidFill>
@@ -14851,6 +15379,13 @@
             <a:prstDash val="solid"/>
           </a:ln>
         </p:spPr>
+        <p:txBody>
+          <a:bodyPr/>
+          <a:lstStyle/>
+          <a:p>
+            <a:endParaRPr lang="en-GB"/>
+          </a:p>
+        </p:txBody>
       </p:sp>
       <p:sp>
         <p:nvSpPr>
@@ -14871,6 +15406,13 @@
           </a:solidFill>
           <a:ln/>
         </p:spPr>
+        <p:txBody>
+          <a:bodyPr/>
+          <a:lstStyle/>
+          <a:p>
+            <a:endParaRPr lang="en-GB"/>
+          </a:p>
+        </p:txBody>
       </p:sp>
       <p:sp>
         <p:nvSpPr>
@@ -14893,7 +15435,7 @@
           <a:bodyPr wrap="square" rtlCol="0" anchor="ctr"/>
           <a:lstStyle/>
           <a:p>
-            <a:pPr algn="ctr" indent="0" marL="0">
+            <a:pPr marL="0" indent="0" algn="ctr">
               <a:buNone/>
             </a:pPr>
             <a:r>
@@ -14932,7 +15474,7 @@
           <a:bodyPr wrap="square" rtlCol="0" anchor="ctr"/>
           <a:lstStyle/>
           <a:p>
-            <a:pPr indent="0" marL="0">
+            <a:pPr marL="0" indent="0">
               <a:buNone/>
             </a:pPr>
             <a:r>
@@ -14946,9 +15488,6 @@
               </a:rPr>
               <a:t>Demo   </a:t>
             </a:r>
-            <a:pPr indent="0" marL="0">
-              <a:buNone/>
-            </a:pPr>
             <a:r>
               <a:rPr lang="en-US" sz="1150" dirty="0">
                 <a:solidFill>
@@ -14990,6 +15529,13 @@
             <a:prstDash val="solid"/>
           </a:ln>
         </p:spPr>
+        <p:txBody>
+          <a:bodyPr/>
+          <a:lstStyle/>
+          <a:p>
+            <a:endParaRPr lang="en-GB"/>
+          </a:p>
+        </p:txBody>
       </p:sp>
       <p:sp>
         <p:nvSpPr>
@@ -15010,6 +15556,13 @@
           </a:solidFill>
           <a:ln/>
         </p:spPr>
+        <p:txBody>
+          <a:bodyPr/>
+          <a:lstStyle/>
+          <a:p>
+            <a:endParaRPr lang="en-GB"/>
+          </a:p>
+        </p:txBody>
       </p:sp>
       <p:sp>
         <p:nvSpPr>
@@ -15032,7 +15585,7 @@
           <a:bodyPr wrap="square" rtlCol="0" anchor="ctr"/>
           <a:lstStyle/>
           <a:p>
-            <a:pPr algn="ctr" indent="0" marL="0">
+            <a:pPr marL="0" indent="0" algn="ctr">
               <a:buNone/>
             </a:pPr>
             <a:r>
@@ -15071,7 +15624,7 @@
           <a:bodyPr wrap="square" rtlCol="0" anchor="ctr"/>
           <a:lstStyle/>
           <a:p>
-            <a:pPr indent="0" marL="0">
+            <a:pPr marL="0" indent="0">
               <a:buNone/>
             </a:pPr>
             <a:r>
@@ -15085,9 +15638,6 @@
               </a:rPr>
               <a:t>Plan the build   </a:t>
             </a:r>
-            <a:pPr indent="0" marL="0">
-              <a:buNone/>
-            </a:pPr>
             <a:r>
               <a:rPr lang="en-US" sz="1150" dirty="0">
                 <a:solidFill>
@@ -15129,6 +15679,13 @@
             <a:prstDash val="solid"/>
           </a:ln>
         </p:spPr>
+        <p:txBody>
+          <a:bodyPr/>
+          <a:lstStyle/>
+          <a:p>
+            <a:endParaRPr lang="en-GB"/>
+          </a:p>
+        </p:txBody>
       </p:sp>
       <p:sp>
         <p:nvSpPr>
@@ -15149,6 +15706,13 @@
           </a:solidFill>
           <a:ln/>
         </p:spPr>
+        <p:txBody>
+          <a:bodyPr/>
+          <a:lstStyle/>
+          <a:p>
+            <a:endParaRPr lang="en-GB"/>
+          </a:p>
+        </p:txBody>
       </p:sp>
       <p:sp>
         <p:nvSpPr>
@@ -15171,7 +15735,7 @@
           <a:bodyPr wrap="square" rtlCol="0" anchor="ctr"/>
           <a:lstStyle/>
           <a:p>
-            <a:pPr algn="ctr" indent="0" marL="0">
+            <a:pPr marL="0" indent="0" algn="ctr">
               <a:buNone/>
             </a:pPr>
             <a:r>
@@ -15210,7 +15774,7 @@
           <a:bodyPr wrap="square" rtlCol="0" anchor="ctr"/>
           <a:lstStyle/>
           <a:p>
-            <a:pPr indent="0" marL="0">
+            <a:pPr marL="0" indent="0">
               <a:buNone/>
             </a:pPr>
             <a:r>
@@ -15224,9 +15788,6 @@
               </a:rPr>
               <a:t>Build sprint 1   </a:t>
             </a:r>
-            <a:pPr indent="0" marL="0">
-              <a:buNone/>
-            </a:pPr>
             <a:r>
               <a:rPr lang="en-US" sz="1150" dirty="0">
                 <a:solidFill>
@@ -15268,6 +15829,13 @@
             <a:prstDash val="solid"/>
           </a:ln>
         </p:spPr>
+        <p:txBody>
+          <a:bodyPr/>
+          <a:lstStyle/>
+          <a:p>
+            <a:endParaRPr lang="en-GB"/>
+          </a:p>
+        </p:txBody>
       </p:sp>
       <p:sp>
         <p:nvSpPr>
@@ -15288,6 +15856,13 @@
           </a:solidFill>
           <a:ln/>
         </p:spPr>
+        <p:txBody>
+          <a:bodyPr/>
+          <a:lstStyle/>
+          <a:p>
+            <a:endParaRPr lang="en-GB"/>
+          </a:p>
+        </p:txBody>
       </p:sp>
       <p:sp>
         <p:nvSpPr>
@@ -15310,7 +15885,7 @@
           <a:bodyPr wrap="square" rtlCol="0" anchor="ctr"/>
           <a:lstStyle/>
           <a:p>
-            <a:pPr algn="ctr" indent="0" marL="0">
+            <a:pPr marL="0" indent="0" algn="ctr">
               <a:buNone/>
             </a:pPr>
             <a:r>
@@ -15349,7 +15924,7 @@
           <a:bodyPr wrap="square" rtlCol="0" anchor="ctr"/>
           <a:lstStyle/>
           <a:p>
-            <a:pPr indent="0" marL="0">
+            <a:pPr marL="0" indent="0">
               <a:buNone/>
             </a:pPr>
             <a:r>
@@ -15363,9 +15938,6 @@
               </a:rPr>
               <a:t>★ Build sprint 2   </a:t>
             </a:r>
-            <a:pPr indent="0" marL="0">
-              <a:buNone/>
-            </a:pPr>
             <a:r>
               <a:rPr lang="en-US" sz="1150" dirty="0">
                 <a:solidFill>
@@ -15407,6 +15979,13 @@
             <a:prstDash val="solid"/>
           </a:ln>
         </p:spPr>
+        <p:txBody>
+          <a:bodyPr/>
+          <a:lstStyle/>
+          <a:p>
+            <a:endParaRPr lang="en-GB"/>
+          </a:p>
+        </p:txBody>
       </p:sp>
       <p:sp>
         <p:nvSpPr>
@@ -15427,6 +16006,13 @@
           </a:solidFill>
           <a:ln/>
         </p:spPr>
+        <p:txBody>
+          <a:bodyPr/>
+          <a:lstStyle/>
+          <a:p>
+            <a:endParaRPr lang="en-GB"/>
+          </a:p>
+        </p:txBody>
       </p:sp>
       <p:sp>
         <p:nvSpPr>
@@ -15449,7 +16035,7 @@
           <a:bodyPr wrap="square" rtlCol="0" anchor="ctr"/>
           <a:lstStyle/>
           <a:p>
-            <a:pPr algn="ctr" indent="0" marL="0">
+            <a:pPr marL="0" indent="0" algn="ctr">
               <a:buNone/>
             </a:pPr>
             <a:r>
@@ -15488,7 +16074,7 @@
           <a:bodyPr wrap="square" rtlCol="0" anchor="ctr"/>
           <a:lstStyle/>
           <a:p>
-            <a:pPr indent="0" marL="0">
+            <a:pPr marL="0" indent="0">
               <a:buNone/>
             </a:pPr>
             <a:r>
@@ -15502,9 +16088,6 @@
               </a:rPr>
               <a:t>Plan &amp; next steps   </a:t>
             </a:r>
-            <a:pPr indent="0" marL="0">
-              <a:buNone/>
-            </a:pPr>
             <a:r>
               <a:rPr lang="en-US" sz="1150" dirty="0">
                 <a:solidFill>
@@ -15541,6 +16124,13 @@
           </a:solidFill>
           <a:ln/>
         </p:spPr>
+        <p:txBody>
+          <a:bodyPr/>
+          <a:lstStyle/>
+          <a:p>
+            <a:endParaRPr lang="en-GB"/>
+          </a:p>
+        </p:txBody>
       </p:sp>
       <p:sp>
         <p:nvSpPr>
@@ -15563,7 +16153,7 @@
           <a:bodyPr wrap="square" rtlCol="0" anchor="ctr"/>
           <a:lstStyle/>
           <a:p>
-            <a:pPr algn="ctr" indent="0" marL="0">
+            <a:pPr marL="0" indent="0" algn="ctr">
               <a:buNone/>
             </a:pPr>
             <a:r>
@@ -15602,7 +16192,7 @@
           <a:bodyPr wrap="square" rtlCol="0" anchor="ctr"/>
           <a:lstStyle/>
           <a:p>
-            <a:pPr indent="0" marL="0">
+            <a:pPr marL="0" indent="0">
               <a:buNone/>
             </a:pPr>
             <a:r>
@@ -15616,9 +16206,6 @@
               </a:rPr>
               <a:t>The afternoon is the differentiator.   </a:t>
             </a:r>
-            <a:pPr indent="0" marL="0">
-              <a:buNone/>
-            </a:pPr>
             <a:r>
               <a:rPr lang="en-US" sz="1250" dirty="0">
                 <a:solidFill>
@@ -15648,7 +16235,7 @@
     <p:bg>
       <p:bgPr>
         <a:blipFill dpi="0" rotWithShape="1">
-          <a:blip r:embed="rId1">
+          <a:blip r:embed="rId3">
             <a:lum/>
           </a:blip>
           <a:srcRect/>
@@ -15694,7 +16281,7 @@
           <a:bodyPr wrap="square" rtlCol="0" anchor="ctr"/>
           <a:lstStyle/>
           <a:p>
-            <a:pPr indent="0" marL="0">
+            <a:pPr marL="0" indent="0">
               <a:buNone/>
             </a:pPr>
             <a:r>
@@ -15733,7 +16320,7 @@
           <a:bodyPr wrap="square" rtlCol="0" anchor="ctr"/>
           <a:lstStyle/>
           <a:p>
-            <a:pPr indent="0" marL="0">
+            <a:pPr marL="0" indent="0">
               <a:buNone/>
             </a:pPr>
             <a:r>
@@ -15772,7 +16359,7 @@
           <a:bodyPr wrap="square" rtlCol="0" anchor="ctr"/>
           <a:lstStyle/>
           <a:p>
-            <a:pPr indent="0" marL="0">
+            <a:pPr marL="0" indent="0">
               <a:buNone/>
             </a:pPr>
             <a:r>
@@ -15811,7 +16398,7 @@
           <a:bodyPr wrap="square" rtlCol="0" anchor="ctr"/>
           <a:lstStyle/>
           <a:p>
-            <a:pPr algn="ctr" indent="0" marL="0">
+            <a:pPr marL="0" indent="0" algn="ctr">
               <a:buNone/>
             </a:pPr>
             <a:r>
@@ -15850,7 +16437,7 @@
           <a:bodyPr wrap="square" rtlCol="0" anchor="ctr"/>
           <a:lstStyle/>
           <a:p>
-            <a:pPr algn="r" indent="0" marL="0">
+            <a:pPr marL="0" indent="0" algn="r">
               <a:buNone/>
             </a:pPr>
             <a:r>
@@ -15864,9 +16451,6 @@
               </a:rPr>
               <a:t>EMEA </a:t>
             </a:r>
-            <a:pPr algn="r" indent="0" marL="0">
-              <a:buNone/>
-            </a:pPr>
             <a:r>
               <a:rPr lang="en-US" sz="1200" dirty="0">
                 <a:solidFill>
@@ -15878,9 +16462,6 @@
               </a:rPr>
               <a:t>| </a:t>
             </a:r>
-            <a:pPr algn="r" indent="0" marL="0">
-              <a:buNone/>
-            </a:pPr>
             <a:r>
               <a:rPr lang="en-US" sz="1200" b="1" dirty="0">
                 <a:solidFill>
@@ -15922,13 +16503,20 @@
             <a:prstDash val="solid"/>
           </a:ln>
           <a:effectLst>
-            <a:outerShdw sx="100000" sy="100000" kx="0" ky="0" algn="bl" rotWithShape="0" blurRad="76200" dist="25400" dir="5400000">
+            <a:outerShdw blurRad="76200" dist="25400" dir="5400000" algn="bl" rotWithShape="0">
               <a:srgbClr val="8AA0BC">
                 <a:alpha val="25000"/>
               </a:srgbClr>
             </a:outerShdw>
           </a:effectLst>
         </p:spPr>
+        <p:txBody>
+          <a:bodyPr/>
+          <a:lstStyle/>
+          <a:p>
+            <a:endParaRPr lang="en-GB"/>
+          </a:p>
+        </p:txBody>
       </p:sp>
       <p:sp>
         <p:nvSpPr>
@@ -15949,6 +16537,13 @@
           </a:solidFill>
           <a:ln/>
         </p:spPr>
+        <p:txBody>
+          <a:bodyPr/>
+          <a:lstStyle/>
+          <a:p>
+            <a:endParaRPr lang="en-GB"/>
+          </a:p>
+        </p:txBody>
       </p:sp>
       <p:sp>
         <p:nvSpPr>
@@ -15971,7 +16566,7 @@
           <a:bodyPr wrap="square" rtlCol="0" anchor="ctr"/>
           <a:lstStyle/>
           <a:p>
-            <a:pPr algn="ctr" indent="0" marL="0">
+            <a:pPr marL="0" indent="0" algn="ctr">
               <a:buNone/>
             </a:pPr>
             <a:r>
@@ -16010,7 +16605,7 @@
           <a:bodyPr wrap="square" rtlCol="0" anchor="ctr"/>
           <a:lstStyle/>
           <a:p>
-            <a:pPr algn="ctr" indent="0" marL="0">
+            <a:pPr marL="0" indent="0" algn="ctr">
               <a:buNone/>
             </a:pPr>
             <a:r>
@@ -16049,7 +16644,7 @@
           <a:bodyPr wrap="square" rtlCol="0" anchor="t"/>
           <a:lstStyle/>
           <a:p>
-            <a:pPr algn="ctr" indent="0" marL="0">
+            <a:pPr marL="0" indent="0" algn="ctr">
               <a:buNone/>
             </a:pPr>
             <a:r>
@@ -16093,13 +16688,20 @@
             <a:prstDash val="solid"/>
           </a:ln>
           <a:effectLst>
-            <a:outerShdw sx="100000" sy="100000" kx="0" ky="0" algn="bl" rotWithShape="0" blurRad="76200" dist="25400" dir="5400000">
+            <a:outerShdw blurRad="76200" dist="25400" dir="5400000" algn="bl" rotWithShape="0">
               <a:srgbClr val="8AA0BC">
                 <a:alpha val="25000"/>
               </a:srgbClr>
             </a:outerShdw>
           </a:effectLst>
         </p:spPr>
+        <p:txBody>
+          <a:bodyPr/>
+          <a:lstStyle/>
+          <a:p>
+            <a:endParaRPr lang="en-GB"/>
+          </a:p>
+        </p:txBody>
       </p:sp>
       <p:sp>
         <p:nvSpPr>
@@ -16120,6 +16722,13 @@
           </a:solidFill>
           <a:ln/>
         </p:spPr>
+        <p:txBody>
+          <a:bodyPr/>
+          <a:lstStyle/>
+          <a:p>
+            <a:endParaRPr lang="en-GB"/>
+          </a:p>
+        </p:txBody>
       </p:sp>
       <p:sp>
         <p:nvSpPr>
@@ -16142,7 +16751,7 @@
           <a:bodyPr wrap="square" rtlCol="0" anchor="ctr"/>
           <a:lstStyle/>
           <a:p>
-            <a:pPr algn="ctr" indent="0" marL="0">
+            <a:pPr marL="0" indent="0" algn="ctr">
               <a:buNone/>
             </a:pPr>
             <a:r>
@@ -16181,7 +16790,7 @@
           <a:bodyPr wrap="square" rtlCol="0" anchor="ctr"/>
           <a:lstStyle/>
           <a:p>
-            <a:pPr algn="ctr" indent="0" marL="0">
+            <a:pPr marL="0" indent="0" algn="ctr">
               <a:buNone/>
             </a:pPr>
             <a:r>
@@ -16220,7 +16829,7 @@
           <a:bodyPr wrap="square" rtlCol="0" anchor="t"/>
           <a:lstStyle/>
           <a:p>
-            <a:pPr algn="ctr" indent="0" marL="0">
+            <a:pPr marL="0" indent="0" algn="ctr">
               <a:buNone/>
             </a:pPr>
             <a:r>
@@ -16264,13 +16873,20 @@
             <a:prstDash val="solid"/>
           </a:ln>
           <a:effectLst>
-            <a:outerShdw sx="100000" sy="100000" kx="0" ky="0" algn="bl" rotWithShape="0" blurRad="76200" dist="25400" dir="5400000">
+            <a:outerShdw blurRad="76200" dist="25400" dir="5400000" algn="bl" rotWithShape="0">
               <a:srgbClr val="8AA0BC">
                 <a:alpha val="25000"/>
               </a:srgbClr>
             </a:outerShdw>
           </a:effectLst>
         </p:spPr>
+        <p:txBody>
+          <a:bodyPr/>
+          <a:lstStyle/>
+          <a:p>
+            <a:endParaRPr lang="en-GB"/>
+          </a:p>
+        </p:txBody>
       </p:sp>
       <p:sp>
         <p:nvSpPr>
@@ -16291,6 +16907,13 @@
           </a:solidFill>
           <a:ln/>
         </p:spPr>
+        <p:txBody>
+          <a:bodyPr/>
+          <a:lstStyle/>
+          <a:p>
+            <a:endParaRPr lang="en-GB"/>
+          </a:p>
+        </p:txBody>
       </p:sp>
       <p:sp>
         <p:nvSpPr>
@@ -16313,7 +16936,7 @@
           <a:bodyPr wrap="square" rtlCol="0" anchor="ctr"/>
           <a:lstStyle/>
           <a:p>
-            <a:pPr algn="ctr" indent="0" marL="0">
+            <a:pPr marL="0" indent="0" algn="ctr">
               <a:buNone/>
             </a:pPr>
             <a:r>
@@ -16352,7 +16975,7 @@
           <a:bodyPr wrap="square" rtlCol="0" anchor="ctr"/>
           <a:lstStyle/>
           <a:p>
-            <a:pPr algn="ctr" indent="0" marL="0">
+            <a:pPr marL="0" indent="0" algn="ctr">
               <a:buNone/>
             </a:pPr>
             <a:r>
@@ -16391,7 +17014,7 @@
           <a:bodyPr wrap="square" rtlCol="0" anchor="t"/>
           <a:lstStyle/>
           <a:p>
-            <a:pPr algn="ctr" indent="0" marL="0">
+            <a:pPr marL="0" indent="0" algn="ctr">
               <a:buNone/>
             </a:pPr>
             <a:r>
@@ -16435,13 +17058,20 @@
             <a:prstDash val="solid"/>
           </a:ln>
           <a:effectLst>
-            <a:outerShdw sx="100000" sy="100000" kx="0" ky="0" algn="bl" rotWithShape="0" blurRad="76200" dist="25400" dir="5400000">
+            <a:outerShdw blurRad="76200" dist="25400" dir="5400000" algn="bl" rotWithShape="0">
               <a:srgbClr val="8AA0BC">
                 <a:alpha val="25000"/>
               </a:srgbClr>
             </a:outerShdw>
           </a:effectLst>
         </p:spPr>
+        <p:txBody>
+          <a:bodyPr/>
+          <a:lstStyle/>
+          <a:p>
+            <a:endParaRPr lang="en-GB"/>
+          </a:p>
+        </p:txBody>
       </p:sp>
       <p:sp>
         <p:nvSpPr>
@@ -16462,6 +17092,13 @@
           </a:solidFill>
           <a:ln/>
         </p:spPr>
+        <p:txBody>
+          <a:bodyPr/>
+          <a:lstStyle/>
+          <a:p>
+            <a:endParaRPr lang="en-GB"/>
+          </a:p>
+        </p:txBody>
       </p:sp>
       <p:sp>
         <p:nvSpPr>
@@ -16484,7 +17121,7 @@
           <a:bodyPr wrap="square" rtlCol="0" anchor="ctr"/>
           <a:lstStyle/>
           <a:p>
-            <a:pPr algn="ctr" indent="0" marL="0">
+            <a:pPr marL="0" indent="0" algn="ctr">
               <a:buNone/>
             </a:pPr>
             <a:r>
@@ -16523,7 +17160,7 @@
           <a:bodyPr wrap="square" rtlCol="0" anchor="ctr"/>
           <a:lstStyle/>
           <a:p>
-            <a:pPr algn="ctr" indent="0" marL="0">
+            <a:pPr marL="0" indent="0" algn="ctr">
               <a:buNone/>
             </a:pPr>
             <a:r>
@@ -16562,7 +17199,7 @@
           <a:bodyPr wrap="square" rtlCol="0" anchor="t"/>
           <a:lstStyle/>
           <a:p>
-            <a:pPr algn="ctr" indent="0" marL="0">
+            <a:pPr marL="0" indent="0" algn="ctr">
               <a:buNone/>
             </a:pPr>
             <a:r>
@@ -16601,7 +17238,7 @@
           <a:bodyPr wrap="square" rtlCol="0" anchor="ctr"/>
           <a:lstStyle/>
           <a:p>
-            <a:pPr indent="0" marL="0">
+            <a:pPr marL="0" indent="0">
               <a:buNone/>
             </a:pPr>
             <a:r>
@@ -16640,6 +17277,13 @@
           </a:solidFill>
           <a:ln/>
         </p:spPr>
+        <p:txBody>
+          <a:bodyPr/>
+          <a:lstStyle/>
+          <a:p>
+            <a:endParaRPr lang="en-GB"/>
+          </a:p>
+        </p:txBody>
       </p:sp>
       <p:sp>
         <p:nvSpPr>
@@ -16660,6 +17304,13 @@
           </a:solidFill>
           <a:ln/>
         </p:spPr>
+        <p:txBody>
+          <a:bodyPr/>
+          <a:lstStyle/>
+          <a:p>
+            <a:endParaRPr lang="en-GB"/>
+          </a:p>
+        </p:txBody>
       </p:sp>
       <p:sp>
         <p:nvSpPr>
@@ -16682,7 +17333,7 @@
           <a:bodyPr wrap="square" rtlCol="0" anchor="ctr"/>
           <a:lstStyle/>
           <a:p>
-            <a:pPr algn="ctr" indent="0" marL="0">
+            <a:pPr marL="0" indent="0" algn="ctr">
               <a:buNone/>
             </a:pPr>
             <a:r>
@@ -16721,7 +17372,7 @@
           <a:bodyPr wrap="square" rtlCol="0" anchor="ctr"/>
           <a:lstStyle/>
           <a:p>
-            <a:pPr algn="ctr" indent="0" marL="0">
+            <a:pPr marL="0" indent="0" algn="ctr">
               <a:buNone/>
             </a:pPr>
             <a:r>
@@ -16760,7 +17411,7 @@
           <a:bodyPr wrap="square" rtlCol="0" anchor="t"/>
           <a:lstStyle/>
           <a:p>
-            <a:pPr algn="ctr" indent="0" marL="0">
+            <a:pPr marL="0" indent="0" algn="ctr">
               <a:buNone/>
             </a:pPr>
             <a:r>
@@ -16801,6 +17452,13 @@
             <a:tailEnd type="triangle"/>
           </a:ln>
         </p:spPr>
+        <p:txBody>
+          <a:bodyPr/>
+          <a:lstStyle/>
+          <a:p>
+            <a:endParaRPr lang="en-GB"/>
+          </a:p>
+        </p:txBody>
       </p:sp>
       <p:sp>
         <p:nvSpPr>
@@ -16823,6 +17481,13 @@
           </a:solidFill>
           <a:ln/>
         </p:spPr>
+        <p:txBody>
+          <a:bodyPr/>
+          <a:lstStyle/>
+          <a:p>
+            <a:endParaRPr lang="en-GB"/>
+          </a:p>
+        </p:txBody>
       </p:sp>
       <p:sp>
         <p:nvSpPr>
@@ -16843,6 +17508,13 @@
           </a:solidFill>
           <a:ln/>
         </p:spPr>
+        <p:txBody>
+          <a:bodyPr/>
+          <a:lstStyle/>
+          <a:p>
+            <a:endParaRPr lang="en-GB"/>
+          </a:p>
+        </p:txBody>
       </p:sp>
       <p:sp>
         <p:nvSpPr>
@@ -16865,7 +17537,7 @@
           <a:bodyPr wrap="square" rtlCol="0" anchor="ctr"/>
           <a:lstStyle/>
           <a:p>
-            <a:pPr algn="ctr" indent="0" marL="0">
+            <a:pPr marL="0" indent="0" algn="ctr">
               <a:buNone/>
             </a:pPr>
             <a:r>
@@ -16904,7 +17576,7 @@
           <a:bodyPr wrap="square" rtlCol="0" anchor="ctr"/>
           <a:lstStyle/>
           <a:p>
-            <a:pPr algn="ctr" indent="0" marL="0">
+            <a:pPr marL="0" indent="0" algn="ctr">
               <a:buNone/>
             </a:pPr>
             <a:r>
@@ -16943,7 +17615,7 @@
           <a:bodyPr wrap="square" rtlCol="0" anchor="t"/>
           <a:lstStyle/>
           <a:p>
-            <a:pPr algn="ctr" indent="0" marL="0">
+            <a:pPr marL="0" indent="0" algn="ctr">
               <a:buNone/>
             </a:pPr>
             <a:r>
@@ -16984,6 +17656,13 @@
             <a:tailEnd type="triangle"/>
           </a:ln>
         </p:spPr>
+        <p:txBody>
+          <a:bodyPr/>
+          <a:lstStyle/>
+          <a:p>
+            <a:endParaRPr lang="en-GB"/>
+          </a:p>
+        </p:txBody>
       </p:sp>
       <p:sp>
         <p:nvSpPr>
@@ -17006,6 +17685,13 @@
           </a:solidFill>
           <a:ln/>
         </p:spPr>
+        <p:txBody>
+          <a:bodyPr/>
+          <a:lstStyle/>
+          <a:p>
+            <a:endParaRPr lang="en-GB"/>
+          </a:p>
+        </p:txBody>
       </p:sp>
       <p:sp>
         <p:nvSpPr>
@@ -17026,6 +17712,13 @@
           </a:solidFill>
           <a:ln/>
         </p:spPr>
+        <p:txBody>
+          <a:bodyPr/>
+          <a:lstStyle/>
+          <a:p>
+            <a:endParaRPr lang="en-GB"/>
+          </a:p>
+        </p:txBody>
       </p:sp>
       <p:sp>
         <p:nvSpPr>
@@ -17048,7 +17741,7 @@
           <a:bodyPr wrap="square" rtlCol="0" anchor="ctr"/>
           <a:lstStyle/>
           <a:p>
-            <a:pPr algn="ctr" indent="0" marL="0">
+            <a:pPr marL="0" indent="0" algn="ctr">
               <a:buNone/>
             </a:pPr>
             <a:r>
@@ -17087,7 +17780,7 @@
           <a:bodyPr wrap="square" rtlCol="0" anchor="ctr"/>
           <a:lstStyle/>
           <a:p>
-            <a:pPr algn="ctr" indent="0" marL="0">
+            <a:pPr marL="0" indent="0" algn="ctr">
               <a:buNone/>
             </a:pPr>
             <a:r>
@@ -17126,7 +17819,7 @@
           <a:bodyPr wrap="square" rtlCol="0" anchor="t"/>
           <a:lstStyle/>
           <a:p>
-            <a:pPr algn="ctr" indent="0" marL="0">
+            <a:pPr marL="0" indent="0" algn="ctr">
               <a:buNone/>
             </a:pPr>
             <a:r>
@@ -17167,6 +17860,13 @@
             <a:tailEnd type="triangle"/>
           </a:ln>
         </p:spPr>
+        <p:txBody>
+          <a:bodyPr/>
+          <a:lstStyle/>
+          <a:p>
+            <a:endParaRPr lang="en-GB"/>
+          </a:p>
+        </p:txBody>
       </p:sp>
       <p:sp>
         <p:nvSpPr>
@@ -17189,6 +17889,13 @@
           </a:solidFill>
           <a:ln/>
         </p:spPr>
+        <p:txBody>
+          <a:bodyPr/>
+          <a:lstStyle/>
+          <a:p>
+            <a:endParaRPr lang="en-GB"/>
+          </a:p>
+        </p:txBody>
       </p:sp>
       <p:sp>
         <p:nvSpPr>
@@ -17209,6 +17916,13 @@
           </a:solidFill>
           <a:ln/>
         </p:spPr>
+        <p:txBody>
+          <a:bodyPr/>
+          <a:lstStyle/>
+          <a:p>
+            <a:endParaRPr lang="en-GB"/>
+          </a:p>
+        </p:txBody>
       </p:sp>
       <p:sp>
         <p:nvSpPr>
@@ -17231,7 +17945,7 @@
           <a:bodyPr wrap="square" rtlCol="0" anchor="ctr"/>
           <a:lstStyle/>
           <a:p>
-            <a:pPr algn="ctr" indent="0" marL="0">
+            <a:pPr marL="0" indent="0" algn="ctr">
               <a:buNone/>
             </a:pPr>
             <a:r>
@@ -17270,7 +17984,7 @@
           <a:bodyPr wrap="square" rtlCol="0" anchor="ctr"/>
           <a:lstStyle/>
           <a:p>
-            <a:pPr algn="ctr" indent="0" marL="0">
+            <a:pPr marL="0" indent="0" algn="ctr">
               <a:buNone/>
             </a:pPr>
             <a:r>
@@ -17309,7 +18023,7 @@
           <a:bodyPr wrap="square" rtlCol="0" anchor="t"/>
           <a:lstStyle/>
           <a:p>
-            <a:pPr algn="ctr" indent="0" marL="0">
+            <a:pPr marL="0" indent="0" algn="ctr">
               <a:buNone/>
             </a:pPr>
             <a:r>
@@ -17341,7 +18055,7 @@
     <p:bg>
       <p:bgPr>
         <a:blipFill dpi="0" rotWithShape="1">
-          <a:blip r:embed="rId1">
+          <a:blip r:embed="rId3">
             <a:lum/>
           </a:blip>
           <a:srcRect/>
@@ -17387,7 +18101,7 @@
           <a:bodyPr wrap="square" rtlCol="0" anchor="ctr"/>
           <a:lstStyle/>
           <a:p>
-            <a:pPr indent="0" marL="0">
+            <a:pPr marL="0" indent="0">
               <a:buNone/>
             </a:pPr>
             <a:r>
@@ -17426,7 +18140,7 @@
           <a:bodyPr wrap="square" rtlCol="0" anchor="ctr"/>
           <a:lstStyle/>
           <a:p>
-            <a:pPr indent="0" marL="0">
+            <a:pPr marL="0" indent="0">
               <a:buNone/>
             </a:pPr>
             <a:r>
@@ -17465,7 +18179,7 @@
           <a:bodyPr wrap="square" rtlCol="0" anchor="ctr"/>
           <a:lstStyle/>
           <a:p>
-            <a:pPr indent="0" marL="0">
+            <a:pPr marL="0" indent="0">
               <a:buNone/>
             </a:pPr>
             <a:r>
@@ -17504,7 +18218,7 @@
           <a:bodyPr wrap="square" rtlCol="0" anchor="ctr"/>
           <a:lstStyle/>
           <a:p>
-            <a:pPr algn="ctr" indent="0" marL="0">
+            <a:pPr marL="0" indent="0" algn="ctr">
               <a:buNone/>
             </a:pPr>
             <a:r>
@@ -17543,7 +18257,7 @@
           <a:bodyPr wrap="square" rtlCol="0" anchor="ctr"/>
           <a:lstStyle/>
           <a:p>
-            <a:pPr algn="r" indent="0" marL="0">
+            <a:pPr marL="0" indent="0" algn="r">
               <a:buNone/>
             </a:pPr>
             <a:r>
@@ -17557,9 +18271,6 @@
               </a:rPr>
               <a:t>EMEA </a:t>
             </a:r>
-            <a:pPr algn="r" indent="0" marL="0">
-              <a:buNone/>
-            </a:pPr>
             <a:r>
               <a:rPr lang="en-US" sz="1200" dirty="0">
                 <a:solidFill>
@@ -17571,9 +18282,6 @@
               </a:rPr>
               <a:t>| </a:t>
             </a:r>
-            <a:pPr algn="r" indent="0" marL="0">
-              <a:buNone/>
-            </a:pPr>
             <a:r>
               <a:rPr lang="en-US" sz="1200" b="1" dirty="0">
                 <a:solidFill>
@@ -17610,6 +18318,13 @@
           </a:solidFill>
           <a:ln/>
         </p:spPr>
+        <p:txBody>
+          <a:bodyPr/>
+          <a:lstStyle/>
+          <a:p>
+            <a:endParaRPr lang="en-GB"/>
+          </a:p>
+        </p:txBody>
       </p:sp>
       <p:sp>
         <p:nvSpPr>
@@ -17632,6 +18347,13 @@
           </a:solidFill>
           <a:ln/>
         </p:spPr>
+        <p:txBody>
+          <a:bodyPr/>
+          <a:lstStyle/>
+          <a:p>
+            <a:endParaRPr lang="en-GB"/>
+          </a:p>
+        </p:txBody>
       </p:sp>
       <p:sp>
         <p:nvSpPr>
@@ -17654,7 +18376,7 @@
           <a:bodyPr wrap="square" rtlCol="0" anchor="ctr"/>
           <a:lstStyle/>
           <a:p>
-            <a:pPr indent="0" marL="0">
+            <a:pPr marL="0" indent="0">
               <a:buNone/>
             </a:pPr>
             <a:r>
@@ -17691,6 +18413,13 @@
           </a:solidFill>
           <a:ln/>
         </p:spPr>
+        <p:txBody>
+          <a:bodyPr/>
+          <a:lstStyle/>
+          <a:p>
+            <a:endParaRPr lang="en-GB"/>
+          </a:p>
+        </p:txBody>
       </p:sp>
       <p:sp>
         <p:nvSpPr>
@@ -17713,7 +18442,7 @@
           <a:bodyPr wrap="square" rtlCol="0" anchor="ctr"/>
           <a:lstStyle/>
           <a:p>
-            <a:pPr algn="ctr" indent="0" marL="0">
+            <a:pPr marL="0" indent="0" algn="ctr">
               <a:buNone/>
             </a:pPr>
             <a:r>
@@ -17752,7 +18481,7 @@
           <a:bodyPr wrap="square" rtlCol="0" anchor="ctr"/>
           <a:lstStyle/>
           <a:p>
-            <a:pPr indent="0" marL="0">
+            <a:pPr marL="0" indent="0">
               <a:buNone/>
             </a:pPr>
             <a:r>
@@ -17789,6 +18518,13 @@
           </a:solidFill>
           <a:ln/>
         </p:spPr>
+        <p:txBody>
+          <a:bodyPr/>
+          <a:lstStyle/>
+          <a:p>
+            <a:endParaRPr lang="en-GB"/>
+          </a:p>
+        </p:txBody>
       </p:sp>
       <p:sp>
         <p:nvSpPr>
@@ -17811,7 +18547,7 @@
           <a:bodyPr wrap="square" rtlCol="0" anchor="ctr"/>
           <a:lstStyle/>
           <a:p>
-            <a:pPr algn="ctr" indent="0" marL="0">
+            <a:pPr marL="0" indent="0" algn="ctr">
               <a:buNone/>
             </a:pPr>
             <a:r>
@@ -17850,7 +18586,7 @@
           <a:bodyPr wrap="square" rtlCol="0" anchor="ctr"/>
           <a:lstStyle/>
           <a:p>
-            <a:pPr indent="0" marL="0">
+            <a:pPr marL="0" indent="0">
               <a:buNone/>
             </a:pPr>
             <a:r>
@@ -17887,6 +18623,13 @@
           </a:solidFill>
           <a:ln/>
         </p:spPr>
+        <p:txBody>
+          <a:bodyPr/>
+          <a:lstStyle/>
+          <a:p>
+            <a:endParaRPr lang="en-GB"/>
+          </a:p>
+        </p:txBody>
       </p:sp>
       <p:sp>
         <p:nvSpPr>
@@ -17909,7 +18652,7 @@
           <a:bodyPr wrap="square" rtlCol="0" anchor="ctr"/>
           <a:lstStyle/>
           <a:p>
-            <a:pPr algn="ctr" indent="0" marL="0">
+            <a:pPr marL="0" indent="0" algn="ctr">
               <a:buNone/>
             </a:pPr>
             <a:r>
@@ -17948,7 +18691,7 @@
           <a:bodyPr wrap="square" rtlCol="0" anchor="ctr"/>
           <a:lstStyle/>
           <a:p>
-            <a:pPr indent="0" marL="0">
+            <a:pPr marL="0" indent="0">
               <a:buNone/>
             </a:pPr>
             <a:r>
@@ -17987,6 +18730,13 @@
           </a:solidFill>
           <a:ln/>
         </p:spPr>
+        <p:txBody>
+          <a:bodyPr/>
+          <a:lstStyle/>
+          <a:p>
+            <a:endParaRPr lang="en-GB"/>
+          </a:p>
+        </p:txBody>
       </p:sp>
       <p:sp>
         <p:nvSpPr>
@@ -18009,6 +18759,13 @@
           </a:solidFill>
           <a:ln/>
         </p:spPr>
+        <p:txBody>
+          <a:bodyPr/>
+          <a:lstStyle/>
+          <a:p>
+            <a:endParaRPr lang="en-GB"/>
+          </a:p>
+        </p:txBody>
       </p:sp>
       <p:sp>
         <p:nvSpPr>
@@ -18031,7 +18788,7 @@
           <a:bodyPr wrap="square" rtlCol="0" anchor="ctr"/>
           <a:lstStyle/>
           <a:p>
-            <a:pPr indent="0" marL="0">
+            <a:pPr marL="0" indent="0">
               <a:buNone/>
             </a:pPr>
             <a:r>
@@ -18068,6 +18825,13 @@
           </a:solidFill>
           <a:ln/>
         </p:spPr>
+        <p:txBody>
+          <a:bodyPr/>
+          <a:lstStyle/>
+          <a:p>
+            <a:endParaRPr lang="en-GB"/>
+          </a:p>
+        </p:txBody>
       </p:sp>
       <p:sp>
         <p:nvSpPr>
@@ -18090,7 +18854,7 @@
           <a:bodyPr wrap="square" rtlCol="0" anchor="ctr"/>
           <a:lstStyle/>
           <a:p>
-            <a:pPr algn="ctr" indent="0" marL="0">
+            <a:pPr marL="0" indent="0" algn="ctr">
               <a:buNone/>
             </a:pPr>
             <a:r>
@@ -18129,7 +18893,7 @@
           <a:bodyPr wrap="square" rtlCol="0" anchor="ctr"/>
           <a:lstStyle/>
           <a:p>
-            <a:pPr indent="0" marL="0">
+            <a:pPr marL="0" indent="0">
               <a:buNone/>
             </a:pPr>
             <a:r>
@@ -18166,6 +18930,13 @@
           </a:solidFill>
           <a:ln/>
         </p:spPr>
+        <p:txBody>
+          <a:bodyPr/>
+          <a:lstStyle/>
+          <a:p>
+            <a:endParaRPr lang="en-GB"/>
+          </a:p>
+        </p:txBody>
       </p:sp>
       <p:sp>
         <p:nvSpPr>
@@ -18188,7 +18959,7 @@
           <a:bodyPr wrap="square" rtlCol="0" anchor="ctr"/>
           <a:lstStyle/>
           <a:p>
-            <a:pPr algn="ctr" indent="0" marL="0">
+            <a:pPr marL="0" indent="0" algn="ctr">
               <a:buNone/>
             </a:pPr>
             <a:r>
@@ -18227,7 +18998,7 @@
           <a:bodyPr wrap="square" rtlCol="0" anchor="ctr"/>
           <a:lstStyle/>
           <a:p>
-            <a:pPr indent="0" marL="0">
+            <a:pPr marL="0" indent="0">
               <a:buNone/>
             </a:pPr>
             <a:r>
@@ -18264,6 +19035,13 @@
           </a:solidFill>
           <a:ln/>
         </p:spPr>
+        <p:txBody>
+          <a:bodyPr/>
+          <a:lstStyle/>
+          <a:p>
+            <a:endParaRPr lang="en-GB"/>
+          </a:p>
+        </p:txBody>
       </p:sp>
       <p:sp>
         <p:nvSpPr>
@@ -18286,7 +19064,7 @@
           <a:bodyPr wrap="square" rtlCol="0" anchor="ctr"/>
           <a:lstStyle/>
           <a:p>
-            <a:pPr algn="ctr" indent="0" marL="0">
+            <a:pPr marL="0" indent="0" algn="ctr">
               <a:buNone/>
             </a:pPr>
             <a:r>
@@ -18325,7 +19103,7 @@
           <a:bodyPr wrap="square" rtlCol="0" anchor="ctr"/>
           <a:lstStyle/>
           <a:p>
-            <a:pPr indent="0" marL="0">
+            <a:pPr marL="0" indent="0">
               <a:buNone/>
             </a:pPr>
             <a:r>
@@ -18369,6 +19147,13 @@
             <a:prstDash val="solid"/>
           </a:ln>
         </p:spPr>
+        <p:txBody>
+          <a:bodyPr/>
+          <a:lstStyle/>
+          <a:p>
+            <a:endParaRPr lang="en-GB"/>
+          </a:p>
+        </p:txBody>
       </p:sp>
       <p:sp>
         <p:nvSpPr>
@@ -18391,6 +19176,13 @@
           </a:solidFill>
           <a:ln/>
         </p:spPr>
+        <p:txBody>
+          <a:bodyPr/>
+          <a:lstStyle/>
+          <a:p>
+            <a:endParaRPr lang="en-GB"/>
+          </a:p>
+        </p:txBody>
       </p:sp>
       <p:sp>
         <p:nvSpPr>
@@ -18413,7 +19205,7 @@
           <a:bodyPr wrap="square" rtlCol="0" anchor="ctr"/>
           <a:lstStyle/>
           <a:p>
-            <a:pPr algn="ctr" indent="0" marL="0">
+            <a:pPr marL="0" indent="0" algn="ctr">
               <a:buNone/>
             </a:pPr>
             <a:r>
@@ -18539,6 +19331,13 @@
             <a:tailEnd type="triangle"/>
           </a:ln>
         </p:spPr>
+        <p:txBody>
+          <a:bodyPr/>
+          <a:lstStyle/>
+          <a:p>
+            <a:endParaRPr lang="en-GB"/>
+          </a:p>
+        </p:txBody>
       </p:sp>
       <p:sp>
         <p:nvSpPr>
@@ -18566,6 +19365,13 @@
             <a:prstDash val="solid"/>
           </a:ln>
         </p:spPr>
+        <p:txBody>
+          <a:bodyPr/>
+          <a:lstStyle/>
+          <a:p>
+            <a:endParaRPr lang="en-GB"/>
+          </a:p>
+        </p:txBody>
       </p:sp>
       <p:sp>
         <p:nvSpPr>
@@ -18588,6 +19394,13 @@
           </a:solidFill>
           <a:ln/>
         </p:spPr>
+        <p:txBody>
+          <a:bodyPr/>
+          <a:lstStyle/>
+          <a:p>
+            <a:endParaRPr lang="en-GB"/>
+          </a:p>
+        </p:txBody>
       </p:sp>
       <p:sp>
         <p:nvSpPr>
@@ -18610,7 +19423,7 @@
           <a:bodyPr wrap="square" rtlCol="0" anchor="ctr"/>
           <a:lstStyle/>
           <a:p>
-            <a:pPr algn="ctr" indent="0" marL="0">
+            <a:pPr marL="0" indent="0" algn="ctr">
               <a:buNone/>
             </a:pPr>
             <a:r>
@@ -18736,6 +19549,13 @@
             <a:tailEnd type="triangle"/>
           </a:ln>
         </p:spPr>
+        <p:txBody>
+          <a:bodyPr/>
+          <a:lstStyle/>
+          <a:p>
+            <a:endParaRPr lang="en-GB"/>
+          </a:p>
+        </p:txBody>
       </p:sp>
       <p:sp>
         <p:nvSpPr>
@@ -18763,6 +19583,13 @@
             <a:prstDash val="solid"/>
           </a:ln>
         </p:spPr>
+        <p:txBody>
+          <a:bodyPr/>
+          <a:lstStyle/>
+          <a:p>
+            <a:endParaRPr lang="en-GB"/>
+          </a:p>
+        </p:txBody>
       </p:sp>
       <p:sp>
         <p:nvSpPr>
@@ -18785,6 +19612,13 @@
           </a:solidFill>
           <a:ln/>
         </p:spPr>
+        <p:txBody>
+          <a:bodyPr/>
+          <a:lstStyle/>
+          <a:p>
+            <a:endParaRPr lang="en-GB"/>
+          </a:p>
+        </p:txBody>
       </p:sp>
       <p:sp>
         <p:nvSpPr>
@@ -18807,7 +19641,7 @@
           <a:bodyPr wrap="square" rtlCol="0" anchor="ctr"/>
           <a:lstStyle/>
           <a:p>
-            <a:pPr algn="ctr" indent="0" marL="0">
+            <a:pPr marL="0" indent="0" algn="ctr">
               <a:buNone/>
             </a:pPr>
             <a:r>
@@ -18924,7 +19758,7 @@
     <p:bg>
       <p:bgPr>
         <a:blipFill dpi="0" rotWithShape="1">
-          <a:blip r:embed="rId1">
+          <a:blip r:embed="rId3">
             <a:lum/>
           </a:blip>
           <a:srcRect/>
@@ -18970,7 +19804,7 @@
           <a:bodyPr wrap="square" rtlCol="0" anchor="ctr"/>
           <a:lstStyle/>
           <a:p>
-            <a:pPr indent="0" marL="0">
+            <a:pPr marL="0" indent="0">
               <a:buNone/>
             </a:pPr>
             <a:r>
@@ -19009,7 +19843,7 @@
           <a:bodyPr wrap="square" rtlCol="0" anchor="ctr"/>
           <a:lstStyle/>
           <a:p>
-            <a:pPr indent="0" marL="0">
+            <a:pPr marL="0" indent="0">
               <a:buNone/>
             </a:pPr>
             <a:r>
@@ -19048,7 +19882,7 @@
           <a:bodyPr wrap="square" rtlCol="0" anchor="ctr"/>
           <a:lstStyle/>
           <a:p>
-            <a:pPr indent="0" marL="0">
+            <a:pPr marL="0" indent="0">
               <a:buNone/>
             </a:pPr>
             <a:r>
@@ -19087,7 +19921,7 @@
           <a:bodyPr wrap="square" rtlCol="0" anchor="ctr"/>
           <a:lstStyle/>
           <a:p>
-            <a:pPr algn="ctr" indent="0" marL="0">
+            <a:pPr marL="0" indent="0" algn="ctr">
               <a:buNone/>
             </a:pPr>
             <a:r>
@@ -19126,7 +19960,7 @@
           <a:bodyPr wrap="square" rtlCol="0" anchor="ctr"/>
           <a:lstStyle/>
           <a:p>
-            <a:pPr algn="r" indent="0" marL="0">
+            <a:pPr marL="0" indent="0" algn="r">
               <a:buNone/>
             </a:pPr>
             <a:r>
@@ -19140,9 +19974,6 @@
               </a:rPr>
               <a:t>EMEA </a:t>
             </a:r>
-            <a:pPr algn="r" indent="0" marL="0">
-              <a:buNone/>
-            </a:pPr>
             <a:r>
               <a:rPr lang="en-US" sz="1200" dirty="0">
                 <a:solidFill>
@@ -19154,9 +19985,6 @@
               </a:rPr>
               <a:t>| </a:t>
             </a:r>
-            <a:pPr algn="r" indent="0" marL="0">
-              <a:buNone/>
-            </a:pPr>
             <a:r>
               <a:rPr lang="en-US" sz="1200" b="1" dirty="0">
                 <a:solidFill>
@@ -19198,13 +20026,20 @@
             <a:prstDash val="solid"/>
           </a:ln>
           <a:effectLst>
-            <a:outerShdw sx="100000" sy="100000" kx="0" ky="0" algn="bl" rotWithShape="0" blurRad="88900" dist="25400" dir="5400000">
+            <a:outerShdw blurRad="88900" dist="25400" dir="5400000" algn="bl" rotWithShape="0">
               <a:srgbClr val="8AA0BC">
                 <a:alpha val="25000"/>
               </a:srgbClr>
             </a:outerShdw>
           </a:effectLst>
         </p:spPr>
+        <p:txBody>
+          <a:bodyPr/>
+          <a:lstStyle/>
+          <a:p>
+            <a:endParaRPr lang="en-GB"/>
+          </a:p>
+        </p:txBody>
       </p:sp>
       <p:sp>
         <p:nvSpPr>
@@ -19227,6 +20062,13 @@
           </a:solidFill>
           <a:ln/>
         </p:spPr>
+        <p:txBody>
+          <a:bodyPr/>
+          <a:lstStyle/>
+          <a:p>
+            <a:endParaRPr lang="en-GB"/>
+          </a:p>
+        </p:txBody>
       </p:sp>
       <p:sp>
         <p:nvSpPr>
@@ -19249,7 +20091,7 @@
           <a:bodyPr wrap="square" rtlCol="0" anchor="ctr"/>
           <a:lstStyle/>
           <a:p>
-            <a:pPr indent="0" marL="0">
+            <a:pPr marL="0" indent="0">
               <a:buNone/>
             </a:pPr>
             <a:r>
@@ -19288,7 +20130,7 @@
           <a:bodyPr wrap="square" rtlCol="0" anchor="t"/>
           <a:lstStyle/>
           <a:p>
-            <a:pPr indent="0" marL="0">
+            <a:pPr marL="0" indent="0">
               <a:buNone/>
             </a:pPr>
             <a:r>
@@ -19327,6 +20169,13 @@
           </a:solidFill>
           <a:ln/>
         </p:spPr>
+        <p:txBody>
+          <a:bodyPr/>
+          <a:lstStyle/>
+          <a:p>
+            <a:endParaRPr lang="en-GB"/>
+          </a:p>
+        </p:txBody>
       </p:sp>
       <p:sp>
         <p:nvSpPr>
@@ -19349,7 +20198,7 @@
           <a:bodyPr wrap="square" rtlCol="0" anchor="ctr"/>
           <a:lstStyle/>
           <a:p>
-            <a:pPr indent="0" marL="0">
+            <a:pPr marL="0" indent="0">
               <a:buNone/>
             </a:pPr>
             <a:r>
@@ -19363,9 +20212,6 @@
               </a:rPr>
               <a:t>Embed once, adopt many.   </a:t>
             </a:r>
-            <a:pPr indent="0" marL="0">
-              <a:buNone/>
-            </a:pPr>
             <a:r>
               <a:rPr lang="en-US" sz="1200" dirty="0">
                 <a:solidFill>
@@ -19402,6 +20248,13 @@
           </a:solidFill>
           <a:ln/>
         </p:spPr>
+        <p:txBody>
+          <a:bodyPr/>
+          <a:lstStyle/>
+          <a:p>
+            <a:endParaRPr lang="en-GB"/>
+          </a:p>
+        </p:txBody>
       </p:sp>
       <p:sp>
         <p:nvSpPr>
@@ -19424,7 +20277,7 @@
           <a:bodyPr wrap="square" rtlCol="0" anchor="ctr"/>
           <a:lstStyle/>
           <a:p>
-            <a:pPr indent="0" marL="0">
+            <a:pPr marL="0" indent="0">
               <a:buNone/>
             </a:pPr>
             <a:r>
@@ -19438,9 +20291,6 @@
               </a:rPr>
               <a:t>PRIMARY KPI  </a:t>
             </a:r>
-            <a:pPr indent="0" marL="0">
-              <a:buNone/>
-            </a:pPr>
             <a:r>
               <a:rPr lang="en-US" sz="1250" b="1" dirty="0">
                 <a:solidFill>
@@ -19477,7 +20327,7 @@
           <a:bodyPr wrap="square" rtlCol="0" anchor="t"/>
           <a:lstStyle/>
           <a:p>
-            <a:pPr indent="0" marL="0">
+            <a:pPr marL="0" indent="0">
               <a:buNone/>
             </a:pPr>
             <a:r>
@@ -19516,7 +20366,7 @@
           <a:bodyPr wrap="square" rtlCol="0" anchor="ctr"/>
           <a:lstStyle/>
           <a:p>
-            <a:pPr indent="0" marL="0">
+            <a:pPr marL="0" indent="0">
               <a:buNone/>
             </a:pPr>
             <a:r>
@@ -19530,9 +20380,6 @@
               </a:rPr>
               <a:t>Embed once </a:t>
             </a:r>
-            <a:pPr indent="0" marL="0">
-              <a:buNone/>
-            </a:pPr>
             <a:r>
               <a:rPr lang="en-US" sz="1350" b="1" dirty="0">
                 <a:solidFill>
@@ -19569,6 +20416,13 @@
           </a:solidFill>
           <a:ln/>
         </p:spPr>
+        <p:txBody>
+          <a:bodyPr/>
+          <a:lstStyle/>
+          <a:p>
+            <a:endParaRPr lang="en-GB"/>
+          </a:p>
+        </p:txBody>
       </p:sp>
       <p:sp>
         <p:nvSpPr>
@@ -19591,7 +20445,7 @@
           <a:bodyPr wrap="square" rtlCol="0" anchor="ctr"/>
           <a:lstStyle/>
           <a:p>
-            <a:pPr algn="ctr" indent="0" marL="0">
+            <a:pPr marL="0" indent="0" algn="ctr">
               <a:buNone/>
             </a:pPr>
             <a:r>
@@ -19632,6 +20486,13 @@
             <a:tailEnd type="triangle"/>
           </a:ln>
         </p:spPr>
+        <p:txBody>
+          <a:bodyPr/>
+          <a:lstStyle/>
+          <a:p>
+            <a:endParaRPr lang="en-GB"/>
+          </a:p>
+        </p:txBody>
       </p:sp>
       <p:sp>
         <p:nvSpPr>
@@ -19654,6 +20515,13 @@
           </a:solidFill>
           <a:ln/>
         </p:spPr>
+        <p:txBody>
+          <a:bodyPr/>
+          <a:lstStyle/>
+          <a:p>
+            <a:endParaRPr lang="en-GB"/>
+          </a:p>
+        </p:txBody>
       </p:sp>
       <p:sp>
         <p:nvSpPr>
@@ -19676,7 +20544,7 @@
           <a:bodyPr wrap="square" rtlCol="0" anchor="ctr"/>
           <a:lstStyle/>
           <a:p>
-            <a:pPr algn="ctr" indent="0" marL="0">
+            <a:pPr marL="0" indent="0" algn="ctr">
               <a:buNone/>
             </a:pPr>
             <a:r>
@@ -19717,6 +20585,13 @@
             <a:tailEnd type="triangle"/>
           </a:ln>
         </p:spPr>
+        <p:txBody>
+          <a:bodyPr/>
+          <a:lstStyle/>
+          <a:p>
+            <a:endParaRPr lang="en-GB"/>
+          </a:p>
+        </p:txBody>
       </p:sp>
       <p:sp>
         <p:nvSpPr>
@@ -19739,6 +20614,13 @@
           </a:solidFill>
           <a:ln/>
         </p:spPr>
+        <p:txBody>
+          <a:bodyPr/>
+          <a:lstStyle/>
+          <a:p>
+            <a:endParaRPr lang="en-GB"/>
+          </a:p>
+        </p:txBody>
       </p:sp>
       <p:sp>
         <p:nvSpPr>
@@ -19761,7 +20643,7 @@
           <a:bodyPr wrap="square" rtlCol="0" anchor="ctr"/>
           <a:lstStyle/>
           <a:p>
-            <a:pPr algn="ctr" indent="0" marL="0">
+            <a:pPr marL="0" indent="0" algn="ctr">
               <a:buNone/>
             </a:pPr>
             <a:r>
@@ -19802,6 +20684,13 @@
             <a:tailEnd type="triangle"/>
           </a:ln>
         </p:spPr>
+        <p:txBody>
+          <a:bodyPr/>
+          <a:lstStyle/>
+          <a:p>
+            <a:endParaRPr lang="en-GB"/>
+          </a:p>
+        </p:txBody>
       </p:sp>
       <p:sp>
         <p:nvSpPr>
@@ -19829,6 +20718,13 @@
             <a:prstDash val="solid"/>
           </a:ln>
         </p:spPr>
+        <p:txBody>
+          <a:bodyPr/>
+          <a:lstStyle/>
+          <a:p>
+            <a:endParaRPr lang="en-GB"/>
+          </a:p>
+        </p:txBody>
       </p:sp>
       <p:sp>
         <p:nvSpPr>
@@ -19851,7 +20747,7 @@
           <a:bodyPr wrap="square" rtlCol="0" anchor="ctr"/>
           <a:lstStyle/>
           <a:p>
-            <a:pPr algn="ctr" indent="0" marL="0">
+            <a:pPr marL="0" indent="0" algn="ctr">
               <a:buNone/>
             </a:pPr>
             <a:r>
@@ -19868,7 +20764,7 @@
             <a:endParaRPr lang="en-US" sz="1100" dirty="0"/>
           </a:p>
           <a:p>
-            <a:pPr algn="ctr" indent="0" marL="0">
+            <a:pPr marL="0" indent="0" algn="ctr">
               <a:buNone/>
             </a:pPr>
             <a:r>
@@ -19909,6 +20805,13 @@
             <a:tailEnd type="triangle"/>
           </a:ln>
         </p:spPr>
+        <p:txBody>
+          <a:bodyPr/>
+          <a:lstStyle/>
+          <a:p>
+            <a:endParaRPr lang="en-GB"/>
+          </a:p>
+        </p:txBody>
       </p:sp>
       <p:sp>
         <p:nvSpPr>
@@ -19933,6 +20836,13 @@
             <a:tailEnd type="triangle"/>
           </a:ln>
         </p:spPr>
+        <p:txBody>
+          <a:bodyPr/>
+          <a:lstStyle/>
+          <a:p>
+            <a:endParaRPr lang="en-GB"/>
+          </a:p>
+        </p:txBody>
       </p:sp>
       <p:sp>
         <p:nvSpPr>
@@ -19960,6 +20870,13 @@
             <a:prstDash val="solid"/>
           </a:ln>
         </p:spPr>
+        <p:txBody>
+          <a:bodyPr/>
+          <a:lstStyle/>
+          <a:p>
+            <a:endParaRPr lang="en-GB"/>
+          </a:p>
+        </p:txBody>
       </p:sp>
       <p:sp>
         <p:nvSpPr>
@@ -19982,7 +20899,7 @@
           <a:bodyPr wrap="square" rtlCol="0" anchor="ctr"/>
           <a:lstStyle/>
           <a:p>
-            <a:pPr algn="ctr" indent="0" marL="0">
+            <a:pPr marL="0" indent="0" algn="ctr">
               <a:buNone/>
             </a:pPr>
             <a:r>
@@ -19999,7 +20916,7 @@
             <a:endParaRPr lang="en-US" sz="1100" dirty="0"/>
           </a:p>
           <a:p>
-            <a:pPr algn="ctr" indent="0" marL="0">
+            <a:pPr marL="0" indent="0" algn="ctr">
               <a:buNone/>
             </a:pPr>
             <a:r>
@@ -20040,6 +20957,13 @@
             <a:tailEnd type="triangle"/>
           </a:ln>
         </p:spPr>
+        <p:txBody>
+          <a:bodyPr/>
+          <a:lstStyle/>
+          <a:p>
+            <a:endParaRPr lang="en-GB"/>
+          </a:p>
+        </p:txBody>
       </p:sp>
       <p:sp>
         <p:nvSpPr>
@@ -20064,6 +20988,13 @@
             <a:tailEnd type="triangle"/>
           </a:ln>
         </p:spPr>
+        <p:txBody>
+          <a:bodyPr/>
+          <a:lstStyle/>
+          <a:p>
+            <a:endParaRPr lang="en-GB"/>
+          </a:p>
+        </p:txBody>
       </p:sp>
       <p:sp>
         <p:nvSpPr>
@@ -20091,6 +21022,13 @@
             <a:prstDash val="solid"/>
           </a:ln>
         </p:spPr>
+        <p:txBody>
+          <a:bodyPr/>
+          <a:lstStyle/>
+          <a:p>
+            <a:endParaRPr lang="en-GB"/>
+          </a:p>
+        </p:txBody>
       </p:sp>
       <p:sp>
         <p:nvSpPr>
@@ -20113,7 +21051,7 @@
           <a:bodyPr wrap="square" rtlCol="0" anchor="ctr"/>
           <a:lstStyle/>
           <a:p>
-            <a:pPr algn="ctr" indent="0" marL="0">
+            <a:pPr marL="0" indent="0" algn="ctr">
               <a:buNone/>
             </a:pPr>
             <a:r>
@@ -20130,7 +21068,7 @@
             <a:endParaRPr lang="en-US" sz="1100" dirty="0"/>
           </a:p>
           <a:p>
-            <a:pPr algn="ctr" indent="0" marL="0">
+            <a:pPr marL="0" indent="0" algn="ctr">
               <a:buNone/>
             </a:pPr>
             <a:r>
@@ -20171,6 +21109,13 @@
             <a:tailEnd type="triangle"/>
           </a:ln>
         </p:spPr>
+        <p:txBody>
+          <a:bodyPr/>
+          <a:lstStyle/>
+          <a:p>
+            <a:endParaRPr lang="en-GB"/>
+          </a:p>
+        </p:txBody>
       </p:sp>
       <p:sp>
         <p:nvSpPr>
@@ -20193,6 +21138,13 @@
           </a:solidFill>
           <a:ln/>
         </p:spPr>
+        <p:txBody>
+          <a:bodyPr/>
+          <a:lstStyle/>
+          <a:p>
+            <a:endParaRPr lang="en-GB"/>
+          </a:p>
+        </p:txBody>
       </p:sp>
       <p:sp>
         <p:nvSpPr>
@@ -20215,7 +21167,7 @@
           <a:bodyPr wrap="square" rtlCol="0" anchor="ctr"/>
           <a:lstStyle/>
           <a:p>
-            <a:pPr algn="ctr" indent="0" marL="0">
+            <a:pPr marL="0" indent="0" algn="ctr">
               <a:buNone/>
             </a:pPr>
             <a:r>
@@ -20534,4 +21486,325 @@
     </a:ext>
   </a:extLst>
 </a:theme>
+</file>
+
+<file path=ppt/theme/theme2.xml><?xml version="1.0" encoding="utf-8"?>
+<a:theme xmlns:a="http://schemas.openxmlformats.org/drawingml/2006/main" name="Office Theme">
+  <a:themeElements>
+    <a:clrScheme name="Office">
+      <a:dk1>
+        <a:sysClr val="windowText" lastClr="000000"/>
+      </a:dk1>
+      <a:lt1>
+        <a:sysClr val="window" lastClr="FFFFFF"/>
+      </a:lt1>
+      <a:dk2>
+        <a:srgbClr val="0E2841"/>
+      </a:dk2>
+      <a:lt2>
+        <a:srgbClr val="E8E8E8"/>
+      </a:lt2>
+      <a:accent1>
+        <a:srgbClr val="156082"/>
+      </a:accent1>
+      <a:accent2>
+        <a:srgbClr val="E97132"/>
+      </a:accent2>
+      <a:accent3>
+        <a:srgbClr val="196B24"/>
+      </a:accent3>
+      <a:accent4>
+        <a:srgbClr val="0F9ED5"/>
+      </a:accent4>
+      <a:accent5>
+        <a:srgbClr val="A02B93"/>
+      </a:accent5>
+      <a:accent6>
+        <a:srgbClr val="4EA72E"/>
+      </a:accent6>
+      <a:hlink>
+        <a:srgbClr val="467886"/>
+      </a:hlink>
+      <a:folHlink>
+        <a:srgbClr val="96607D"/>
+      </a:folHlink>
+    </a:clrScheme>
+    <a:fontScheme name="Office">
+      <a:majorFont>
+        <a:latin typeface="Aptos Display" panose="02110004020202020204"/>
+        <a:ea typeface=""/>
+        <a:cs typeface=""/>
+        <a:font script="Jpan" typeface="游ゴシック Light"/>
+        <a:font script="Hang" typeface="맑은 고딕"/>
+        <a:font script="Hans" typeface="等线 Light"/>
+        <a:font script="Hant" typeface="新細明體"/>
+        <a:font script="Arab" typeface="Times New Roman"/>
+        <a:font script="Hebr" typeface="Times New Roman"/>
+        <a:font script="Thai" typeface="Angsana New"/>
+        <a:font script="Ethi" typeface="Nyala"/>
+        <a:font script="Beng" typeface="Vrinda"/>
+        <a:font script="Gujr" typeface="Shruti"/>
+        <a:font script="Khmr" typeface="MoolBoran"/>
+        <a:font script="Knda" typeface="Tunga"/>
+        <a:font script="Guru" typeface="Raavi"/>
+        <a:font script="Cans" typeface="Euphemia"/>
+        <a:font script="Cher" typeface="Plantagenet Cherokee"/>
+        <a:font script="Yiii" typeface="Microsoft Yi Baiti"/>
+        <a:font script="Tibt" typeface="Microsoft Himalaya"/>
+        <a:font script="Thaa" typeface="MV Boli"/>
+        <a:font script="Deva" typeface="Mangal"/>
+        <a:font script="Telu" typeface="Gautami"/>
+        <a:font script="Taml" typeface="Latha"/>
+        <a:font script="Syrc" typeface="Estrangelo Edessa"/>
+        <a:font script="Orya" typeface="Kalinga"/>
+        <a:font script="Mlym" typeface="Kartika"/>
+        <a:font script="Laoo" typeface="DokChampa"/>
+        <a:font script="Sinh" typeface="Iskoola Pota"/>
+        <a:font script="Mong" typeface="Mongolian Baiti"/>
+        <a:font script="Viet" typeface="Times New Roman"/>
+        <a:font script="Uigh" typeface="Microsoft Uighur"/>
+        <a:font script="Geor" typeface="Sylfaen"/>
+        <a:font script="Armn" typeface="Arial"/>
+        <a:font script="Bugi" typeface="Leelawadee UI"/>
+        <a:font script="Bopo" typeface="Microsoft JhengHei"/>
+        <a:font script="Java" typeface="Javanese Text"/>
+        <a:font script="Lisu" typeface="Segoe UI"/>
+        <a:font script="Mymr" typeface="Myanmar Text"/>
+        <a:font script="Nkoo" typeface="Ebrima"/>
+        <a:font script="Olck" typeface="Nirmala UI"/>
+        <a:font script="Osma" typeface="Ebrima"/>
+        <a:font script="Phag" typeface="Phagspa"/>
+        <a:font script="Syrn" typeface="Estrangelo Edessa"/>
+        <a:font script="Syrj" typeface="Estrangelo Edessa"/>
+        <a:font script="Syre" typeface="Estrangelo Edessa"/>
+        <a:font script="Sora" typeface="Nirmala UI"/>
+        <a:font script="Tale" typeface="Microsoft Tai Le"/>
+        <a:font script="Talu" typeface="Microsoft New Tai Lue"/>
+        <a:font script="Tfng" typeface="Ebrima"/>
+      </a:majorFont>
+      <a:minorFont>
+        <a:latin typeface="Aptos" panose="02110004020202020204"/>
+        <a:ea typeface=""/>
+        <a:cs typeface=""/>
+        <a:font script="Jpan" typeface="游ゴシック"/>
+        <a:font script="Hang" typeface="맑은 고딕"/>
+        <a:font script="Hans" typeface="等线"/>
+        <a:font script="Hant" typeface="新細明體"/>
+        <a:font script="Arab" typeface="Arial"/>
+        <a:font script="Hebr" typeface="Arial"/>
+        <a:font script="Thai" typeface="Cordia New"/>
+        <a:font script="Ethi" typeface="Nyala"/>
+        <a:font script="Beng" typeface="Vrinda"/>
+        <a:font script="Gujr" typeface="Shruti"/>
+        <a:font script="Khmr" typeface="DaunPenh"/>
+        <a:font script="Knda" typeface="Tunga"/>
+        <a:font script="Guru" typeface="Raavi"/>
+        <a:font script="Cans" typeface="Euphemia"/>
+        <a:font script="Cher" typeface="Plantagenet Cherokee"/>
+        <a:font script="Yiii" typeface="Microsoft Yi Baiti"/>
+        <a:font script="Tibt" typeface="Microsoft Himalaya"/>
+        <a:font script="Thaa" typeface="MV Boli"/>
+        <a:font script="Deva" typeface="Mangal"/>
+        <a:font script="Telu" typeface="Gautami"/>
+        <a:font script="Taml" typeface="Latha"/>
+        <a:font script="Syrc" typeface="Estrangelo Edessa"/>
+        <a:font script="Orya" typeface="Kalinga"/>
+        <a:font script="Mlym" typeface="Kartika"/>
+        <a:font script="Laoo" typeface="DokChampa"/>
+        <a:font script="Sinh" typeface="Iskoola Pota"/>
+        <a:font script="Mong" typeface="Mongolian Baiti"/>
+        <a:font script="Viet" typeface="Arial"/>
+        <a:font script="Uigh" typeface="Microsoft Uighur"/>
+        <a:font script="Geor" typeface="Sylfaen"/>
+        <a:font script="Armn" typeface="Arial"/>
+        <a:font script="Bugi" typeface="Leelawadee UI"/>
+        <a:font script="Bopo" typeface="Microsoft JhengHei"/>
+        <a:font script="Java" typeface="Javanese Text"/>
+        <a:font script="Lisu" typeface="Segoe UI"/>
+        <a:font script="Mymr" typeface="Myanmar Text"/>
+        <a:font script="Nkoo" typeface="Ebrima"/>
+        <a:font script="Olck" typeface="Nirmala UI"/>
+        <a:font script="Osma" typeface="Ebrima"/>
+        <a:font script="Phag" typeface="Phagspa"/>
+        <a:font script="Syrn" typeface="Estrangelo Edessa"/>
+        <a:font script="Syrj" typeface="Estrangelo Edessa"/>
+        <a:font script="Syre" typeface="Estrangelo Edessa"/>
+        <a:font script="Sora" typeface="Nirmala UI"/>
+        <a:font script="Tale" typeface="Microsoft Tai Le"/>
+        <a:font script="Talu" typeface="Microsoft New Tai Lue"/>
+        <a:font script="Tfng" typeface="Ebrima"/>
+      </a:minorFont>
+    </a:fontScheme>
+    <a:fmtScheme name="Office">
+      <a:fillStyleLst>
+        <a:solidFill>
+          <a:schemeClr val="phClr"/>
+        </a:solidFill>
+        <a:gradFill rotWithShape="1">
+          <a:gsLst>
+            <a:gs pos="0">
+              <a:schemeClr val="phClr">
+                <a:lumMod val="110000"/>
+                <a:satMod val="105000"/>
+                <a:tint val="67000"/>
+              </a:schemeClr>
+            </a:gs>
+            <a:gs pos="50000">
+              <a:schemeClr val="phClr">
+                <a:lumMod val="105000"/>
+                <a:satMod val="103000"/>
+                <a:tint val="73000"/>
+              </a:schemeClr>
+            </a:gs>
+            <a:gs pos="100000">
+              <a:schemeClr val="phClr">
+                <a:lumMod val="105000"/>
+                <a:satMod val="109000"/>
+                <a:tint val="81000"/>
+              </a:schemeClr>
+            </a:gs>
+          </a:gsLst>
+          <a:lin ang="5400000" scaled="0"/>
+        </a:gradFill>
+        <a:gradFill rotWithShape="1">
+          <a:gsLst>
+            <a:gs pos="0">
+              <a:schemeClr val="phClr">
+                <a:satMod val="103000"/>
+                <a:lumMod val="102000"/>
+                <a:tint val="94000"/>
+              </a:schemeClr>
+            </a:gs>
+            <a:gs pos="50000">
+              <a:schemeClr val="phClr">
+                <a:satMod val="110000"/>
+                <a:lumMod val="100000"/>
+                <a:shade val="100000"/>
+              </a:schemeClr>
+            </a:gs>
+            <a:gs pos="100000">
+              <a:schemeClr val="phClr">
+                <a:lumMod val="99000"/>
+                <a:satMod val="120000"/>
+                <a:shade val="78000"/>
+              </a:schemeClr>
+            </a:gs>
+          </a:gsLst>
+          <a:lin ang="5400000" scaled="0"/>
+        </a:gradFill>
+      </a:fillStyleLst>
+      <a:lnStyleLst>
+        <a:ln w="12700" cap="flat" cmpd="sng" algn="ctr">
+          <a:solidFill>
+            <a:schemeClr val="phClr"/>
+          </a:solidFill>
+          <a:prstDash val="solid"/>
+          <a:miter lim="800000"/>
+        </a:ln>
+        <a:ln w="19050" cap="flat" cmpd="sng" algn="ctr">
+          <a:solidFill>
+            <a:schemeClr val="phClr"/>
+          </a:solidFill>
+          <a:prstDash val="solid"/>
+          <a:miter lim="800000"/>
+        </a:ln>
+        <a:ln w="25400" cap="flat" cmpd="sng" algn="ctr">
+          <a:solidFill>
+            <a:schemeClr val="phClr"/>
+          </a:solidFill>
+          <a:prstDash val="solid"/>
+          <a:miter lim="800000"/>
+        </a:ln>
+      </a:lnStyleLst>
+      <a:effectStyleLst>
+        <a:effectStyle>
+          <a:effectLst/>
+        </a:effectStyle>
+        <a:effectStyle>
+          <a:effectLst/>
+        </a:effectStyle>
+        <a:effectStyle>
+          <a:effectLst>
+            <a:outerShdw blurRad="57150" dist="19050" dir="5400000" algn="ctr" rotWithShape="0">
+              <a:srgbClr val="000000">
+                <a:alpha val="63000"/>
+              </a:srgbClr>
+            </a:outerShdw>
+          </a:effectLst>
+        </a:effectStyle>
+      </a:effectStyleLst>
+      <a:bgFillStyleLst>
+        <a:solidFill>
+          <a:schemeClr val="phClr"/>
+        </a:solidFill>
+        <a:solidFill>
+          <a:schemeClr val="phClr">
+            <a:tint val="95000"/>
+            <a:satMod val="170000"/>
+          </a:schemeClr>
+        </a:solidFill>
+        <a:gradFill rotWithShape="1">
+          <a:gsLst>
+            <a:gs pos="0">
+              <a:schemeClr val="phClr">
+                <a:tint val="93000"/>
+                <a:satMod val="150000"/>
+                <a:shade val="98000"/>
+                <a:lumMod val="102000"/>
+              </a:schemeClr>
+            </a:gs>
+            <a:gs pos="50000">
+              <a:schemeClr val="phClr">
+                <a:tint val="98000"/>
+                <a:satMod val="130000"/>
+                <a:shade val="90000"/>
+                <a:lumMod val="103000"/>
+              </a:schemeClr>
+            </a:gs>
+            <a:gs pos="100000">
+              <a:schemeClr val="phClr">
+                <a:shade val="63000"/>
+                <a:satMod val="120000"/>
+              </a:schemeClr>
+            </a:gs>
+          </a:gsLst>
+          <a:lin ang="5400000" scaled="0"/>
+        </a:gradFill>
+      </a:bgFillStyleLst>
+    </a:fmtScheme>
+  </a:themeElements>
+  <a:objectDefaults>
+    <a:lnDef>
+      <a:spPr/>
+      <a:bodyPr/>
+      <a:lstStyle/>
+      <a:style>
+        <a:lnRef idx="2">
+          <a:schemeClr val="accent1"/>
+        </a:lnRef>
+        <a:fillRef idx="0">
+          <a:schemeClr val="accent1"/>
+        </a:fillRef>
+        <a:effectRef idx="1">
+          <a:schemeClr val="accent1"/>
+        </a:effectRef>
+        <a:fontRef idx="minor">
+          <a:schemeClr val="tx1"/>
+        </a:fontRef>
+      </a:style>
+    </a:lnDef>
+  </a:objectDefaults>
+  <a:extraClrSchemeLst/>
+  <a:extLst>
+    <a:ext uri="{05A4C25C-085E-4340-85A3-A5531E510DB2}">
+      <thm15:themeFamily xmlns:thm15="http://schemas.microsoft.com/office/thememl/2012/main" name="Office Theme" id="{2E142A2C-CD16-42D6-873A-C26D2A0506FA}" vid="{1BDDFF52-6CD6-40A5-AB3C-68EB2F1E4D0A}"/>
+    </a:ext>
+  </a:extLst>
+</a:theme>
+</file>
+
+<file path=docMetadata/LabelInfo.xml><?xml version="1.0" encoding="utf-8"?>
+<clbl:labelList xmlns:clbl="http://schemas.microsoft.com/office/2020/mipLabelMetadata">
+  <clbl:label id="{f42aa342-8706-4288-bd11-ebb85995028c}" enabled="1" method="Standard" siteId="{72f988bf-86f1-41af-91ab-2d7cd011db47}" contentBits="0" removed="0"/>
+</clbl:labelList>
 </file>
--- a/docs/FY27 EMEA EPS - Fabric Apps Motion - Micro Hack.pptx
+++ b/docs/FY27 EMEA EPS - Fabric Apps Motion - Micro Hack.pptx
@@ -2477,7 +2477,7 @@
                 <a:ea typeface="Calibri" pitchFamily="34" charset="-122"/>
                 <a:cs typeface="Calibri" pitchFamily="34" charset="-120"/>
               </a:rPr>
-              <a:t>Same fixed, repeatable shape as Micro Hack 1 — but the artifact is a Fabric workload the SDC embeds in its offer.</a:t>
+              <a:t>Same fixed, repeatable shape as Micro Hack 1 — but the artifact is a Fabric workload the ISV embeds in its offer.</a:t>
             </a:r>
             <a:endParaRPr lang="en-US" sz="1450" dirty="0"/>
           </a:p>
@@ -2723,7 +2723,7 @@
                 <a:ea typeface="Calibri" pitchFamily="34" charset="-122"/>
                 <a:cs typeface="Calibri" pitchFamily="34" charset="-120"/>
               </a:rPr>
-              <a:t>MORNING — Content  (MS → Partner)</a:t>
+              <a:t>MORNING — Prez + Demo</a:t>
             </a:r>
             <a:endParaRPr lang="en-US" sz="1350" dirty="0"/>
           </a:p>
@@ -2830,7 +2830,7 @@
                 <a:ea typeface="Calibri" pitchFamily="34" charset="-122"/>
                 <a:cs typeface="Calibri" pitchFamily="34" charset="-120"/>
               </a:rPr>
-              <a:t>AFTERNOON — Build + Demo  (MS → Partner)</a:t>
+              <a:t>AFTERNOON — Build + Demo</a:t>
             </a:r>
             <a:endParaRPr lang="en-US" sz="1350" dirty="0"/>
           </a:p>
@@ -3880,7 +3880,7 @@
                 <a:ea typeface="Calibri" pitchFamily="34" charset="-122"/>
                 <a:cs typeface="Calibri" pitchFamily="34" charset="-120"/>
               </a:rPr>
-              <a:t>embed in the SDC offer + path to publish on the Workload Hub</a:t>
+              <a:t>embed in the ISV offer + path to publish on the Workload Hub</a:t>
             </a:r>
             <a:endParaRPr lang="en-US" sz="1150" dirty="0"/>
           </a:p>
@@ -3998,7 +3998,7 @@
                 <a:ea typeface="Calibri" pitchFamily="34" charset="-122"/>
                 <a:cs typeface="Calibri" pitchFamily="34" charset="-120"/>
               </a:rPr>
-              <a:t>The output is a Fabric workload the SDC embeds in its offer — so every customer adopts Fabric by design.</a:t>
+              <a:t>The output is a Fabric workload the ISV embeds in its offer — so every customer adopts Fabric by design.</a:t>
             </a:r>
             <a:endParaRPr lang="en-US" sz="1300" dirty="0"/>
           </a:p>
@@ -6206,7 +6206,23 @@
                 <a:ea typeface="Calibri" pitchFamily="34" charset="-122"/>
                 <a:cs typeface="Calibri" pitchFamily="34" charset="-120"/>
               </a:rPr>
-              <a:t># Micro Hacks repeated by the partner · # apps deployed · Fabric / Azure ACR pipeline.</a:t>
+              <a:t># Micro Hacks repeated by the partner</a:t>
+            </a:r>
+          </a:p>
+          <a:p>
+            <a:pPr marL="0" indent="0">
+              <a:buNone/>
+            </a:pPr>
+            <a:r>
+              <a:rPr lang="en-US" sz="1200" dirty="0">
+                <a:solidFill>
+                  <a:srgbClr val="1F2A3A"/>
+                </a:solidFill>
+                <a:latin typeface="Calibri" pitchFamily="34" charset="0"/>
+                <a:ea typeface="Calibri" pitchFamily="34" charset="-122"/>
+                <a:cs typeface="Calibri" pitchFamily="34" charset="-120"/>
+              </a:rPr>
+              <a:t># apps deployed · Fabric / Azure ACR pipeline.</a:t>
             </a:r>
             <a:endParaRPr lang="en-US" sz="1200" dirty="0"/>
           </a:p>
@@ -6499,7 +6515,7 @@
                 <a:ea typeface="Calibri" pitchFamily="34" charset="-122"/>
                 <a:cs typeface="Calibri" pitchFamily="34" charset="-120"/>
               </a:rPr>
-              <a:t>% of managed SDCs that built a Fabric workload</a:t>
+              <a:t>% of managed ISVs that built a Fabric workload</a:t>
             </a:r>
             <a:endParaRPr lang="en-US" sz="1050" dirty="0"/>
           </a:p>
@@ -6577,7 +6593,7 @@
                 <a:ea typeface="Calibri" pitchFamily="34" charset="-122"/>
                 <a:cs typeface="Calibri" pitchFamily="34" charset="-120"/>
               </a:rPr>
-              <a:t># workloads per SDC · Fabric usage / ACR from SDC end-customers.</a:t>
+              <a:t># workloads per ISV · Fabric usage / ACR from ISV end-customers.</a:t>
             </a:r>
             <a:endParaRPr lang="en-US" sz="1200" dirty="0"/>
           </a:p>
@@ -7518,7 +7534,7 @@
         <p:spPr>
           <a:xfrm>
             <a:off x="4572000" y="3401568"/>
-            <a:ext cx="1635176" cy="274320"/>
+            <a:ext cx="3489806" cy="274320"/>
           </a:xfrm>
           <a:prstGeom prst="roundRect">
             <a:avLst>
@@ -7598,7 +7614,7 @@
                 <a:ea typeface="Calibri" pitchFamily="34" charset="-122"/>
                 <a:cs typeface="Calibri" pitchFamily="34" charset="-120"/>
               </a:rPr>
-              <a:t>Path A — SIs repeat (own customers)</a:t>
+              <a:t>Path A — Frontier SIs repeat (own customers)</a:t>
             </a:r>
             <a:endParaRPr lang="en-US" sz="1150" dirty="0"/>
           </a:p>
@@ -7666,7 +7682,7 @@
                 <a:ea typeface="Calibri" pitchFamily="34" charset="-122"/>
                 <a:cs typeface="Calibri" pitchFamily="34" charset="-120"/>
               </a:rPr>
-              <a:t>Path A — Scale to other GSIs</a:t>
+              <a:t>Path A — Scale to other SIs</a:t>
             </a:r>
             <a:endParaRPr lang="en-US" sz="1150" dirty="0"/>
           </a:p>
@@ -7761,7 +7777,7 @@
                 <a:ea typeface="Calibri" pitchFamily="34" charset="-122"/>
                 <a:cs typeface="Calibri" pitchFamily="34" charset="-120"/>
               </a:rPr>
-              <a:t>Path B — SDC first workloads</a:t>
+              <a:t>Path B — ISV first workloads</a:t>
             </a:r>
             <a:endParaRPr lang="en-US" sz="1150" dirty="0"/>
           </a:p>
@@ -7775,7 +7791,7 @@
         </p:nvSpPr>
         <p:spPr>
           <a:xfrm>
-            <a:off x="4572000" y="4773168"/>
+            <a:off x="6353480" y="4764024"/>
             <a:ext cx="3416656" cy="274320"/>
           </a:xfrm>
           <a:prstGeom prst="roundRect">
@@ -8032,7 +8048,7 @@
                 <a:ea typeface="Calibri" pitchFamily="34" charset="-122"/>
                 <a:cs typeface="Calibri" pitchFamily="34" charset="-120"/>
               </a:rPr>
-              <a:t>first Micro Hack delivered live; partner pursuit team certified. Q2–Q3: partners repeat independently while we scale to other GSIs and SDCs.</a:t>
+              <a:t>first Micro Hack delivered live; partner pursuit team certified. Q2–Q3: partners repeat independently while we scale to other SIs and ISVs.</a:t>
             </a:r>
             <a:endParaRPr lang="en-US" sz="1250" dirty="0"/>
           </a:p>
@@ -8302,7 +8318,7 @@
         </p:nvSpPr>
         <p:spPr>
           <a:xfrm>
-            <a:off x="566928" y="1481328"/>
+            <a:off x="566928" y="2186548"/>
             <a:ext cx="2572436" cy="2926080"/>
           </a:xfrm>
           <a:prstGeom prst="roundRect">
@@ -8343,7 +8359,7 @@
         </p:nvSpPr>
         <p:spPr>
           <a:xfrm>
-            <a:off x="566928" y="1481328"/>
+            <a:off x="566928" y="2186548"/>
             <a:ext cx="2572436" cy="109728"/>
           </a:xfrm>
           <a:prstGeom prst="roundRect">
@@ -8372,7 +8388,7 @@
         </p:nvSpPr>
         <p:spPr>
           <a:xfrm>
-            <a:off x="1395946" y="1828800"/>
+            <a:off x="1395946" y="2534020"/>
             <a:ext cx="914400" cy="914400"/>
           </a:xfrm>
           <a:prstGeom prst="ellipse">
@@ -8399,7 +8415,7 @@
         </p:nvSpPr>
         <p:spPr>
           <a:xfrm>
-            <a:off x="1395946" y="1819656"/>
+            <a:off x="1395946" y="2524876"/>
             <a:ext cx="914400" cy="914400"/>
           </a:xfrm>
           <a:prstGeom prst="rect">
@@ -8438,7 +8454,7 @@
         </p:nvSpPr>
         <p:spPr>
           <a:xfrm>
-            <a:off x="566928" y="2926080"/>
+            <a:off x="566928" y="3631300"/>
             <a:ext cx="2572436" cy="365760"/>
           </a:xfrm>
           <a:prstGeom prst="rect">
@@ -8477,7 +8493,7 @@
         </p:nvSpPr>
         <p:spPr>
           <a:xfrm>
-            <a:off x="749808" y="3346704"/>
+            <a:off x="749808" y="4051924"/>
             <a:ext cx="2206676" cy="914400"/>
           </a:xfrm>
           <a:prstGeom prst="rect">
@@ -8502,7 +8518,7 @@
                 <a:ea typeface="Calibri" pitchFamily="34" charset="-122"/>
                 <a:cs typeface="Calibri" pitchFamily="34" charset="-120"/>
               </a:rPr>
-              <a:t>Ahmed + EPS leadership behind one ONE-Microsoft motion</a:t>
+              <a:t>Ahmed + EPS leadership behind ONE-Microsoft motion</a:t>
             </a:r>
             <a:endParaRPr lang="en-US" sz="1200" dirty="0"/>
           </a:p>
@@ -8516,7 +8532,7 @@
         </p:nvSpPr>
         <p:spPr>
           <a:xfrm>
-            <a:off x="3395396" y="1481328"/>
+            <a:off x="3395396" y="2186548"/>
             <a:ext cx="2572436" cy="2926080"/>
           </a:xfrm>
           <a:prstGeom prst="roundRect">
@@ -8557,7 +8573,7 @@
         </p:nvSpPr>
         <p:spPr>
           <a:xfrm>
-            <a:off x="3395396" y="1481328"/>
+            <a:off x="3395396" y="2186548"/>
             <a:ext cx="2572436" cy="109728"/>
           </a:xfrm>
           <a:prstGeom prst="roundRect">
@@ -8586,7 +8602,7 @@
         </p:nvSpPr>
         <p:spPr>
           <a:xfrm>
-            <a:off x="4224414" y="1828800"/>
+            <a:off x="4224414" y="2534020"/>
             <a:ext cx="914400" cy="914400"/>
           </a:xfrm>
           <a:prstGeom prst="ellipse">
@@ -8613,7 +8629,7 @@
         </p:nvSpPr>
         <p:spPr>
           <a:xfrm>
-            <a:off x="4224414" y="1819656"/>
+            <a:off x="4224414" y="2524876"/>
             <a:ext cx="914400" cy="914400"/>
           </a:xfrm>
           <a:prstGeom prst="rect">
@@ -8652,7 +8668,7 @@
         </p:nvSpPr>
         <p:spPr>
           <a:xfrm>
-            <a:off x="3395396" y="2926080"/>
+            <a:off x="3395396" y="3631300"/>
             <a:ext cx="2572436" cy="365760"/>
           </a:xfrm>
           <a:prstGeom prst="rect">
@@ -8691,7 +8707,7 @@
         </p:nvSpPr>
         <p:spPr>
           <a:xfrm>
-            <a:off x="3578276" y="3346704"/>
+            <a:off x="3578276" y="4051924"/>
             <a:ext cx="2206676" cy="914400"/>
           </a:xfrm>
           <a:prstGeom prst="rect">
@@ -8718,6 +8734,34 @@
               </a:rPr>
               <a:t>Build the kit + scenarios and run the first co-delivered sessions</a:t>
             </a:r>
+          </a:p>
+          <a:p>
+            <a:pPr marL="0" indent="0" algn="ctr">
+              <a:buNone/>
+            </a:pPr>
+            <a:r>
+              <a:rPr lang="en-US" sz="1200" dirty="0">
+                <a:solidFill>
+                  <a:srgbClr val="1F2A3A"/>
+                </a:solidFill>
+                <a:latin typeface="Calibri" pitchFamily="34" charset="0"/>
+                <a:ea typeface="Calibri" pitchFamily="34" charset="-122"/>
+                <a:cs typeface="Calibri" pitchFamily="34" charset="-120"/>
+              </a:rPr>
+              <a:t>(Lunch $$$ </a:t>
+            </a:r>
+            <a:r>
+              <a:rPr lang="en-US" sz="1200" dirty="0">
+                <a:solidFill>
+                  <a:srgbClr val="1F2A3A"/>
+                </a:solidFill>
+                <a:latin typeface="Calibri" pitchFamily="34" charset="0"/>
+                <a:ea typeface="Calibri" pitchFamily="34" charset="-122"/>
+                <a:cs typeface="Calibri" pitchFamily="34" charset="-120"/>
+                <a:sym typeface="Wingdings" panose="05000000000000000000" pitchFamily="2" charset="2"/>
+              </a:rPr>
+              <a:t>)</a:t>
+            </a:r>
             <a:endParaRPr lang="en-US" sz="1200" dirty="0"/>
           </a:p>
         </p:txBody>
@@ -8730,7 +8774,7 @@
         </p:nvSpPr>
         <p:spPr>
           <a:xfrm>
-            <a:off x="6223864" y="1481328"/>
+            <a:off x="6223864" y="2186548"/>
             <a:ext cx="2572436" cy="2926080"/>
           </a:xfrm>
           <a:prstGeom prst="roundRect">
@@ -8771,7 +8815,7 @@
         </p:nvSpPr>
         <p:spPr>
           <a:xfrm>
-            <a:off x="6223864" y="1481328"/>
+            <a:off x="6223864" y="2186548"/>
             <a:ext cx="2572436" cy="109728"/>
           </a:xfrm>
           <a:prstGeom prst="roundRect">
@@ -8800,7 +8844,7 @@
         </p:nvSpPr>
         <p:spPr>
           <a:xfrm>
-            <a:off x="7052882" y="1828800"/>
+            <a:off x="7052882" y="2534020"/>
             <a:ext cx="914400" cy="914400"/>
           </a:xfrm>
           <a:prstGeom prst="ellipse">
@@ -8827,7 +8871,7 @@
         </p:nvSpPr>
         <p:spPr>
           <a:xfrm>
-            <a:off x="7052882" y="1819656"/>
+            <a:off x="7052882" y="2524876"/>
             <a:ext cx="914400" cy="914400"/>
           </a:xfrm>
           <a:prstGeom prst="rect">
@@ -8866,7 +8910,7 @@
         </p:nvSpPr>
         <p:spPr>
           <a:xfrm>
-            <a:off x="6223864" y="2926080"/>
+            <a:off x="6223864" y="3631300"/>
             <a:ext cx="2572436" cy="365760"/>
           </a:xfrm>
           <a:prstGeom prst="rect">
@@ -8905,7 +8949,7 @@
         </p:nvSpPr>
         <p:spPr>
           <a:xfrm>
-            <a:off x="6406744" y="3346704"/>
+            <a:off x="6406744" y="4051924"/>
             <a:ext cx="2206676" cy="914400"/>
           </a:xfrm>
           <a:prstGeom prst="rect">
@@ -8944,7 +8988,7 @@
         </p:nvSpPr>
         <p:spPr>
           <a:xfrm>
-            <a:off x="9052331" y="1481328"/>
+            <a:off x="9052331" y="2186548"/>
             <a:ext cx="2572436" cy="2926080"/>
           </a:xfrm>
           <a:prstGeom prst="roundRect">
@@ -8985,7 +9029,7 @@
         </p:nvSpPr>
         <p:spPr>
           <a:xfrm>
-            <a:off x="9052331" y="1481328"/>
+            <a:off x="9052331" y="2186548"/>
             <a:ext cx="2572436" cy="109728"/>
           </a:xfrm>
           <a:prstGeom prst="roundRect">
@@ -9014,7 +9058,7 @@
         </p:nvSpPr>
         <p:spPr>
           <a:xfrm>
-            <a:off x="9881349" y="1828800"/>
+            <a:off x="9881349" y="2534020"/>
             <a:ext cx="914400" cy="914400"/>
           </a:xfrm>
           <a:prstGeom prst="ellipse">
@@ -9041,7 +9085,7 @@
         </p:nvSpPr>
         <p:spPr>
           <a:xfrm>
-            <a:off x="9881349" y="1819656"/>
+            <a:off x="9881349" y="2524876"/>
             <a:ext cx="914400" cy="914400"/>
           </a:xfrm>
           <a:prstGeom prst="rect">
@@ -9080,7 +9124,7 @@
         </p:nvSpPr>
         <p:spPr>
           <a:xfrm>
-            <a:off x="9052331" y="2926080"/>
+            <a:off x="9052331" y="3631300"/>
             <a:ext cx="2572436" cy="365760"/>
           </a:xfrm>
           <a:prstGeom prst="rect">
@@ -9119,7 +9163,7 @@
         </p:nvSpPr>
         <p:spPr>
           <a:xfrm>
-            <a:off x="9235211" y="3346704"/>
+            <a:off x="9235211" y="4051924"/>
             <a:ext cx="2206676" cy="914400"/>
           </a:xfrm>
           <a:prstGeom prst="rect">
@@ -9144,99 +9188,9 @@
                 <a:ea typeface="Calibri" pitchFamily="34" charset="-122"/>
                 <a:cs typeface="Calibri" pitchFamily="34" charset="-120"/>
               </a:rPr>
-              <a:t>SDC + Advisory → one execution layer, not parallel tracks</a:t>
+              <a:t>ISV + Advisory → one execution layer, not parallel tracks</a:t>
             </a:r>
             <a:endParaRPr lang="en-US" sz="1200" dirty="0"/>
-          </a:p>
-        </p:txBody>
-      </p:sp>
-      <p:sp>
-        <p:nvSpPr>
-          <p:cNvPr id="31" name="Shape 29"/>
-          <p:cNvSpPr/>
-          <p:nvPr/>
-        </p:nvSpPr>
-        <p:spPr>
-          <a:xfrm>
-            <a:off x="566928" y="4663440"/>
-            <a:ext cx="11057839" cy="1234440"/>
-          </a:xfrm>
-          <a:prstGeom prst="roundRect">
-            <a:avLst>
-              <a:gd name="adj" fmla="val 5926"/>
-            </a:avLst>
-          </a:prstGeom>
-          <a:solidFill>
-            <a:srgbClr val="1F3A5F"/>
-          </a:solidFill>
-          <a:ln/>
-        </p:spPr>
-        <p:txBody>
-          <a:bodyPr/>
-          <a:lstStyle/>
-          <a:p>
-            <a:endParaRPr lang="en-GB"/>
-          </a:p>
-        </p:txBody>
-      </p:sp>
-      <p:sp>
-        <p:nvSpPr>
-          <p:cNvPr id="32" name="Text 30"/>
-          <p:cNvSpPr/>
-          <p:nvPr/>
-        </p:nvSpPr>
-        <p:spPr>
-          <a:xfrm>
-            <a:off x="841248" y="4754880"/>
-            <a:ext cx="10509199" cy="1051560"/>
-          </a:xfrm>
-          <a:prstGeom prst="rect">
-            <a:avLst/>
-          </a:prstGeom>
-          <a:noFill/>
-          <a:ln/>
-        </p:spPr>
-        <p:txBody>
-          <a:bodyPr wrap="square" rtlCol="0" anchor="ctr"/>
-          <a:lstStyle/>
-          <a:p>
-            <a:pPr marL="0" indent="0">
-              <a:buNone/>
-            </a:pPr>
-            <a:r>
-              <a:rPr lang="en-US" sz="1400" b="1" dirty="0">
-                <a:solidFill>
-                  <a:srgbClr val="2FB6E0"/>
-                </a:solidFill>
-                <a:latin typeface="Calibri" pitchFamily="34" charset="0"/>
-                <a:ea typeface="Calibri" pitchFamily="34" charset="-122"/>
-                <a:cs typeface="Calibri" pitchFamily="34" charset="-120"/>
-              </a:rPr>
-              <a:t>What “good” looks like   </a:t>
-            </a:r>
-            <a:r>
-              <a:rPr lang="en-US" sz="1300" dirty="0">
-                <a:solidFill>
-                  <a:srgbClr val="FFFFFF"/>
-                </a:solidFill>
-                <a:latin typeface="Calibri" pitchFamily="34" charset="0"/>
-                <a:ea typeface="Calibri" pitchFamily="34" charset="-122"/>
-                <a:cs typeface="Calibri" pitchFamily="34" charset="-120"/>
-              </a:rPr>
-              <a:t>every Fabric / app conversation becomes a real opportunity or a built workload — </a:t>
-            </a:r>
-            <a:r>
-              <a:rPr lang="en-US" sz="1300" b="1" dirty="0">
-                <a:solidFill>
-                  <a:srgbClr val="FFFFFF"/>
-                </a:solidFill>
-                <a:latin typeface="Calibri" pitchFamily="34" charset="0"/>
-                <a:ea typeface="Calibri" pitchFamily="34" charset="-122"/>
-                <a:cs typeface="Calibri" pitchFamily="34" charset="-120"/>
-              </a:rPr>
-              <a:t>generated in the Micro Hack, owned and repeated by the partner.</a:t>
-            </a:r>
-            <a:endParaRPr lang="en-US" sz="1400" dirty="0"/>
           </a:p>
         </p:txBody>
       </p:sp>
@@ -9954,7 +9908,7 @@
                 <a:ea typeface="Calibri" pitchFamily="34" charset="-122"/>
                 <a:cs typeface="Calibri" pitchFamily="34" charset="-120"/>
               </a:rPr>
-              <a:t>System Integrators (SI / advisory) · start with the GSIs</a:t>
+              <a:t>System Integrators / Advisory</a:t>
             </a:r>
             <a:endParaRPr lang="en-US" sz="1300" dirty="0"/>
           </a:p>
@@ -10325,7 +10279,7 @@
                 <a:ea typeface="Calibri" pitchFamily="34" charset="-122"/>
                 <a:cs typeface="Calibri" pitchFamily="34" charset="-120"/>
               </a:rPr>
-              <a:t>Software Development Companies (SDC / ISV)</a:t>
+              <a:t>ISV</a:t>
             </a:r>
             <a:endParaRPr lang="en-US" sz="1300" dirty="0"/>
           </a:p>
@@ -10403,7 +10357,7 @@
                 <a:ea typeface="Calibri" pitchFamily="34" charset="-122"/>
                 <a:cs typeface="Calibri" pitchFamily="34" charset="-120"/>
               </a:rPr>
-              <a:t>Every managed SDC embeds a Fabric workload in its offer — so every customer consumes a data workload.</a:t>
+              <a:t>Every managed ISV embeds a Fabric workload in its offer — so every customer consumes a data workload.</a:t>
             </a:r>
             <a:endParaRPr lang="en-US" sz="1350" dirty="0"/>
           </a:p>
@@ -10482,7 +10436,7 @@
                 <a:ea typeface="Calibri" pitchFamily="34" charset="-122"/>
                 <a:cs typeface="Calibri" pitchFamily="34" charset="-120"/>
               </a:rPr>
-              <a:t>% of managed SDCs that built a workload</a:t>
+              <a:t>% of managed ISVs that built a workload</a:t>
             </a:r>
             <a:endParaRPr lang="en-US" sz="1050" dirty="0"/>
           </a:p>
@@ -10572,7 +10526,7 @@
                 <a:ea typeface="Calibri" pitchFamily="34" charset="-122"/>
                 <a:cs typeface="Calibri" pitchFamily="34" charset="-120"/>
               </a:rPr>
-              <a:t>one turnkey, repeatable vehicle — the “Micro Hack” — that an SI or SDC can run themselves.</a:t>
+              <a:t>one turnkey, repeatable vehicle — the “Micro Hack” — that an SI or ISV can run themselves.</a:t>
             </a:r>
             <a:endParaRPr lang="en-US" sz="1400" dirty="0"/>
           </a:p>
@@ -11289,7 +11243,7 @@
                 <a:ea typeface="Calibri" pitchFamily="34" charset="-122"/>
                 <a:cs typeface="Calibri" pitchFamily="34" charset="-120"/>
               </a:rPr>
-              <a:t>why Fabric · Rayfin · Toolkit</a:t>
+              <a:t>why Fabric · Rayfin · MFE</a:t>
             </a:r>
             <a:endParaRPr lang="en-US" sz="1100" dirty="0"/>
           </a:p>
@@ -11530,7 +11484,7 @@
                 <a:ea typeface="Calibri" pitchFamily="34" charset="-122"/>
                 <a:cs typeface="Calibri" pitchFamily="34" charset="-120"/>
               </a:rPr>
-              <a:t>Path A — SI / advisory</a:t>
+              <a:t>Path A — SI / advisories</a:t>
             </a:r>
             <a:endParaRPr lang="en-US" sz="1400" dirty="0"/>
           </a:p>
@@ -11748,7 +11702,7 @@
                 <a:ea typeface="Calibri" pitchFamily="34" charset="-122"/>
                 <a:cs typeface="Calibri" pitchFamily="34" charset="-120"/>
               </a:rPr>
-              <a:t>Path B — SDC / ISV</a:t>
+              <a:t>Path B — ISV</a:t>
             </a:r>
             <a:endParaRPr lang="en-US" sz="1400" dirty="0"/>
           </a:p>
@@ -11866,7 +11820,7 @@
                 <a:ea typeface="Calibri" pitchFamily="34" charset="-122"/>
                 <a:cs typeface="Calibri" pitchFamily="34" charset="-120"/>
               </a:rPr>
-              <a:t># workloads per SDC</a:t>
+              <a:t># workloads per ISV</a:t>
             </a:r>
             <a:endParaRPr lang="en-US" sz="1050" dirty="0"/>
           </a:p>
@@ -13698,7 +13652,7 @@
                 <a:ea typeface="Calibri" pitchFamily="34" charset="-122"/>
                 <a:cs typeface="Calibri" pitchFamily="34" charset="-120"/>
               </a:rPr>
-              <a:t>Focus: GSIs first. Enable partners to build &amp; ship customer business apps on Fabric, partner-led.</a:t>
+              <a:t>Focus: Enable partners to build &amp; ship customer business apps on Fabric, partner-led.</a:t>
             </a:r>
             <a:endParaRPr lang="en-US" sz="1450" dirty="0"/>
           </a:p>
@@ -14392,7 +14346,23 @@
                 <a:ea typeface="Calibri" pitchFamily="34" charset="-122"/>
                 <a:cs typeface="Calibri" pitchFamily="34" charset="-120"/>
               </a:rPr>
-              <a:t># of “Micro Hack” days repeated by the partner · # of apps deployed to Fabric · Azure/Fabric pipeline.</a:t>
+              <a:t># of “Micro Hack” days repeated by the partner</a:t>
+            </a:r>
+          </a:p>
+          <a:p>
+            <a:pPr marL="0" indent="0">
+              <a:buNone/>
+            </a:pPr>
+            <a:r>
+              <a:rPr lang="en-US" sz="1250" dirty="0">
+                <a:solidFill>
+                  <a:srgbClr val="1F2A3A"/>
+                </a:solidFill>
+                <a:latin typeface="Calibri" pitchFamily="34" charset="0"/>
+                <a:ea typeface="Calibri" pitchFamily="34" charset="-122"/>
+                <a:cs typeface="Calibri" pitchFamily="34" charset="-120"/>
+              </a:rPr>
+              <a:t># of apps deployed to Fabric · Azure/Fabric pipeline.</a:t>
             </a:r>
             <a:endParaRPr lang="en-US" sz="1250" dirty="0"/>
           </a:p>
@@ -14577,7 +14547,7 @@
                 <a:ea typeface="Calibri" pitchFamily="34" charset="-122"/>
                 <a:cs typeface="Calibri" pitchFamily="34" charset="-120"/>
               </a:rPr>
-              <a:t>STU per country + EPS (PDM / PSA), with one executive sponsor per SI / GSI.</a:t>
+              <a:t>EPS (PDM / PTS / PSA), with one executive sponsor per SI</a:t>
             </a:r>
             <a:endParaRPr lang="en-US" sz="1250" dirty="0"/>
           </a:p>
@@ -14940,7 +14910,7 @@
                 <a:ea typeface="Calibri" pitchFamily="34" charset="-122"/>
                 <a:cs typeface="Calibri" pitchFamily="34" charset="-120"/>
               </a:rPr>
-              <a:t>MORNING — Content  (MS → Partner)</a:t>
+              <a:t>MORNING — Prez + Demo</a:t>
             </a:r>
             <a:endParaRPr lang="en-US" sz="1350" dirty="0"/>
           </a:p>
@@ -15047,7 +15017,7 @@
                 <a:ea typeface="Calibri" pitchFamily="34" charset="-122"/>
                 <a:cs typeface="Calibri" pitchFamily="34" charset="-120"/>
               </a:rPr>
-              <a:t>AFTERNOON — Build + Demo  (MS → Partner)</a:t>
+              <a:t>AFTERNOON — Build + Demo</a:t>
             </a:r>
             <a:endParaRPr lang="en-US" sz="1350" dirty="0"/>
           </a:p>
@@ -19816,7 +19786,7 @@
                 <a:ea typeface="Calibri Light" pitchFamily="34" charset="-122"/>
                 <a:cs typeface="Calibri Light" pitchFamily="34" charset="-120"/>
               </a:rPr>
-              <a:t>Path B — SDC / ISV (Workloads)</a:t>
+              <a:t>Path B —ISV (Workloads)</a:t>
             </a:r>
             <a:endParaRPr lang="en-US" sz="3200" dirty="0"/>
           </a:p>
@@ -20142,7 +20112,7 @@
                 <a:ea typeface="Calibri" pitchFamily="34" charset="-122"/>
                 <a:cs typeface="Calibri" pitchFamily="34" charset="-120"/>
               </a:rPr>
-              <a:t>Get every Microsoft-managed SDC to embed a Fabric workload (Extensibility Toolkit) inside its commercial offer — so every time a customer uses the product, a Fabric data workload is consumed by design.</a:t>
+              <a:t>Get every Microsoft-managed ISV to embed a Fabric workload (Extensibility Toolkit) inside its commercial offer — so every time a customer uses the product, a Fabric data workload is consumed by design.</a:t>
             </a:r>
             <a:endParaRPr lang="en-US" sz="1300" dirty="0"/>
           </a:p>
@@ -20221,7 +20191,7 @@
                 <a:ea typeface="Calibri" pitchFamily="34" charset="-122"/>
                 <a:cs typeface="Calibri" pitchFamily="34" charset="-120"/>
               </a:rPr>
-              <a:t>When an SDC standardizes on a Fabric workload, its entire customer base becomes ongoing Fabric adoption.</a:t>
+              <a:t>When an ISV standardizes on a Fabric workload, its entire customer base becomes ongoing Fabric adoption.</a:t>
             </a:r>
             <a:endParaRPr lang="en-US" sz="1200" dirty="0"/>
           </a:p>
@@ -20300,7 +20270,7 @@
                 <a:ea typeface="Calibri" pitchFamily="34" charset="-122"/>
                 <a:cs typeface="Calibri" pitchFamily="34" charset="-120"/>
               </a:rPr>
-              <a:t>% of managed SDCs that built a Fabric workload</a:t>
+              <a:t>% of managed ISVs that built a Fabric workload</a:t>
             </a:r>
             <a:endParaRPr lang="en-US" sz="1100" dirty="0"/>
           </a:p>
@@ -20457,7 +20427,7 @@
                 <a:ea typeface="Calibri" pitchFamily="34" charset="-122"/>
                 <a:cs typeface="Calibri" pitchFamily="34" charset="-120"/>
               </a:rPr>
-              <a:t>Microsoft-managed SDC</a:t>
+              <a:t>Microsoft-managed ISV</a:t>
             </a:r>
             <a:endParaRPr lang="en-US" sz="1350" dirty="0"/>
           </a:p>
@@ -20655,7 +20625,7 @@
                 <a:ea typeface="Calibri" pitchFamily="34" charset="-122"/>
                 <a:cs typeface="Calibri" pitchFamily="34" charset="-120"/>
               </a:rPr>
-              <a:t>SDC product / offer</a:t>
+              <a:t>ISV product / offer</a:t>
             </a:r>
             <a:endParaRPr lang="en-US" sz="1350" dirty="0"/>
           </a:p>

--- a/docs/FY27 EMEA EPS - Fabric Apps Motion - Micro Hack.pptx
+++ b/docs/FY27 EMEA EPS - Fabric Apps Motion - Micro Hack.pptx
@@ -2165,7 +2165,7 @@
         </p:blipFill>
         <p:spPr>
           <a:xfrm>
-            <a:off x="3091940" y="4656215"/>
+            <a:off x="2374764" y="4656215"/>
             <a:ext cx="1046896" cy="1080000"/>
           </a:xfrm>
           <a:prstGeom prst="ellipse">
@@ -2203,7 +2203,7 @@
         </p:blipFill>
         <p:spPr>
           <a:xfrm>
-            <a:off x="4424427" y="4656215"/>
+            <a:off x="3707251" y="4656215"/>
             <a:ext cx="1080000" cy="1080000"/>
           </a:xfrm>
           <a:prstGeom prst="ellipse">
@@ -2238,7 +2238,7 @@
         </p:blipFill>
         <p:spPr>
           <a:xfrm>
-            <a:off x="5790018" y="4656215"/>
+            <a:off x="5072842" y="4656215"/>
             <a:ext cx="1091887" cy="1080000"/>
           </a:xfrm>
           <a:prstGeom prst="ellipse">
@@ -2273,7 +2273,7 @@
         </p:blipFill>
         <p:spPr>
           <a:xfrm>
-            <a:off x="7167496" y="4656215"/>
+            <a:off x="6450320" y="4656215"/>
             <a:ext cx="1080000" cy="1080000"/>
           </a:xfrm>
           <a:prstGeom prst="ellipse">
@@ -2308,7 +2308,7 @@
         </p:blipFill>
         <p:spPr>
           <a:xfrm>
-            <a:off x="8533087" y="4656215"/>
+            <a:off x="7815911" y="4656215"/>
             <a:ext cx="1080000" cy="1080000"/>
           </a:xfrm>
           <a:prstGeom prst="ellipse">
@@ -2335,7 +2335,7 @@
         </p:nvSpPr>
         <p:spPr>
           <a:xfrm>
-            <a:off x="4401556" y="5760720"/>
+            <a:off x="4335815" y="5806440"/>
             <a:ext cx="3868809" cy="365760"/>
           </a:xfrm>
           <a:prstGeom prst="rect">
@@ -2360,12 +2360,45 @@
                 <a:ea typeface="Calibri" pitchFamily="34" charset="-122"/>
                 <a:cs typeface="Calibri" pitchFamily="34" charset="-120"/>
               </a:rPr>
-              <a:t>EMEA PSA Data Team</a:t>
+              <a:t>EMEA PSA Data &amp; Apps Team</a:t>
             </a:r>
             <a:endParaRPr lang="en-US" sz="1300" dirty="0"/>
           </a:p>
         </p:txBody>
       </p:sp>
+      <p:pic>
+        <p:nvPicPr>
+          <p:cNvPr id="5" name="Picture 4" descr="A person wearing a black t-shirt with a red samurai print and a Japanese kanji character on it.&#10;&#10;AI-generated content may be incorrect.">
+            <a:extLst>
+              <a:ext uri="{FF2B5EF4-FFF2-40B4-BE49-F238E27FC236}">
+                <a16:creationId xmlns:a16="http://schemas.microsoft.com/office/drawing/2014/main" id="{1430857B-BAFB-CA0E-7151-93E1DE1E92B1}"/>
+              </a:ext>
+              <a:ext uri="{C183D7F6-B498-43B3-948B-1728B52AA6E4}">
+                <adec:decorative xmlns:adec="http://schemas.microsoft.com/office/drawing/2017/decorative" val="1"/>
+              </a:ext>
+            </a:extLst>
+          </p:cNvPr>
+          <p:cNvPicPr>
+            <a:picLocks noChangeAspect="1"/>
+          </p:cNvPicPr>
+          <p:nvPr/>
+        </p:nvPicPr>
+        <p:blipFill>
+          <a:blip r:embed="rId9"/>
+          <a:stretch>
+            <a:fillRect/>
+          </a:stretch>
+        </p:blipFill>
+        <p:spPr>
+          <a:xfrm>
+            <a:off x="9181502" y="4656215"/>
+            <a:ext cx="925714" cy="1080000"/>
+          </a:xfrm>
+          <a:prstGeom prst="ellipse">
+            <a:avLst/>
+          </a:prstGeom>
+        </p:spPr>
+      </p:pic>
     </p:spTree>
   </p:cSld>
   <p:clrMapOvr>
